--- a/tasks/bird_spatiotemporal_patterns/figures/fig_sp06_province_stacked_barline_top10.pptx
+++ b/tasks/bird_spatiotemporal_patterns/figures/fig_sp06_province_stacked_barline_top10.pptx
@@ -1,23 +1,20 @@
 
 <file path=ppt/presentation.xml><?xml version="1.0" encoding="utf-8"?>
-<p:presentation xmlns:a="http://schemas.openxmlformats.org/drawingml/2006/main" xmlns:r="http://schemas.openxmlformats.org/officeDocument/2006/relationships" xmlns:p="http://schemas.openxmlformats.org/presentationml/2006/main" saveSubsetFonts="1">
+<p:presentation xmlns:a="http://schemas.openxmlformats.org/drawingml/2006/main" xmlns:r="http://schemas.openxmlformats.org/officeDocument/2006/relationships" xmlns:p="http://schemas.openxmlformats.org/presentationml/2006/main" saveSubsetFonts="1" autoCompressPictures="0">
   <p:sldMasterIdLst>
     <p:sldMasterId id="2147483648" r:id="rId1"/>
   </p:sldMasterIdLst>
   <p:sldIdLst>
-    <p:sldId id="256" r:id="rId8"/>
+    <p:sldId id="256" r:id="rId6"/>
   </p:sldIdLst>
-  <p:sldSz cx="9144000" cy="6858000" type="screen4x3"/>
+  <p:sldSz cx="15087600" cy="10698163"/>
   <p:notesSz cx="6858000" cy="9144000"/>
-  <p:custDataLst>
-    <p:tags r:id="rId3"/>
-  </p:custDataLst>
   <p:defaultTextStyle>
     <a:defPPr>
       <a:defRPr lang="en-US"/>
     </a:defPPr>
-    <a:lvl1pPr marL="0" algn="l" defTabSz="914400" rtl="0" eaLnBrk="1" latinLnBrk="0" hangingPunct="1">
-      <a:defRPr sz="1800" kern="1200">
+    <a:lvl1pPr marL="0" algn="l" defTabSz="1052474" rtl="0" eaLnBrk="1" latinLnBrk="0" hangingPunct="1">
+      <a:defRPr sz="2100" kern="1200">
         <a:solidFill>
           <a:schemeClr val="tx1"/>
         </a:solidFill>
@@ -26,8 +23,8 @@
         <a:cs typeface="+mn-cs"/>
       </a:defRPr>
     </a:lvl1pPr>
-    <a:lvl2pPr marL="457200" algn="l" defTabSz="914400" rtl="0" eaLnBrk="1" latinLnBrk="0" hangingPunct="1">
-      <a:defRPr sz="1800" kern="1200">
+    <a:lvl2pPr marL="526237" algn="l" defTabSz="1052474" rtl="0" eaLnBrk="1" latinLnBrk="0" hangingPunct="1">
+      <a:defRPr sz="2100" kern="1200">
         <a:solidFill>
           <a:schemeClr val="tx1"/>
         </a:solidFill>
@@ -36,8 +33,8 @@
         <a:cs typeface="+mn-cs"/>
       </a:defRPr>
     </a:lvl2pPr>
-    <a:lvl3pPr marL="914400" algn="l" defTabSz="914400" rtl="0" eaLnBrk="1" latinLnBrk="0" hangingPunct="1">
-      <a:defRPr sz="1800" kern="1200">
+    <a:lvl3pPr marL="1052474" algn="l" defTabSz="1052474" rtl="0" eaLnBrk="1" latinLnBrk="0" hangingPunct="1">
+      <a:defRPr sz="2100" kern="1200">
         <a:solidFill>
           <a:schemeClr val="tx1"/>
         </a:solidFill>
@@ -46,8 +43,8 @@
         <a:cs typeface="+mn-cs"/>
       </a:defRPr>
     </a:lvl3pPr>
-    <a:lvl4pPr marL="1371600" algn="l" defTabSz="914400" rtl="0" eaLnBrk="1" latinLnBrk="0" hangingPunct="1">
-      <a:defRPr sz="1800" kern="1200">
+    <a:lvl4pPr marL="1578712" algn="l" defTabSz="1052474" rtl="0" eaLnBrk="1" latinLnBrk="0" hangingPunct="1">
+      <a:defRPr sz="2100" kern="1200">
         <a:solidFill>
           <a:schemeClr val="tx1"/>
         </a:solidFill>
@@ -56,8 +53,8 @@
         <a:cs typeface="+mn-cs"/>
       </a:defRPr>
     </a:lvl4pPr>
-    <a:lvl5pPr marL="1828800" algn="l" defTabSz="914400" rtl="0" eaLnBrk="1" latinLnBrk="0" hangingPunct="1">
-      <a:defRPr sz="1800" kern="1200">
+    <a:lvl5pPr marL="2104949" algn="l" defTabSz="1052474" rtl="0" eaLnBrk="1" latinLnBrk="0" hangingPunct="1">
+      <a:defRPr sz="2100" kern="1200">
         <a:solidFill>
           <a:schemeClr val="tx1"/>
         </a:solidFill>
@@ -66,8 +63,8 @@
         <a:cs typeface="+mn-cs"/>
       </a:defRPr>
     </a:lvl5pPr>
-    <a:lvl6pPr marL="2286000" algn="l" defTabSz="914400" rtl="0" eaLnBrk="1" latinLnBrk="0" hangingPunct="1">
-      <a:defRPr sz="1800" kern="1200">
+    <a:lvl6pPr marL="2631186" algn="l" defTabSz="1052474" rtl="0" eaLnBrk="1" latinLnBrk="0" hangingPunct="1">
+      <a:defRPr sz="2100" kern="1200">
         <a:solidFill>
           <a:schemeClr val="tx1"/>
         </a:solidFill>
@@ -76,8 +73,8 @@
         <a:cs typeface="+mn-cs"/>
       </a:defRPr>
     </a:lvl6pPr>
-    <a:lvl7pPr marL="2743200" algn="l" defTabSz="914400" rtl="0" eaLnBrk="1" latinLnBrk="0" hangingPunct="1">
-      <a:defRPr sz="1800" kern="1200">
+    <a:lvl7pPr marL="3157423" algn="l" defTabSz="1052474" rtl="0" eaLnBrk="1" latinLnBrk="0" hangingPunct="1">
+      <a:defRPr sz="2100" kern="1200">
         <a:solidFill>
           <a:schemeClr val="tx1"/>
         </a:solidFill>
@@ -86,8 +83,8 @@
         <a:cs typeface="+mn-cs"/>
       </a:defRPr>
     </a:lvl7pPr>
-    <a:lvl8pPr marL="3200400" algn="l" defTabSz="914400" rtl="0" eaLnBrk="1" latinLnBrk="0" hangingPunct="1">
-      <a:defRPr sz="1800" kern="1200">
+    <a:lvl8pPr marL="3683660" algn="l" defTabSz="1052474" rtl="0" eaLnBrk="1" latinLnBrk="0" hangingPunct="1">
+      <a:defRPr sz="2100" kern="1200">
         <a:solidFill>
           <a:schemeClr val="tx1"/>
         </a:solidFill>
@@ -96,8 +93,8 @@
         <a:cs typeface="+mn-cs"/>
       </a:defRPr>
     </a:lvl8pPr>
-    <a:lvl9pPr marL="3657600" algn="l" defTabSz="914400" rtl="0" eaLnBrk="1" latinLnBrk="0" hangingPunct="1">
-      <a:defRPr sz="1800" kern="1200">
+    <a:lvl9pPr marL="4209898" algn="l" defTabSz="1052474" rtl="0" eaLnBrk="1" latinLnBrk="0" hangingPunct="1">
+      <a:defRPr sz="2100" kern="1200">
         <a:solidFill>
           <a:schemeClr val="tx1"/>
         </a:solidFill>
@@ -139,8 +136,8 @@
         </p:nvSpPr>
         <p:spPr>
           <a:xfrm>
-            <a:off x="685800" y="2130425"/>
-            <a:ext cx="7772400" cy="1470025"/>
+            <a:off x="1131570" y="3323370"/>
+            <a:ext cx="12824460" cy="2293171"/>
           </a:xfrm>
         </p:spPr>
         <p:txBody>
@@ -167,8 +164,8 @@
         </p:nvSpPr>
         <p:spPr>
           <a:xfrm>
-            <a:off x="1371600" y="3886200"/>
-            <a:ext cx="6400800" cy="1752600"/>
+            <a:off x="2263140" y="6062292"/>
+            <a:ext cx="10561320" cy="2733975"/>
           </a:xfrm>
         </p:spPr>
         <p:txBody>
@@ -184,7 +181,7 @@
                 </a:solidFill>
               </a:defRPr>
             </a:lvl1pPr>
-            <a:lvl2pPr marL="457200" indent="0" algn="ctr">
+            <a:lvl2pPr marL="526237" indent="0" algn="ctr">
               <a:buNone/>
               <a:defRPr>
                 <a:solidFill>
@@ -194,7 +191,7 @@
                 </a:solidFill>
               </a:defRPr>
             </a:lvl2pPr>
-            <a:lvl3pPr marL="914400" indent="0" algn="ctr">
+            <a:lvl3pPr marL="1052474" indent="0" algn="ctr">
               <a:buNone/>
               <a:defRPr>
                 <a:solidFill>
@@ -204,7 +201,7 @@
                 </a:solidFill>
               </a:defRPr>
             </a:lvl3pPr>
-            <a:lvl4pPr marL="1371600" indent="0" algn="ctr">
+            <a:lvl4pPr marL="1578712" indent="0" algn="ctr">
               <a:buNone/>
               <a:defRPr>
                 <a:solidFill>
@@ -214,7 +211,7 @@
                 </a:solidFill>
               </a:defRPr>
             </a:lvl4pPr>
-            <a:lvl5pPr marL="1828800" indent="0" algn="ctr">
+            <a:lvl5pPr marL="2104949" indent="0" algn="ctr">
               <a:buNone/>
               <a:defRPr>
                 <a:solidFill>
@@ -224,7 +221,7 @@
                 </a:solidFill>
               </a:defRPr>
             </a:lvl5pPr>
-            <a:lvl6pPr marL="2286000" indent="0" algn="ctr">
+            <a:lvl6pPr marL="2631186" indent="0" algn="ctr">
               <a:buNone/>
               <a:defRPr>
                 <a:solidFill>
@@ -234,7 +231,7 @@
                 </a:solidFill>
               </a:defRPr>
             </a:lvl6pPr>
-            <a:lvl7pPr marL="2743200" indent="0" algn="ctr">
+            <a:lvl7pPr marL="3157423" indent="0" algn="ctr">
               <a:buNone/>
               <a:defRPr>
                 <a:solidFill>
@@ -244,7 +241,7 @@
                 </a:solidFill>
               </a:defRPr>
             </a:lvl7pPr>
-            <a:lvl8pPr marL="3200400" indent="0" algn="ctr">
+            <a:lvl8pPr marL="3683660" indent="0" algn="ctr">
               <a:buNone/>
               <a:defRPr>
                 <a:solidFill>
@@ -254,7 +251,7 @@
                 </a:solidFill>
               </a:defRPr>
             </a:lvl8pPr>
-            <a:lvl9pPr marL="3657600" indent="0" algn="ctr">
+            <a:lvl9pPr marL="4209898" indent="0" algn="ctr">
               <a:buNone/>
               <a:defRPr>
                 <a:solidFill>
@@ -289,9 +286,9 @@
           <a:bodyPr/>
           <a:lstStyle/>
           <a:p>
-            <a:fld id="{E6744CE3-0875-4B69-89C0-6F72D8139561}" type="datetimeFigureOut">
+            <a:fld id="{6BA5D40C-A8DC-479A-A5D3-E7B4936A184B}" type="datetimeFigureOut">
               <a:rPr lang="en-GB" smtClean="0"/>
-              <a:t>26/05/17</a:t>
+              <a:t>15/07/2015</a:t>
             </a:fld>
             <a:endParaRPr lang="en-GB"/>
           </a:p>
@@ -331,7 +328,7 @@
           <a:bodyPr/>
           <a:lstStyle/>
           <a:p>
-            <a:fld id="{8DADB20D-508E-4C6D-A9E4-257D5607B0F6}" type="slidenum">
+            <a:fld id="{52235FAC-C7EA-4164-B888-497B3F49A53C}" type="slidenum">
               <a:rPr lang="en-GB" smtClean="0"/>
               <a:t>‹#›</a:t>
             </a:fld>
@@ -342,7 +339,357 @@
     </p:spTree>
     <p:extLst>
       <p:ext uri="{BB962C8B-B14F-4D97-AF65-F5344CB8AC3E}">
-        <p14:creationId xmlns:p14="http://schemas.microsoft.com/office/powerpoint/2010/main" val="4214881138"/>
+        <p14:creationId xmlns:p14="http://schemas.microsoft.com/office/powerpoint/2010/main" val="329626357"/>
+      </p:ext>
+    </p:extLst>
+  </p:cSld>
+  <p:clrMapOvr>
+    <a:masterClrMapping/>
+  </p:clrMapOvr>
+</p:sldLayout>
+</file>
+
+<file path=ppt/slideLayouts/slideLayout10.xml><?xml version="1.0" encoding="utf-8"?>
+<p:sldLayout xmlns:a="http://schemas.openxmlformats.org/drawingml/2006/main" xmlns:r="http://schemas.openxmlformats.org/officeDocument/2006/relationships" xmlns:p="http://schemas.openxmlformats.org/presentationml/2006/main" type="vertTx" preserve="1">
+  <p:cSld name="Title and Vertical Text">
+    <p:spTree>
+      <p:nvGrpSpPr>
+        <p:cNvPr id="1" name=""/>
+        <p:cNvGrpSpPr/>
+        <p:nvPr/>
+      </p:nvGrpSpPr>
+      <p:grpSpPr>
+        <a:xfrm>
+          <a:off x="0" y="0"/>
+          <a:ext cx="0" cy="0"/>
+          <a:chOff x="0" y="0"/>
+          <a:chExt cx="0" cy="0"/>
+        </a:xfrm>
+      </p:grpSpPr>
+      <p:sp>
+        <p:nvSpPr>
+          <p:cNvPr id="2" name="Title 1"/>
+          <p:cNvSpPr>
+            <a:spLocks noGrp="1"/>
+          </p:cNvSpPr>
+          <p:nvPr>
+            <p:ph type="title"/>
+          </p:nvPr>
+        </p:nvSpPr>
+        <p:spPr/>
+        <p:txBody>
+          <a:bodyPr/>
+          <a:lstStyle/>
+          <a:p>
+            <a:r>
+              <a:rPr lang="en-US" smtClean="0"/>
+              <a:t>Click to edit Master title style</a:t>
+            </a:r>
+            <a:endParaRPr lang="en-GB"/>
+          </a:p>
+        </p:txBody>
+      </p:sp>
+      <p:sp>
+        <p:nvSpPr>
+          <p:cNvPr id="3" name="Vertical Text Placeholder 2"/>
+          <p:cNvSpPr>
+            <a:spLocks noGrp="1"/>
+          </p:cNvSpPr>
+          <p:nvPr>
+            <p:ph type="body" orient="vert" idx="1"/>
+          </p:nvPr>
+        </p:nvSpPr>
+        <p:spPr/>
+        <p:txBody>
+          <a:bodyPr vert="eaVert"/>
+          <a:lstStyle/>
+          <a:p>
+            <a:pPr lvl="0"/>
+            <a:r>
+              <a:rPr lang="en-US" smtClean="0"/>
+              <a:t>Click to edit Master text styles</a:t>
+            </a:r>
+          </a:p>
+          <a:p>
+            <a:pPr lvl="1"/>
+            <a:r>
+              <a:rPr lang="en-US" smtClean="0"/>
+              <a:t>Second level</a:t>
+            </a:r>
+          </a:p>
+          <a:p>
+            <a:pPr lvl="2"/>
+            <a:r>
+              <a:rPr lang="en-US" smtClean="0"/>
+              <a:t>Third level</a:t>
+            </a:r>
+          </a:p>
+          <a:p>
+            <a:pPr lvl="3"/>
+            <a:r>
+              <a:rPr lang="en-US" smtClean="0"/>
+              <a:t>Fourth level</a:t>
+            </a:r>
+          </a:p>
+          <a:p>
+            <a:pPr lvl="4"/>
+            <a:r>
+              <a:rPr lang="en-US" smtClean="0"/>
+              <a:t>Fifth level</a:t>
+            </a:r>
+            <a:endParaRPr lang="en-GB"/>
+          </a:p>
+        </p:txBody>
+      </p:sp>
+      <p:sp>
+        <p:nvSpPr>
+          <p:cNvPr id="4" name="Date Placeholder 3"/>
+          <p:cNvSpPr>
+            <a:spLocks noGrp="1"/>
+          </p:cNvSpPr>
+          <p:nvPr>
+            <p:ph type="dt" sz="half" idx="10"/>
+          </p:nvPr>
+        </p:nvSpPr>
+        <p:spPr/>
+        <p:txBody>
+          <a:bodyPr/>
+          <a:lstStyle/>
+          <a:p>
+            <a:fld id="{6BA5D40C-A8DC-479A-A5D3-E7B4936A184B}" type="datetimeFigureOut">
+              <a:rPr lang="en-GB" smtClean="0"/>
+              <a:t>15/07/2015</a:t>
+            </a:fld>
+            <a:endParaRPr lang="en-GB"/>
+          </a:p>
+        </p:txBody>
+      </p:sp>
+      <p:sp>
+        <p:nvSpPr>
+          <p:cNvPr id="5" name="Footer Placeholder 4"/>
+          <p:cNvSpPr>
+            <a:spLocks noGrp="1"/>
+          </p:cNvSpPr>
+          <p:nvPr>
+            <p:ph type="ftr" sz="quarter" idx="11"/>
+          </p:nvPr>
+        </p:nvSpPr>
+        <p:spPr/>
+        <p:txBody>
+          <a:bodyPr/>
+          <a:lstStyle/>
+          <a:p>
+            <a:endParaRPr lang="en-GB"/>
+          </a:p>
+        </p:txBody>
+      </p:sp>
+      <p:sp>
+        <p:nvSpPr>
+          <p:cNvPr id="6" name="Slide Number Placeholder 5"/>
+          <p:cNvSpPr>
+            <a:spLocks noGrp="1"/>
+          </p:cNvSpPr>
+          <p:nvPr>
+            <p:ph type="sldNum" sz="quarter" idx="12"/>
+          </p:nvPr>
+        </p:nvSpPr>
+        <p:spPr/>
+        <p:txBody>
+          <a:bodyPr/>
+          <a:lstStyle/>
+          <a:p>
+            <a:fld id="{52235FAC-C7EA-4164-B888-497B3F49A53C}" type="slidenum">
+              <a:rPr lang="en-GB" smtClean="0"/>
+              <a:t>‹#›</a:t>
+            </a:fld>
+            <a:endParaRPr lang="en-GB"/>
+          </a:p>
+        </p:txBody>
+      </p:sp>
+    </p:spTree>
+    <p:extLst>
+      <p:ext uri="{BB962C8B-B14F-4D97-AF65-F5344CB8AC3E}">
+        <p14:creationId xmlns:p14="http://schemas.microsoft.com/office/powerpoint/2010/main" val="2804603315"/>
+      </p:ext>
+    </p:extLst>
+  </p:cSld>
+  <p:clrMapOvr>
+    <a:masterClrMapping/>
+  </p:clrMapOvr>
+</p:sldLayout>
+</file>
+
+<file path=ppt/slideLayouts/slideLayout11.xml><?xml version="1.0" encoding="utf-8"?>
+<p:sldLayout xmlns:a="http://schemas.openxmlformats.org/drawingml/2006/main" xmlns:r="http://schemas.openxmlformats.org/officeDocument/2006/relationships" xmlns:p="http://schemas.openxmlformats.org/presentationml/2006/main" type="vertTitleAndTx" preserve="1">
+  <p:cSld name="Vertical Title and Text">
+    <p:spTree>
+      <p:nvGrpSpPr>
+        <p:cNvPr id="1" name=""/>
+        <p:cNvGrpSpPr/>
+        <p:nvPr/>
+      </p:nvGrpSpPr>
+      <p:grpSpPr>
+        <a:xfrm>
+          <a:off x="0" y="0"/>
+          <a:ext cx="0" cy="0"/>
+          <a:chOff x="0" y="0"/>
+          <a:chExt cx="0" cy="0"/>
+        </a:xfrm>
+      </p:grpSpPr>
+      <p:sp>
+        <p:nvSpPr>
+          <p:cNvPr id="2" name="Vertical Title 1"/>
+          <p:cNvSpPr>
+            <a:spLocks noGrp="1"/>
+          </p:cNvSpPr>
+          <p:nvPr>
+            <p:ph type="title" orient="vert"/>
+          </p:nvPr>
+        </p:nvSpPr>
+        <p:spPr>
+          <a:xfrm>
+            <a:off x="11850052" y="428427"/>
+            <a:ext cx="3677604" cy="9128109"/>
+          </a:xfrm>
+        </p:spPr>
+        <p:txBody>
+          <a:bodyPr vert="eaVert"/>
+          <a:lstStyle/>
+          <a:p>
+            <a:r>
+              <a:rPr lang="en-US" smtClean="0"/>
+              <a:t>Click to edit Master title style</a:t>
+            </a:r>
+            <a:endParaRPr lang="en-GB"/>
+          </a:p>
+        </p:txBody>
+      </p:sp>
+      <p:sp>
+        <p:nvSpPr>
+          <p:cNvPr id="3" name="Vertical Text Placeholder 2"/>
+          <p:cNvSpPr>
+            <a:spLocks noGrp="1"/>
+          </p:cNvSpPr>
+          <p:nvPr>
+            <p:ph type="body" orient="vert" idx="1"/>
+          </p:nvPr>
+        </p:nvSpPr>
+        <p:spPr>
+          <a:xfrm>
+            <a:off x="817249" y="428427"/>
+            <a:ext cx="10781349" cy="9128109"/>
+          </a:xfrm>
+        </p:spPr>
+        <p:txBody>
+          <a:bodyPr vert="eaVert"/>
+          <a:lstStyle/>
+          <a:p>
+            <a:pPr lvl="0"/>
+            <a:r>
+              <a:rPr lang="en-US" smtClean="0"/>
+              <a:t>Click to edit Master text styles</a:t>
+            </a:r>
+          </a:p>
+          <a:p>
+            <a:pPr lvl="1"/>
+            <a:r>
+              <a:rPr lang="en-US" smtClean="0"/>
+              <a:t>Second level</a:t>
+            </a:r>
+          </a:p>
+          <a:p>
+            <a:pPr lvl="2"/>
+            <a:r>
+              <a:rPr lang="en-US" smtClean="0"/>
+              <a:t>Third level</a:t>
+            </a:r>
+          </a:p>
+          <a:p>
+            <a:pPr lvl="3"/>
+            <a:r>
+              <a:rPr lang="en-US" smtClean="0"/>
+              <a:t>Fourth level</a:t>
+            </a:r>
+          </a:p>
+          <a:p>
+            <a:pPr lvl="4"/>
+            <a:r>
+              <a:rPr lang="en-US" smtClean="0"/>
+              <a:t>Fifth level</a:t>
+            </a:r>
+            <a:endParaRPr lang="en-GB"/>
+          </a:p>
+        </p:txBody>
+      </p:sp>
+      <p:sp>
+        <p:nvSpPr>
+          <p:cNvPr id="4" name="Date Placeholder 3"/>
+          <p:cNvSpPr>
+            <a:spLocks noGrp="1"/>
+          </p:cNvSpPr>
+          <p:nvPr>
+            <p:ph type="dt" sz="half" idx="10"/>
+          </p:nvPr>
+        </p:nvSpPr>
+        <p:spPr/>
+        <p:txBody>
+          <a:bodyPr/>
+          <a:lstStyle/>
+          <a:p>
+            <a:fld id="{6BA5D40C-A8DC-479A-A5D3-E7B4936A184B}" type="datetimeFigureOut">
+              <a:rPr lang="en-GB" smtClean="0"/>
+              <a:t>15/07/2015</a:t>
+            </a:fld>
+            <a:endParaRPr lang="en-GB"/>
+          </a:p>
+        </p:txBody>
+      </p:sp>
+      <p:sp>
+        <p:nvSpPr>
+          <p:cNvPr id="5" name="Footer Placeholder 4"/>
+          <p:cNvSpPr>
+            <a:spLocks noGrp="1"/>
+          </p:cNvSpPr>
+          <p:nvPr>
+            <p:ph type="ftr" sz="quarter" idx="11"/>
+          </p:nvPr>
+        </p:nvSpPr>
+        <p:spPr/>
+        <p:txBody>
+          <a:bodyPr/>
+          <a:lstStyle/>
+          <a:p>
+            <a:endParaRPr lang="en-GB"/>
+          </a:p>
+        </p:txBody>
+      </p:sp>
+      <p:sp>
+        <p:nvSpPr>
+          <p:cNvPr id="6" name="Slide Number Placeholder 5"/>
+          <p:cNvSpPr>
+            <a:spLocks noGrp="1"/>
+          </p:cNvSpPr>
+          <p:nvPr>
+            <p:ph type="sldNum" sz="quarter" idx="12"/>
+          </p:nvPr>
+        </p:nvSpPr>
+        <p:spPr/>
+        <p:txBody>
+          <a:bodyPr/>
+          <a:lstStyle/>
+          <a:p>
+            <a:fld id="{52235FAC-C7EA-4164-B888-497B3F49A53C}" type="slidenum">
+              <a:rPr lang="en-GB" smtClean="0"/>
+              <a:t>‹#›</a:t>
+            </a:fld>
+            <a:endParaRPr lang="en-GB"/>
+          </a:p>
+        </p:txBody>
+      </p:sp>
+    </p:spTree>
+    <p:extLst>
+      <p:ext uri="{BB962C8B-B14F-4D97-AF65-F5344CB8AC3E}">
+        <p14:creationId xmlns:p14="http://schemas.microsoft.com/office/powerpoint/2010/main" val="1715730913"/>
       </p:ext>
     </p:extLst>
   </p:cSld>
@@ -459,9 +806,9 @@
           <a:bodyPr/>
           <a:lstStyle/>
           <a:p>
-            <a:fld id="{E6744CE3-0875-4B69-89C0-6F72D8139561}" type="datetimeFigureOut">
+            <a:fld id="{6BA5D40C-A8DC-479A-A5D3-E7B4936A184B}" type="datetimeFigureOut">
               <a:rPr lang="en-GB" smtClean="0"/>
-              <a:t>26/05/17</a:t>
+              <a:t>15/07/2015</a:t>
             </a:fld>
             <a:endParaRPr lang="en-GB"/>
           </a:p>
@@ -501,7 +848,7 @@
           <a:bodyPr/>
           <a:lstStyle/>
           <a:p>
-            <a:fld id="{8DADB20D-508E-4C6D-A9E4-257D5607B0F6}" type="slidenum">
+            <a:fld id="{52235FAC-C7EA-4164-B888-497B3F49A53C}" type="slidenum">
               <a:rPr lang="en-GB" smtClean="0"/>
               <a:t>‹#›</a:t>
             </a:fld>
@@ -512,7 +859,7 @@
     </p:spTree>
     <p:extLst>
       <p:ext uri="{BB962C8B-B14F-4D97-AF65-F5344CB8AC3E}">
-        <p14:creationId xmlns:p14="http://schemas.microsoft.com/office/powerpoint/2010/main" val="271576982"/>
+        <p14:creationId xmlns:p14="http://schemas.microsoft.com/office/powerpoint/2010/main" val="1072499689"/>
       </p:ext>
     </p:extLst>
   </p:cSld>
@@ -551,15 +898,15 @@
         </p:nvSpPr>
         <p:spPr>
           <a:xfrm>
-            <a:off x="722313" y="4406900"/>
-            <a:ext cx="7772400" cy="1362075"/>
+            <a:off x="1191817" y="6874563"/>
+            <a:ext cx="12824460" cy="2124774"/>
           </a:xfrm>
         </p:spPr>
         <p:txBody>
           <a:bodyPr anchor="t"/>
           <a:lstStyle>
             <a:lvl1pPr algn="l">
-              <a:defRPr sz="4000" b="1" cap="all"/>
+              <a:defRPr sz="4600" b="1" cap="all"/>
             </a:lvl1pPr>
           </a:lstStyle>
           <a:p>
@@ -583,8 +930,8 @@
         </p:nvSpPr>
         <p:spPr>
           <a:xfrm>
-            <a:off x="722313" y="2906713"/>
-            <a:ext cx="7772400" cy="1500187"/>
+            <a:off x="1191817" y="4534341"/>
+            <a:ext cx="12824460" cy="2340223"/>
           </a:xfrm>
         </p:spPr>
         <p:txBody>
@@ -592,7 +939,7 @@
           <a:lstStyle>
             <a:lvl1pPr marL="0" indent="0">
               <a:buNone/>
-              <a:defRPr sz="2000">
+              <a:defRPr sz="2300">
                 <a:solidFill>
                   <a:schemeClr val="tx1">
                     <a:tint val="75000"/>
@@ -600,7 +947,17 @@
                 </a:solidFill>
               </a:defRPr>
             </a:lvl1pPr>
-            <a:lvl2pPr marL="457200" indent="0">
+            <a:lvl2pPr marL="526237" indent="0">
+              <a:buNone/>
+              <a:defRPr sz="2100">
+                <a:solidFill>
+                  <a:schemeClr val="tx1">
+                    <a:tint val="75000"/>
+                  </a:schemeClr>
+                </a:solidFill>
+              </a:defRPr>
+            </a:lvl2pPr>
+            <a:lvl3pPr marL="1052474" indent="0">
               <a:buNone/>
               <a:defRPr sz="1800">
                 <a:solidFill>
@@ -609,8 +966,8 @@
                   </a:schemeClr>
                 </a:solidFill>
               </a:defRPr>
-            </a:lvl2pPr>
-            <a:lvl3pPr marL="914400" indent="0">
+            </a:lvl3pPr>
+            <a:lvl4pPr marL="1578712" indent="0">
               <a:buNone/>
               <a:defRPr sz="1600">
                 <a:solidFill>
@@ -619,20 +976,10 @@
                   </a:schemeClr>
                 </a:solidFill>
               </a:defRPr>
-            </a:lvl3pPr>
-            <a:lvl4pPr marL="1371600" indent="0">
+            </a:lvl4pPr>
+            <a:lvl5pPr marL="2104949" indent="0">
               <a:buNone/>
-              <a:defRPr sz="1400">
-                <a:solidFill>
-                  <a:schemeClr val="tx1">
-                    <a:tint val="75000"/>
-                  </a:schemeClr>
-                </a:solidFill>
-              </a:defRPr>
-            </a:lvl4pPr>
-            <a:lvl5pPr marL="1828800" indent="0">
-              <a:buNone/>
-              <a:defRPr sz="1400">
+              <a:defRPr sz="1600">
                 <a:solidFill>
                   <a:schemeClr val="tx1">
                     <a:tint val="75000"/>
@@ -640,9 +987,9 @@
                 </a:solidFill>
               </a:defRPr>
             </a:lvl5pPr>
-            <a:lvl6pPr marL="2286000" indent="0">
+            <a:lvl6pPr marL="2631186" indent="0">
               <a:buNone/>
-              <a:defRPr sz="1400">
+              <a:defRPr sz="1600">
                 <a:solidFill>
                   <a:schemeClr val="tx1">
                     <a:tint val="75000"/>
@@ -650,9 +997,9 @@
                 </a:solidFill>
               </a:defRPr>
             </a:lvl6pPr>
-            <a:lvl7pPr marL="2743200" indent="0">
+            <a:lvl7pPr marL="3157423" indent="0">
               <a:buNone/>
-              <a:defRPr sz="1400">
+              <a:defRPr sz="1600">
                 <a:solidFill>
                   <a:schemeClr val="tx1">
                     <a:tint val="75000"/>
@@ -660,9 +1007,9 @@
                 </a:solidFill>
               </a:defRPr>
             </a:lvl7pPr>
-            <a:lvl8pPr marL="3200400" indent="0">
+            <a:lvl8pPr marL="3683660" indent="0">
               <a:buNone/>
-              <a:defRPr sz="1400">
+              <a:defRPr sz="1600">
                 <a:solidFill>
                   <a:schemeClr val="tx1">
                     <a:tint val="75000"/>
@@ -670,9 +1017,9 @@
                 </a:solidFill>
               </a:defRPr>
             </a:lvl8pPr>
-            <a:lvl9pPr marL="3657600" indent="0">
+            <a:lvl9pPr marL="4209898" indent="0">
               <a:buNone/>
-              <a:defRPr sz="1400">
+              <a:defRPr sz="1600">
                 <a:solidFill>
                   <a:schemeClr val="tx1">
                     <a:tint val="75000"/>
@@ -705,9 +1052,9 @@
           <a:bodyPr/>
           <a:lstStyle/>
           <a:p>
-            <a:fld id="{E6744CE3-0875-4B69-89C0-6F72D8139561}" type="datetimeFigureOut">
+            <a:fld id="{6BA5D40C-A8DC-479A-A5D3-E7B4936A184B}" type="datetimeFigureOut">
               <a:rPr lang="en-GB" smtClean="0"/>
-              <a:t>26/05/17</a:t>
+              <a:t>15/07/2015</a:t>
             </a:fld>
             <a:endParaRPr lang="en-GB"/>
           </a:p>
@@ -747,7 +1094,7 @@
           <a:bodyPr/>
           <a:lstStyle/>
           <a:p>
-            <a:fld id="{8DADB20D-508E-4C6D-A9E4-257D5607B0F6}" type="slidenum">
+            <a:fld id="{52235FAC-C7EA-4164-B888-497B3F49A53C}" type="slidenum">
               <a:rPr lang="en-GB" smtClean="0"/>
               <a:t>‹#›</a:t>
             </a:fld>
@@ -758,7 +1105,7 @@
     </p:spTree>
     <p:extLst>
       <p:ext uri="{BB962C8B-B14F-4D97-AF65-F5344CB8AC3E}">
-        <p14:creationId xmlns:p14="http://schemas.microsoft.com/office/powerpoint/2010/main" val="1431545585"/>
+        <p14:creationId xmlns:p14="http://schemas.microsoft.com/office/powerpoint/2010/main" val="2061327686"/>
       </p:ext>
     </p:extLst>
   </p:cSld>
@@ -820,8 +1167,370 @@
         </p:nvSpPr>
         <p:spPr>
           <a:xfrm>
-            <a:off x="457200" y="1600200"/>
-            <a:ext cx="4038600" cy="4525963"/>
+            <a:off x="817249" y="2496240"/>
+            <a:ext cx="7229475" cy="7060293"/>
+          </a:xfrm>
+        </p:spPr>
+        <p:txBody>
+          <a:bodyPr/>
+          <a:lstStyle>
+            <a:lvl1pPr>
+              <a:defRPr sz="3200"/>
+            </a:lvl1pPr>
+            <a:lvl2pPr>
+              <a:defRPr sz="2800"/>
+            </a:lvl2pPr>
+            <a:lvl3pPr>
+              <a:defRPr sz="2300"/>
+            </a:lvl3pPr>
+            <a:lvl4pPr>
+              <a:defRPr sz="2100"/>
+            </a:lvl4pPr>
+            <a:lvl5pPr>
+              <a:defRPr sz="2100"/>
+            </a:lvl5pPr>
+            <a:lvl6pPr>
+              <a:defRPr sz="2100"/>
+            </a:lvl6pPr>
+            <a:lvl7pPr>
+              <a:defRPr sz="2100"/>
+            </a:lvl7pPr>
+            <a:lvl8pPr>
+              <a:defRPr sz="2100"/>
+            </a:lvl8pPr>
+            <a:lvl9pPr>
+              <a:defRPr sz="2100"/>
+            </a:lvl9pPr>
+          </a:lstStyle>
+          <a:p>
+            <a:pPr lvl="0"/>
+            <a:r>
+              <a:rPr lang="en-US" smtClean="0"/>
+              <a:t>Click to edit Master text styles</a:t>
+            </a:r>
+          </a:p>
+          <a:p>
+            <a:pPr lvl="1"/>
+            <a:r>
+              <a:rPr lang="en-US" smtClean="0"/>
+              <a:t>Second level</a:t>
+            </a:r>
+          </a:p>
+          <a:p>
+            <a:pPr lvl="2"/>
+            <a:r>
+              <a:rPr lang="en-US" smtClean="0"/>
+              <a:t>Third level</a:t>
+            </a:r>
+          </a:p>
+          <a:p>
+            <a:pPr lvl="3"/>
+            <a:r>
+              <a:rPr lang="en-US" smtClean="0"/>
+              <a:t>Fourth level</a:t>
+            </a:r>
+          </a:p>
+          <a:p>
+            <a:pPr lvl="4"/>
+            <a:r>
+              <a:rPr lang="en-US" smtClean="0"/>
+              <a:t>Fifth level</a:t>
+            </a:r>
+            <a:endParaRPr lang="en-GB"/>
+          </a:p>
+        </p:txBody>
+      </p:sp>
+      <p:sp>
+        <p:nvSpPr>
+          <p:cNvPr id="4" name="Content Placeholder 3"/>
+          <p:cNvSpPr>
+            <a:spLocks noGrp="1"/>
+          </p:cNvSpPr>
+          <p:nvPr>
+            <p:ph sz="half" idx="2"/>
+          </p:nvPr>
+        </p:nvSpPr>
+        <p:spPr>
+          <a:xfrm>
+            <a:off x="8298184" y="2496240"/>
+            <a:ext cx="7229475" cy="7060293"/>
+          </a:xfrm>
+        </p:spPr>
+        <p:txBody>
+          <a:bodyPr/>
+          <a:lstStyle>
+            <a:lvl1pPr>
+              <a:defRPr sz="3200"/>
+            </a:lvl1pPr>
+            <a:lvl2pPr>
+              <a:defRPr sz="2800"/>
+            </a:lvl2pPr>
+            <a:lvl3pPr>
+              <a:defRPr sz="2300"/>
+            </a:lvl3pPr>
+            <a:lvl4pPr>
+              <a:defRPr sz="2100"/>
+            </a:lvl4pPr>
+            <a:lvl5pPr>
+              <a:defRPr sz="2100"/>
+            </a:lvl5pPr>
+            <a:lvl6pPr>
+              <a:defRPr sz="2100"/>
+            </a:lvl6pPr>
+            <a:lvl7pPr>
+              <a:defRPr sz="2100"/>
+            </a:lvl7pPr>
+            <a:lvl8pPr>
+              <a:defRPr sz="2100"/>
+            </a:lvl8pPr>
+            <a:lvl9pPr>
+              <a:defRPr sz="2100"/>
+            </a:lvl9pPr>
+          </a:lstStyle>
+          <a:p>
+            <a:pPr lvl="0"/>
+            <a:r>
+              <a:rPr lang="en-US" smtClean="0"/>
+              <a:t>Click to edit Master text styles</a:t>
+            </a:r>
+          </a:p>
+          <a:p>
+            <a:pPr lvl="1"/>
+            <a:r>
+              <a:rPr lang="en-US" smtClean="0"/>
+              <a:t>Second level</a:t>
+            </a:r>
+          </a:p>
+          <a:p>
+            <a:pPr lvl="2"/>
+            <a:r>
+              <a:rPr lang="en-US" smtClean="0"/>
+              <a:t>Third level</a:t>
+            </a:r>
+          </a:p>
+          <a:p>
+            <a:pPr lvl="3"/>
+            <a:r>
+              <a:rPr lang="en-US" smtClean="0"/>
+              <a:t>Fourth level</a:t>
+            </a:r>
+          </a:p>
+          <a:p>
+            <a:pPr lvl="4"/>
+            <a:r>
+              <a:rPr lang="en-US" smtClean="0"/>
+              <a:t>Fifth level</a:t>
+            </a:r>
+            <a:endParaRPr lang="en-GB"/>
+          </a:p>
+        </p:txBody>
+      </p:sp>
+      <p:sp>
+        <p:nvSpPr>
+          <p:cNvPr id="5" name="Date Placeholder 4"/>
+          <p:cNvSpPr>
+            <a:spLocks noGrp="1"/>
+          </p:cNvSpPr>
+          <p:nvPr>
+            <p:ph type="dt" sz="half" idx="10"/>
+          </p:nvPr>
+        </p:nvSpPr>
+        <p:spPr/>
+        <p:txBody>
+          <a:bodyPr/>
+          <a:lstStyle/>
+          <a:p>
+            <a:fld id="{6BA5D40C-A8DC-479A-A5D3-E7B4936A184B}" type="datetimeFigureOut">
+              <a:rPr lang="en-GB" smtClean="0"/>
+              <a:t>15/07/2015</a:t>
+            </a:fld>
+            <a:endParaRPr lang="en-GB"/>
+          </a:p>
+        </p:txBody>
+      </p:sp>
+      <p:sp>
+        <p:nvSpPr>
+          <p:cNvPr id="6" name="Footer Placeholder 5"/>
+          <p:cNvSpPr>
+            <a:spLocks noGrp="1"/>
+          </p:cNvSpPr>
+          <p:nvPr>
+            <p:ph type="ftr" sz="quarter" idx="11"/>
+          </p:nvPr>
+        </p:nvSpPr>
+        <p:spPr/>
+        <p:txBody>
+          <a:bodyPr/>
+          <a:lstStyle/>
+          <a:p>
+            <a:endParaRPr lang="en-GB"/>
+          </a:p>
+        </p:txBody>
+      </p:sp>
+      <p:sp>
+        <p:nvSpPr>
+          <p:cNvPr id="7" name="Slide Number Placeholder 6"/>
+          <p:cNvSpPr>
+            <a:spLocks noGrp="1"/>
+          </p:cNvSpPr>
+          <p:nvPr>
+            <p:ph type="sldNum" sz="quarter" idx="12"/>
+          </p:nvPr>
+        </p:nvSpPr>
+        <p:spPr/>
+        <p:txBody>
+          <a:bodyPr/>
+          <a:lstStyle/>
+          <a:p>
+            <a:fld id="{52235FAC-C7EA-4164-B888-497B3F49A53C}" type="slidenum">
+              <a:rPr lang="en-GB" smtClean="0"/>
+              <a:t>‹#›</a:t>
+            </a:fld>
+            <a:endParaRPr lang="en-GB"/>
+          </a:p>
+        </p:txBody>
+      </p:sp>
+    </p:spTree>
+    <p:extLst>
+      <p:ext uri="{BB962C8B-B14F-4D97-AF65-F5344CB8AC3E}">
+        <p14:creationId xmlns:p14="http://schemas.microsoft.com/office/powerpoint/2010/main" val="3083140367"/>
+      </p:ext>
+    </p:extLst>
+  </p:cSld>
+  <p:clrMapOvr>
+    <a:masterClrMapping/>
+  </p:clrMapOvr>
+</p:sldLayout>
+</file>
+
+<file path=ppt/slideLayouts/slideLayout5.xml><?xml version="1.0" encoding="utf-8"?>
+<p:sldLayout xmlns:a="http://schemas.openxmlformats.org/drawingml/2006/main" xmlns:r="http://schemas.openxmlformats.org/officeDocument/2006/relationships" xmlns:p="http://schemas.openxmlformats.org/presentationml/2006/main" type="twoTxTwoObj" preserve="1">
+  <p:cSld name="Comparison">
+    <p:spTree>
+      <p:nvGrpSpPr>
+        <p:cNvPr id="1" name=""/>
+        <p:cNvGrpSpPr/>
+        <p:nvPr/>
+      </p:nvGrpSpPr>
+      <p:grpSpPr>
+        <a:xfrm>
+          <a:off x="0" y="0"/>
+          <a:ext cx="0" cy="0"/>
+          <a:chOff x="0" y="0"/>
+          <a:chExt cx="0" cy="0"/>
+        </a:xfrm>
+      </p:grpSpPr>
+      <p:sp>
+        <p:nvSpPr>
+          <p:cNvPr id="2" name="Title 1"/>
+          <p:cNvSpPr>
+            <a:spLocks noGrp="1"/>
+          </p:cNvSpPr>
+          <p:nvPr>
+            <p:ph type="title"/>
+          </p:nvPr>
+        </p:nvSpPr>
+        <p:spPr>
+          <a:xfrm>
+            <a:off x="754380" y="428422"/>
+            <a:ext cx="13578840" cy="1783027"/>
+          </a:xfrm>
+        </p:spPr>
+        <p:txBody>
+          <a:bodyPr/>
+          <a:lstStyle>
+            <a:lvl1pPr>
+              <a:defRPr/>
+            </a:lvl1pPr>
+          </a:lstStyle>
+          <a:p>
+            <a:r>
+              <a:rPr lang="en-US" smtClean="0"/>
+              <a:t>Click to edit Master title style</a:t>
+            </a:r>
+            <a:endParaRPr lang="en-GB"/>
+          </a:p>
+        </p:txBody>
+      </p:sp>
+      <p:sp>
+        <p:nvSpPr>
+          <p:cNvPr id="3" name="Text Placeholder 2"/>
+          <p:cNvSpPr>
+            <a:spLocks noGrp="1"/>
+          </p:cNvSpPr>
+          <p:nvPr>
+            <p:ph type="body" idx="1"/>
+          </p:nvPr>
+        </p:nvSpPr>
+        <p:spPr>
+          <a:xfrm>
+            <a:off x="754384" y="2394706"/>
+            <a:ext cx="6666310" cy="997999"/>
+          </a:xfrm>
+        </p:spPr>
+        <p:txBody>
+          <a:bodyPr anchor="b"/>
+          <a:lstStyle>
+            <a:lvl1pPr marL="0" indent="0">
+              <a:buNone/>
+              <a:defRPr sz="2800" b="1"/>
+            </a:lvl1pPr>
+            <a:lvl2pPr marL="526237" indent="0">
+              <a:buNone/>
+              <a:defRPr sz="2300" b="1"/>
+            </a:lvl2pPr>
+            <a:lvl3pPr marL="1052474" indent="0">
+              <a:buNone/>
+              <a:defRPr sz="2100" b="1"/>
+            </a:lvl3pPr>
+            <a:lvl4pPr marL="1578712" indent="0">
+              <a:buNone/>
+              <a:defRPr sz="1800" b="1"/>
+            </a:lvl4pPr>
+            <a:lvl5pPr marL="2104949" indent="0">
+              <a:buNone/>
+              <a:defRPr sz="1800" b="1"/>
+            </a:lvl5pPr>
+            <a:lvl6pPr marL="2631186" indent="0">
+              <a:buNone/>
+              <a:defRPr sz="1800" b="1"/>
+            </a:lvl6pPr>
+            <a:lvl7pPr marL="3157423" indent="0">
+              <a:buNone/>
+              <a:defRPr sz="1800" b="1"/>
+            </a:lvl7pPr>
+            <a:lvl8pPr marL="3683660" indent="0">
+              <a:buNone/>
+              <a:defRPr sz="1800" b="1"/>
+            </a:lvl8pPr>
+            <a:lvl9pPr marL="4209898" indent="0">
+              <a:buNone/>
+              <a:defRPr sz="1800" b="1"/>
+            </a:lvl9pPr>
+          </a:lstStyle>
+          <a:p>
+            <a:pPr lvl="0"/>
+            <a:r>
+              <a:rPr lang="en-US" smtClean="0"/>
+              <a:t>Click to edit Master text styles</a:t>
+            </a:r>
+          </a:p>
+        </p:txBody>
+      </p:sp>
+      <p:sp>
+        <p:nvSpPr>
+          <p:cNvPr id="4" name="Content Placeholder 3"/>
+          <p:cNvSpPr>
+            <a:spLocks noGrp="1"/>
+          </p:cNvSpPr>
+          <p:nvPr>
+            <p:ph sz="half" idx="2"/>
+          </p:nvPr>
+        </p:nvSpPr>
+        <p:spPr>
+          <a:xfrm>
+            <a:off x="754384" y="3392705"/>
+            <a:ext cx="6666310" cy="6163826"/>
           </a:xfrm>
         </p:spPr>
         <p:txBody>
@@ -831,10 +1540,10 @@
               <a:defRPr sz="2800"/>
             </a:lvl1pPr>
             <a:lvl2pPr>
-              <a:defRPr sz="2400"/>
+              <a:defRPr sz="2300"/>
             </a:lvl2pPr>
             <a:lvl3pPr>
-              <a:defRPr sz="2000"/>
+              <a:defRPr sz="2100"/>
             </a:lvl3pPr>
             <a:lvl4pPr>
               <a:defRPr sz="1800"/>
@@ -895,18 +1604,83 @@
       </p:sp>
       <p:sp>
         <p:nvSpPr>
-          <p:cNvPr id="4" name="Content Placeholder 3"/>
+          <p:cNvPr id="5" name="Text Placeholder 4"/>
           <p:cNvSpPr>
             <a:spLocks noGrp="1"/>
           </p:cNvSpPr>
           <p:nvPr>
-            <p:ph sz="half" idx="2"/>
+            <p:ph type="body" sz="quarter" idx="3"/>
           </p:nvPr>
         </p:nvSpPr>
         <p:spPr>
           <a:xfrm>
-            <a:off x="4648200" y="1600200"/>
-            <a:ext cx="4038600" cy="4525963"/>
+            <a:off x="7664295" y="2394706"/>
+            <a:ext cx="6668930" cy="997999"/>
+          </a:xfrm>
+        </p:spPr>
+        <p:txBody>
+          <a:bodyPr anchor="b"/>
+          <a:lstStyle>
+            <a:lvl1pPr marL="0" indent="0">
+              <a:buNone/>
+              <a:defRPr sz="2800" b="1"/>
+            </a:lvl1pPr>
+            <a:lvl2pPr marL="526237" indent="0">
+              <a:buNone/>
+              <a:defRPr sz="2300" b="1"/>
+            </a:lvl2pPr>
+            <a:lvl3pPr marL="1052474" indent="0">
+              <a:buNone/>
+              <a:defRPr sz="2100" b="1"/>
+            </a:lvl3pPr>
+            <a:lvl4pPr marL="1578712" indent="0">
+              <a:buNone/>
+              <a:defRPr sz="1800" b="1"/>
+            </a:lvl4pPr>
+            <a:lvl5pPr marL="2104949" indent="0">
+              <a:buNone/>
+              <a:defRPr sz="1800" b="1"/>
+            </a:lvl5pPr>
+            <a:lvl6pPr marL="2631186" indent="0">
+              <a:buNone/>
+              <a:defRPr sz="1800" b="1"/>
+            </a:lvl6pPr>
+            <a:lvl7pPr marL="3157423" indent="0">
+              <a:buNone/>
+              <a:defRPr sz="1800" b="1"/>
+            </a:lvl7pPr>
+            <a:lvl8pPr marL="3683660" indent="0">
+              <a:buNone/>
+              <a:defRPr sz="1800" b="1"/>
+            </a:lvl8pPr>
+            <a:lvl9pPr marL="4209898" indent="0">
+              <a:buNone/>
+              <a:defRPr sz="1800" b="1"/>
+            </a:lvl9pPr>
+          </a:lstStyle>
+          <a:p>
+            <a:pPr lvl="0"/>
+            <a:r>
+              <a:rPr lang="en-US" smtClean="0"/>
+              <a:t>Click to edit Master text styles</a:t>
+            </a:r>
+          </a:p>
+        </p:txBody>
+      </p:sp>
+      <p:sp>
+        <p:nvSpPr>
+          <p:cNvPr id="6" name="Content Placeholder 5"/>
+          <p:cNvSpPr>
+            <a:spLocks noGrp="1"/>
+          </p:cNvSpPr>
+          <p:nvPr>
+            <p:ph sz="quarter" idx="4"/>
+          </p:nvPr>
+        </p:nvSpPr>
+        <p:spPr>
+          <a:xfrm>
+            <a:off x="7664295" y="3392705"/>
+            <a:ext cx="6668930" cy="6163826"/>
           </a:xfrm>
         </p:spPr>
         <p:txBody>
@@ -916,10 +1690,10 @@
               <a:defRPr sz="2800"/>
             </a:lvl1pPr>
             <a:lvl2pPr>
-              <a:defRPr sz="2400"/>
+              <a:defRPr sz="2300"/>
             </a:lvl2pPr>
             <a:lvl3pPr>
-              <a:defRPr sz="2000"/>
+              <a:defRPr sz="2100"/>
             </a:lvl3pPr>
             <a:lvl4pPr>
               <a:defRPr sz="1800"/>
@@ -980,428 +1754,6 @@
       </p:sp>
       <p:sp>
         <p:nvSpPr>
-          <p:cNvPr id="5" name="Date Placeholder 4"/>
-          <p:cNvSpPr>
-            <a:spLocks noGrp="1"/>
-          </p:cNvSpPr>
-          <p:nvPr>
-            <p:ph type="dt" sz="half" idx="10"/>
-          </p:nvPr>
-        </p:nvSpPr>
-        <p:spPr/>
-        <p:txBody>
-          <a:bodyPr/>
-          <a:lstStyle/>
-          <a:p>
-            <a:fld id="{E6744CE3-0875-4B69-89C0-6F72D8139561}" type="datetimeFigureOut">
-              <a:rPr lang="en-GB" smtClean="0"/>
-              <a:t>26/05/17</a:t>
-            </a:fld>
-            <a:endParaRPr lang="en-GB"/>
-          </a:p>
-        </p:txBody>
-      </p:sp>
-      <p:sp>
-        <p:nvSpPr>
-          <p:cNvPr id="6" name="Footer Placeholder 5"/>
-          <p:cNvSpPr>
-            <a:spLocks noGrp="1"/>
-          </p:cNvSpPr>
-          <p:nvPr>
-            <p:ph type="ftr" sz="quarter" idx="11"/>
-          </p:nvPr>
-        </p:nvSpPr>
-        <p:spPr/>
-        <p:txBody>
-          <a:bodyPr/>
-          <a:lstStyle/>
-          <a:p>
-            <a:endParaRPr lang="en-GB"/>
-          </a:p>
-        </p:txBody>
-      </p:sp>
-      <p:sp>
-        <p:nvSpPr>
-          <p:cNvPr id="7" name="Slide Number Placeholder 6"/>
-          <p:cNvSpPr>
-            <a:spLocks noGrp="1"/>
-          </p:cNvSpPr>
-          <p:nvPr>
-            <p:ph type="sldNum" sz="quarter" idx="12"/>
-          </p:nvPr>
-        </p:nvSpPr>
-        <p:spPr/>
-        <p:txBody>
-          <a:bodyPr/>
-          <a:lstStyle/>
-          <a:p>
-            <a:fld id="{8DADB20D-508E-4C6D-A9E4-257D5607B0F6}" type="slidenum">
-              <a:rPr lang="en-GB" smtClean="0"/>
-              <a:t>‹#›</a:t>
-            </a:fld>
-            <a:endParaRPr lang="en-GB"/>
-          </a:p>
-        </p:txBody>
-      </p:sp>
-    </p:spTree>
-    <p:extLst>
-      <p:ext uri="{BB962C8B-B14F-4D97-AF65-F5344CB8AC3E}">
-        <p14:creationId xmlns:p14="http://schemas.microsoft.com/office/powerpoint/2010/main" val="468392282"/>
-      </p:ext>
-    </p:extLst>
-  </p:cSld>
-  <p:clrMapOvr>
-    <a:masterClrMapping/>
-  </p:clrMapOvr>
-</p:sldLayout>
-</file>
-
-<file path=ppt/slideLayouts/slideLayout5.xml><?xml version="1.0" encoding="utf-8"?>
-<p:sldLayout xmlns:a="http://schemas.openxmlformats.org/drawingml/2006/main" xmlns:r="http://schemas.openxmlformats.org/officeDocument/2006/relationships" xmlns:p="http://schemas.openxmlformats.org/presentationml/2006/main" type="twoTxTwoObj" preserve="1">
-  <p:cSld name="Comparison">
-    <p:spTree>
-      <p:nvGrpSpPr>
-        <p:cNvPr id="1" name=""/>
-        <p:cNvGrpSpPr/>
-        <p:nvPr/>
-      </p:nvGrpSpPr>
-      <p:grpSpPr>
-        <a:xfrm>
-          <a:off x="0" y="0"/>
-          <a:ext cx="0" cy="0"/>
-          <a:chOff x="0" y="0"/>
-          <a:chExt cx="0" cy="0"/>
-        </a:xfrm>
-      </p:grpSpPr>
-      <p:sp>
-        <p:nvSpPr>
-          <p:cNvPr id="2" name="Title 1"/>
-          <p:cNvSpPr>
-            <a:spLocks noGrp="1"/>
-          </p:cNvSpPr>
-          <p:nvPr>
-            <p:ph type="title"/>
-          </p:nvPr>
-        </p:nvSpPr>
-        <p:spPr/>
-        <p:txBody>
-          <a:bodyPr/>
-          <a:lstStyle>
-            <a:lvl1pPr>
-              <a:defRPr/>
-            </a:lvl1pPr>
-          </a:lstStyle>
-          <a:p>
-            <a:r>
-              <a:rPr lang="en-US" smtClean="0"/>
-              <a:t>Click to edit Master title style</a:t>
-            </a:r>
-            <a:endParaRPr lang="en-GB"/>
-          </a:p>
-        </p:txBody>
-      </p:sp>
-      <p:sp>
-        <p:nvSpPr>
-          <p:cNvPr id="3" name="Text Placeholder 2"/>
-          <p:cNvSpPr>
-            <a:spLocks noGrp="1"/>
-          </p:cNvSpPr>
-          <p:nvPr>
-            <p:ph type="body" idx="1"/>
-          </p:nvPr>
-        </p:nvSpPr>
-        <p:spPr>
-          <a:xfrm>
-            <a:off x="457200" y="1535113"/>
-            <a:ext cx="4040188" cy="639762"/>
-          </a:xfrm>
-        </p:spPr>
-        <p:txBody>
-          <a:bodyPr anchor="b"/>
-          <a:lstStyle>
-            <a:lvl1pPr marL="0" indent="0">
-              <a:buNone/>
-              <a:defRPr sz="2400" b="1"/>
-            </a:lvl1pPr>
-            <a:lvl2pPr marL="457200" indent="0">
-              <a:buNone/>
-              <a:defRPr sz="2000" b="1"/>
-            </a:lvl2pPr>
-            <a:lvl3pPr marL="914400" indent="0">
-              <a:buNone/>
-              <a:defRPr sz="1800" b="1"/>
-            </a:lvl3pPr>
-            <a:lvl4pPr marL="1371600" indent="0">
-              <a:buNone/>
-              <a:defRPr sz="1600" b="1"/>
-            </a:lvl4pPr>
-            <a:lvl5pPr marL="1828800" indent="0">
-              <a:buNone/>
-              <a:defRPr sz="1600" b="1"/>
-            </a:lvl5pPr>
-            <a:lvl6pPr marL="2286000" indent="0">
-              <a:buNone/>
-              <a:defRPr sz="1600" b="1"/>
-            </a:lvl6pPr>
-            <a:lvl7pPr marL="2743200" indent="0">
-              <a:buNone/>
-              <a:defRPr sz="1600" b="1"/>
-            </a:lvl7pPr>
-            <a:lvl8pPr marL="3200400" indent="0">
-              <a:buNone/>
-              <a:defRPr sz="1600" b="1"/>
-            </a:lvl8pPr>
-            <a:lvl9pPr marL="3657600" indent="0">
-              <a:buNone/>
-              <a:defRPr sz="1600" b="1"/>
-            </a:lvl9pPr>
-          </a:lstStyle>
-          <a:p>
-            <a:pPr lvl="0"/>
-            <a:r>
-              <a:rPr lang="en-US" smtClean="0"/>
-              <a:t>Click to edit Master text styles</a:t>
-            </a:r>
-          </a:p>
-        </p:txBody>
-      </p:sp>
-      <p:sp>
-        <p:nvSpPr>
-          <p:cNvPr id="4" name="Content Placeholder 3"/>
-          <p:cNvSpPr>
-            <a:spLocks noGrp="1"/>
-          </p:cNvSpPr>
-          <p:nvPr>
-            <p:ph sz="half" idx="2"/>
-          </p:nvPr>
-        </p:nvSpPr>
-        <p:spPr>
-          <a:xfrm>
-            <a:off x="457200" y="2174875"/>
-            <a:ext cx="4040188" cy="3951288"/>
-          </a:xfrm>
-        </p:spPr>
-        <p:txBody>
-          <a:bodyPr/>
-          <a:lstStyle>
-            <a:lvl1pPr>
-              <a:defRPr sz="2400"/>
-            </a:lvl1pPr>
-            <a:lvl2pPr>
-              <a:defRPr sz="2000"/>
-            </a:lvl2pPr>
-            <a:lvl3pPr>
-              <a:defRPr sz="1800"/>
-            </a:lvl3pPr>
-            <a:lvl4pPr>
-              <a:defRPr sz="1600"/>
-            </a:lvl4pPr>
-            <a:lvl5pPr>
-              <a:defRPr sz="1600"/>
-            </a:lvl5pPr>
-            <a:lvl6pPr>
-              <a:defRPr sz="1600"/>
-            </a:lvl6pPr>
-            <a:lvl7pPr>
-              <a:defRPr sz="1600"/>
-            </a:lvl7pPr>
-            <a:lvl8pPr>
-              <a:defRPr sz="1600"/>
-            </a:lvl8pPr>
-            <a:lvl9pPr>
-              <a:defRPr sz="1600"/>
-            </a:lvl9pPr>
-          </a:lstStyle>
-          <a:p>
-            <a:pPr lvl="0"/>
-            <a:r>
-              <a:rPr lang="en-US" smtClean="0"/>
-              <a:t>Click to edit Master text styles</a:t>
-            </a:r>
-          </a:p>
-          <a:p>
-            <a:pPr lvl="1"/>
-            <a:r>
-              <a:rPr lang="en-US" smtClean="0"/>
-              <a:t>Second level</a:t>
-            </a:r>
-          </a:p>
-          <a:p>
-            <a:pPr lvl="2"/>
-            <a:r>
-              <a:rPr lang="en-US" smtClean="0"/>
-              <a:t>Third level</a:t>
-            </a:r>
-          </a:p>
-          <a:p>
-            <a:pPr lvl="3"/>
-            <a:r>
-              <a:rPr lang="en-US" smtClean="0"/>
-              <a:t>Fourth level</a:t>
-            </a:r>
-          </a:p>
-          <a:p>
-            <a:pPr lvl="4"/>
-            <a:r>
-              <a:rPr lang="en-US" smtClean="0"/>
-              <a:t>Fifth level</a:t>
-            </a:r>
-            <a:endParaRPr lang="en-GB"/>
-          </a:p>
-        </p:txBody>
-      </p:sp>
-      <p:sp>
-        <p:nvSpPr>
-          <p:cNvPr id="5" name="Text Placeholder 4"/>
-          <p:cNvSpPr>
-            <a:spLocks noGrp="1"/>
-          </p:cNvSpPr>
-          <p:nvPr>
-            <p:ph type="body" sz="quarter" idx="3"/>
-          </p:nvPr>
-        </p:nvSpPr>
-        <p:spPr>
-          <a:xfrm>
-            <a:off x="4645025" y="1535113"/>
-            <a:ext cx="4041775" cy="639762"/>
-          </a:xfrm>
-        </p:spPr>
-        <p:txBody>
-          <a:bodyPr anchor="b"/>
-          <a:lstStyle>
-            <a:lvl1pPr marL="0" indent="0">
-              <a:buNone/>
-              <a:defRPr sz="2400" b="1"/>
-            </a:lvl1pPr>
-            <a:lvl2pPr marL="457200" indent="0">
-              <a:buNone/>
-              <a:defRPr sz="2000" b="1"/>
-            </a:lvl2pPr>
-            <a:lvl3pPr marL="914400" indent="0">
-              <a:buNone/>
-              <a:defRPr sz="1800" b="1"/>
-            </a:lvl3pPr>
-            <a:lvl4pPr marL="1371600" indent="0">
-              <a:buNone/>
-              <a:defRPr sz="1600" b="1"/>
-            </a:lvl4pPr>
-            <a:lvl5pPr marL="1828800" indent="0">
-              <a:buNone/>
-              <a:defRPr sz="1600" b="1"/>
-            </a:lvl5pPr>
-            <a:lvl6pPr marL="2286000" indent="0">
-              <a:buNone/>
-              <a:defRPr sz="1600" b="1"/>
-            </a:lvl6pPr>
-            <a:lvl7pPr marL="2743200" indent="0">
-              <a:buNone/>
-              <a:defRPr sz="1600" b="1"/>
-            </a:lvl7pPr>
-            <a:lvl8pPr marL="3200400" indent="0">
-              <a:buNone/>
-              <a:defRPr sz="1600" b="1"/>
-            </a:lvl8pPr>
-            <a:lvl9pPr marL="3657600" indent="0">
-              <a:buNone/>
-              <a:defRPr sz="1600" b="1"/>
-            </a:lvl9pPr>
-          </a:lstStyle>
-          <a:p>
-            <a:pPr lvl="0"/>
-            <a:r>
-              <a:rPr lang="en-US" smtClean="0"/>
-              <a:t>Click to edit Master text styles</a:t>
-            </a:r>
-          </a:p>
-        </p:txBody>
-      </p:sp>
-      <p:sp>
-        <p:nvSpPr>
-          <p:cNvPr id="6" name="Content Placeholder 5"/>
-          <p:cNvSpPr>
-            <a:spLocks noGrp="1"/>
-          </p:cNvSpPr>
-          <p:nvPr>
-            <p:ph sz="quarter" idx="4"/>
-          </p:nvPr>
-        </p:nvSpPr>
-        <p:spPr>
-          <a:xfrm>
-            <a:off x="4645025" y="2174875"/>
-            <a:ext cx="4041775" cy="3951288"/>
-          </a:xfrm>
-        </p:spPr>
-        <p:txBody>
-          <a:bodyPr/>
-          <a:lstStyle>
-            <a:lvl1pPr>
-              <a:defRPr sz="2400"/>
-            </a:lvl1pPr>
-            <a:lvl2pPr>
-              <a:defRPr sz="2000"/>
-            </a:lvl2pPr>
-            <a:lvl3pPr>
-              <a:defRPr sz="1800"/>
-            </a:lvl3pPr>
-            <a:lvl4pPr>
-              <a:defRPr sz="1600"/>
-            </a:lvl4pPr>
-            <a:lvl5pPr>
-              <a:defRPr sz="1600"/>
-            </a:lvl5pPr>
-            <a:lvl6pPr>
-              <a:defRPr sz="1600"/>
-            </a:lvl6pPr>
-            <a:lvl7pPr>
-              <a:defRPr sz="1600"/>
-            </a:lvl7pPr>
-            <a:lvl8pPr>
-              <a:defRPr sz="1600"/>
-            </a:lvl8pPr>
-            <a:lvl9pPr>
-              <a:defRPr sz="1600"/>
-            </a:lvl9pPr>
-          </a:lstStyle>
-          <a:p>
-            <a:pPr lvl="0"/>
-            <a:r>
-              <a:rPr lang="en-US" smtClean="0"/>
-              <a:t>Click to edit Master text styles</a:t>
-            </a:r>
-          </a:p>
-          <a:p>
-            <a:pPr lvl="1"/>
-            <a:r>
-              <a:rPr lang="en-US" smtClean="0"/>
-              <a:t>Second level</a:t>
-            </a:r>
-          </a:p>
-          <a:p>
-            <a:pPr lvl="2"/>
-            <a:r>
-              <a:rPr lang="en-US" smtClean="0"/>
-              <a:t>Third level</a:t>
-            </a:r>
-          </a:p>
-          <a:p>
-            <a:pPr lvl="3"/>
-            <a:r>
-              <a:rPr lang="en-US" smtClean="0"/>
-              <a:t>Fourth level</a:t>
-            </a:r>
-          </a:p>
-          <a:p>
-            <a:pPr lvl="4"/>
-            <a:r>
-              <a:rPr lang="en-US" smtClean="0"/>
-              <a:t>Fifth level</a:t>
-            </a:r>
-            <a:endParaRPr lang="en-GB"/>
-          </a:p>
-        </p:txBody>
-      </p:sp>
-      <p:sp>
-        <p:nvSpPr>
           <p:cNvPr id="7" name="Date Placeholder 6"/>
           <p:cNvSpPr>
             <a:spLocks noGrp="1"/>
@@ -1415,9 +1767,9 @@
           <a:bodyPr/>
           <a:lstStyle/>
           <a:p>
-            <a:fld id="{E6744CE3-0875-4B69-89C0-6F72D8139561}" type="datetimeFigureOut">
+            <a:fld id="{6BA5D40C-A8DC-479A-A5D3-E7B4936A184B}" type="datetimeFigureOut">
               <a:rPr lang="en-GB" smtClean="0"/>
-              <a:t>26/05/17</a:t>
+              <a:t>15/07/2015</a:t>
             </a:fld>
             <a:endParaRPr lang="en-GB"/>
           </a:p>
@@ -1457,7 +1809,7 @@
           <a:bodyPr/>
           <a:lstStyle/>
           <a:p>
-            <a:fld id="{8DADB20D-508E-4C6D-A9E4-257D5607B0F6}" type="slidenum">
+            <a:fld id="{52235FAC-C7EA-4164-B888-497B3F49A53C}" type="slidenum">
               <a:rPr lang="en-GB" smtClean="0"/>
               <a:t>‹#›</a:t>
             </a:fld>
@@ -1468,7 +1820,7 @@
     </p:spTree>
     <p:extLst>
       <p:ext uri="{BB962C8B-B14F-4D97-AF65-F5344CB8AC3E}">
-        <p14:creationId xmlns:p14="http://schemas.microsoft.com/office/powerpoint/2010/main" val="2120349123"/>
+        <p14:creationId xmlns:p14="http://schemas.microsoft.com/office/powerpoint/2010/main" val="4230559702"/>
       </p:ext>
     </p:extLst>
   </p:cSld>
@@ -1533,9 +1885,9 @@
           <a:bodyPr/>
           <a:lstStyle/>
           <a:p>
-            <a:fld id="{E6744CE3-0875-4B69-89C0-6F72D8139561}" type="datetimeFigureOut">
+            <a:fld id="{6BA5D40C-A8DC-479A-A5D3-E7B4936A184B}" type="datetimeFigureOut">
               <a:rPr lang="en-GB" smtClean="0"/>
-              <a:t>26/05/17</a:t>
+              <a:t>15/07/2015</a:t>
             </a:fld>
             <a:endParaRPr lang="en-GB"/>
           </a:p>
@@ -1575,7 +1927,7 @@
           <a:bodyPr/>
           <a:lstStyle/>
           <a:p>
-            <a:fld id="{8DADB20D-508E-4C6D-A9E4-257D5607B0F6}" type="slidenum">
+            <a:fld id="{52235FAC-C7EA-4164-B888-497B3F49A53C}" type="slidenum">
               <a:rPr lang="en-GB" smtClean="0"/>
               <a:t>‹#›</a:t>
             </a:fld>
@@ -1586,7 +1938,7 @@
     </p:spTree>
     <p:extLst>
       <p:ext uri="{BB962C8B-B14F-4D97-AF65-F5344CB8AC3E}">
-        <p14:creationId xmlns:p14="http://schemas.microsoft.com/office/powerpoint/2010/main" val="1385807973"/>
+        <p14:creationId xmlns:p14="http://schemas.microsoft.com/office/powerpoint/2010/main" val="3001564123"/>
       </p:ext>
     </p:extLst>
   </p:cSld>
@@ -1628,9 +1980,9 @@
           <a:bodyPr/>
           <a:lstStyle/>
           <a:p>
-            <a:fld id="{E6744CE3-0875-4B69-89C0-6F72D8139561}" type="datetimeFigureOut">
+            <a:fld id="{6BA5D40C-A8DC-479A-A5D3-E7B4936A184B}" type="datetimeFigureOut">
               <a:rPr lang="en-GB" smtClean="0"/>
-              <a:t>26/05/17</a:t>
+              <a:t>15/07/2015</a:t>
             </a:fld>
             <a:endParaRPr lang="en-GB"/>
           </a:p>
@@ -1670,7 +2022,7 @@
           <a:bodyPr/>
           <a:lstStyle/>
           <a:p>
-            <a:fld id="{8DADB20D-508E-4C6D-A9E4-257D5607B0F6}" type="slidenum">
+            <a:fld id="{52235FAC-C7EA-4164-B888-497B3F49A53C}" type="slidenum">
               <a:rPr lang="en-GB" smtClean="0"/>
               <a:t>‹#›</a:t>
             </a:fld>
@@ -1681,7 +2033,537 @@
     </p:spTree>
     <p:extLst>
       <p:ext uri="{BB962C8B-B14F-4D97-AF65-F5344CB8AC3E}">
-        <p14:creationId xmlns:p14="http://schemas.microsoft.com/office/powerpoint/2010/main" val="2755996059"/>
+        <p14:creationId xmlns:p14="http://schemas.microsoft.com/office/powerpoint/2010/main" val="2431818814"/>
+      </p:ext>
+    </p:extLst>
+  </p:cSld>
+  <p:clrMapOvr>
+    <a:masterClrMapping/>
+  </p:clrMapOvr>
+</p:sldLayout>
+</file>
+
+<file path=ppt/slideLayouts/slideLayout8.xml><?xml version="1.0" encoding="utf-8"?>
+<p:sldLayout xmlns:a="http://schemas.openxmlformats.org/drawingml/2006/main" xmlns:r="http://schemas.openxmlformats.org/officeDocument/2006/relationships" xmlns:p="http://schemas.openxmlformats.org/presentationml/2006/main" type="objTx" preserve="1">
+  <p:cSld name="Content with Caption">
+    <p:spTree>
+      <p:nvGrpSpPr>
+        <p:cNvPr id="1" name=""/>
+        <p:cNvGrpSpPr/>
+        <p:nvPr/>
+      </p:nvGrpSpPr>
+      <p:grpSpPr>
+        <a:xfrm>
+          <a:off x="0" y="0"/>
+          <a:ext cx="0" cy="0"/>
+          <a:chOff x="0" y="0"/>
+          <a:chExt cx="0" cy="0"/>
+        </a:xfrm>
+      </p:grpSpPr>
+      <p:sp>
+        <p:nvSpPr>
+          <p:cNvPr id="2" name="Title 1"/>
+          <p:cNvSpPr>
+            <a:spLocks noGrp="1"/>
+          </p:cNvSpPr>
+          <p:nvPr>
+            <p:ph type="title"/>
+          </p:nvPr>
+        </p:nvSpPr>
+        <p:spPr>
+          <a:xfrm>
+            <a:off x="754384" y="425946"/>
+            <a:ext cx="4963717" cy="1812744"/>
+          </a:xfrm>
+        </p:spPr>
+        <p:txBody>
+          <a:bodyPr anchor="b"/>
+          <a:lstStyle>
+            <a:lvl1pPr algn="l">
+              <a:defRPr sz="2300" b="1"/>
+            </a:lvl1pPr>
+          </a:lstStyle>
+          <a:p>
+            <a:r>
+              <a:rPr lang="en-US" smtClean="0"/>
+              <a:t>Click to edit Master title style</a:t>
+            </a:r>
+            <a:endParaRPr lang="en-GB"/>
+          </a:p>
+        </p:txBody>
+      </p:sp>
+      <p:sp>
+        <p:nvSpPr>
+          <p:cNvPr id="3" name="Content Placeholder 2"/>
+          <p:cNvSpPr>
+            <a:spLocks noGrp="1"/>
+          </p:cNvSpPr>
+          <p:nvPr>
+            <p:ph idx="1"/>
+          </p:nvPr>
+        </p:nvSpPr>
+        <p:spPr>
+          <a:xfrm>
+            <a:off x="5898834" y="425950"/>
+            <a:ext cx="8434386" cy="9130587"/>
+          </a:xfrm>
+        </p:spPr>
+        <p:txBody>
+          <a:bodyPr/>
+          <a:lstStyle>
+            <a:lvl1pPr>
+              <a:defRPr sz="3700"/>
+            </a:lvl1pPr>
+            <a:lvl2pPr>
+              <a:defRPr sz="3200"/>
+            </a:lvl2pPr>
+            <a:lvl3pPr>
+              <a:defRPr sz="2800"/>
+            </a:lvl3pPr>
+            <a:lvl4pPr>
+              <a:defRPr sz="2300"/>
+            </a:lvl4pPr>
+            <a:lvl5pPr>
+              <a:defRPr sz="2300"/>
+            </a:lvl5pPr>
+            <a:lvl6pPr>
+              <a:defRPr sz="2300"/>
+            </a:lvl6pPr>
+            <a:lvl7pPr>
+              <a:defRPr sz="2300"/>
+            </a:lvl7pPr>
+            <a:lvl8pPr>
+              <a:defRPr sz="2300"/>
+            </a:lvl8pPr>
+            <a:lvl9pPr>
+              <a:defRPr sz="2300"/>
+            </a:lvl9pPr>
+          </a:lstStyle>
+          <a:p>
+            <a:pPr lvl="0"/>
+            <a:r>
+              <a:rPr lang="en-US" smtClean="0"/>
+              <a:t>Click to edit Master text styles</a:t>
+            </a:r>
+          </a:p>
+          <a:p>
+            <a:pPr lvl="1"/>
+            <a:r>
+              <a:rPr lang="en-US" smtClean="0"/>
+              <a:t>Second level</a:t>
+            </a:r>
+          </a:p>
+          <a:p>
+            <a:pPr lvl="2"/>
+            <a:r>
+              <a:rPr lang="en-US" smtClean="0"/>
+              <a:t>Third level</a:t>
+            </a:r>
+          </a:p>
+          <a:p>
+            <a:pPr lvl="3"/>
+            <a:r>
+              <a:rPr lang="en-US" smtClean="0"/>
+              <a:t>Fourth level</a:t>
+            </a:r>
+          </a:p>
+          <a:p>
+            <a:pPr lvl="4"/>
+            <a:r>
+              <a:rPr lang="en-US" smtClean="0"/>
+              <a:t>Fifth level</a:t>
+            </a:r>
+            <a:endParaRPr lang="en-GB"/>
+          </a:p>
+        </p:txBody>
+      </p:sp>
+      <p:sp>
+        <p:nvSpPr>
+          <p:cNvPr id="4" name="Text Placeholder 3"/>
+          <p:cNvSpPr>
+            <a:spLocks noGrp="1"/>
+          </p:cNvSpPr>
+          <p:nvPr>
+            <p:ph type="body" sz="half" idx="2"/>
+          </p:nvPr>
+        </p:nvSpPr>
+        <p:spPr>
+          <a:xfrm>
+            <a:off x="754384" y="2238692"/>
+            <a:ext cx="4963717" cy="7317841"/>
+          </a:xfrm>
+        </p:spPr>
+        <p:txBody>
+          <a:bodyPr/>
+          <a:lstStyle>
+            <a:lvl1pPr marL="0" indent="0">
+              <a:buNone/>
+              <a:defRPr sz="1600"/>
+            </a:lvl1pPr>
+            <a:lvl2pPr marL="526237" indent="0">
+              <a:buNone/>
+              <a:defRPr sz="1400"/>
+            </a:lvl2pPr>
+            <a:lvl3pPr marL="1052474" indent="0">
+              <a:buNone/>
+              <a:defRPr sz="1200"/>
+            </a:lvl3pPr>
+            <a:lvl4pPr marL="1578712" indent="0">
+              <a:buNone/>
+              <a:defRPr sz="1000"/>
+            </a:lvl4pPr>
+            <a:lvl5pPr marL="2104949" indent="0">
+              <a:buNone/>
+              <a:defRPr sz="1000"/>
+            </a:lvl5pPr>
+            <a:lvl6pPr marL="2631186" indent="0">
+              <a:buNone/>
+              <a:defRPr sz="1000"/>
+            </a:lvl6pPr>
+            <a:lvl7pPr marL="3157423" indent="0">
+              <a:buNone/>
+              <a:defRPr sz="1000"/>
+            </a:lvl7pPr>
+            <a:lvl8pPr marL="3683660" indent="0">
+              <a:buNone/>
+              <a:defRPr sz="1000"/>
+            </a:lvl8pPr>
+            <a:lvl9pPr marL="4209898" indent="0">
+              <a:buNone/>
+              <a:defRPr sz="1000"/>
+            </a:lvl9pPr>
+          </a:lstStyle>
+          <a:p>
+            <a:pPr lvl="0"/>
+            <a:r>
+              <a:rPr lang="en-US" smtClean="0"/>
+              <a:t>Click to edit Master text styles</a:t>
+            </a:r>
+          </a:p>
+        </p:txBody>
+      </p:sp>
+      <p:sp>
+        <p:nvSpPr>
+          <p:cNvPr id="5" name="Date Placeholder 4"/>
+          <p:cNvSpPr>
+            <a:spLocks noGrp="1"/>
+          </p:cNvSpPr>
+          <p:nvPr>
+            <p:ph type="dt" sz="half" idx="10"/>
+          </p:nvPr>
+        </p:nvSpPr>
+        <p:spPr/>
+        <p:txBody>
+          <a:bodyPr/>
+          <a:lstStyle/>
+          <a:p>
+            <a:fld id="{6BA5D40C-A8DC-479A-A5D3-E7B4936A184B}" type="datetimeFigureOut">
+              <a:rPr lang="en-GB" smtClean="0"/>
+              <a:t>15/07/2015</a:t>
+            </a:fld>
+            <a:endParaRPr lang="en-GB"/>
+          </a:p>
+        </p:txBody>
+      </p:sp>
+      <p:sp>
+        <p:nvSpPr>
+          <p:cNvPr id="6" name="Footer Placeholder 5"/>
+          <p:cNvSpPr>
+            <a:spLocks noGrp="1"/>
+          </p:cNvSpPr>
+          <p:nvPr>
+            <p:ph type="ftr" sz="quarter" idx="11"/>
+          </p:nvPr>
+        </p:nvSpPr>
+        <p:spPr/>
+        <p:txBody>
+          <a:bodyPr/>
+          <a:lstStyle/>
+          <a:p>
+            <a:endParaRPr lang="en-GB"/>
+          </a:p>
+        </p:txBody>
+      </p:sp>
+      <p:sp>
+        <p:nvSpPr>
+          <p:cNvPr id="7" name="Slide Number Placeholder 6"/>
+          <p:cNvSpPr>
+            <a:spLocks noGrp="1"/>
+          </p:cNvSpPr>
+          <p:nvPr>
+            <p:ph type="sldNum" sz="quarter" idx="12"/>
+          </p:nvPr>
+        </p:nvSpPr>
+        <p:spPr/>
+        <p:txBody>
+          <a:bodyPr/>
+          <a:lstStyle/>
+          <a:p>
+            <a:fld id="{52235FAC-C7EA-4164-B888-497B3F49A53C}" type="slidenum">
+              <a:rPr lang="en-GB" smtClean="0"/>
+              <a:t>‹#›</a:t>
+            </a:fld>
+            <a:endParaRPr lang="en-GB"/>
+          </a:p>
+        </p:txBody>
+      </p:sp>
+    </p:spTree>
+    <p:extLst>
+      <p:ext uri="{BB962C8B-B14F-4D97-AF65-F5344CB8AC3E}">
+        <p14:creationId xmlns:p14="http://schemas.microsoft.com/office/powerpoint/2010/main" val="1310804531"/>
+      </p:ext>
+    </p:extLst>
+  </p:cSld>
+  <p:clrMapOvr>
+    <a:masterClrMapping/>
+  </p:clrMapOvr>
+</p:sldLayout>
+</file>
+
+<file path=ppt/slideLayouts/slideLayout9.xml><?xml version="1.0" encoding="utf-8"?>
+<p:sldLayout xmlns:a="http://schemas.openxmlformats.org/drawingml/2006/main" xmlns:r="http://schemas.openxmlformats.org/officeDocument/2006/relationships" xmlns:p="http://schemas.openxmlformats.org/presentationml/2006/main" type="picTx" preserve="1">
+  <p:cSld name="Picture with Caption">
+    <p:spTree>
+      <p:nvGrpSpPr>
+        <p:cNvPr id="1" name=""/>
+        <p:cNvGrpSpPr/>
+        <p:nvPr/>
+      </p:nvGrpSpPr>
+      <p:grpSpPr>
+        <a:xfrm>
+          <a:off x="0" y="0"/>
+          <a:ext cx="0" cy="0"/>
+          <a:chOff x="0" y="0"/>
+          <a:chExt cx="0" cy="0"/>
+        </a:xfrm>
+      </p:grpSpPr>
+      <p:sp>
+        <p:nvSpPr>
+          <p:cNvPr id="2" name="Title 1"/>
+          <p:cNvSpPr>
+            <a:spLocks noGrp="1"/>
+          </p:cNvSpPr>
+          <p:nvPr>
+            <p:ph type="title"/>
+          </p:nvPr>
+        </p:nvSpPr>
+        <p:spPr>
+          <a:xfrm>
+            <a:off x="2957275" y="7488714"/>
+            <a:ext cx="9052560" cy="884086"/>
+          </a:xfrm>
+        </p:spPr>
+        <p:txBody>
+          <a:bodyPr anchor="b"/>
+          <a:lstStyle>
+            <a:lvl1pPr algn="l">
+              <a:defRPr sz="2300" b="1"/>
+            </a:lvl1pPr>
+          </a:lstStyle>
+          <a:p>
+            <a:r>
+              <a:rPr lang="en-US" smtClean="0"/>
+              <a:t>Click to edit Master title style</a:t>
+            </a:r>
+            <a:endParaRPr lang="en-GB"/>
+          </a:p>
+        </p:txBody>
+      </p:sp>
+      <p:sp>
+        <p:nvSpPr>
+          <p:cNvPr id="3" name="Picture Placeholder 2"/>
+          <p:cNvSpPr>
+            <a:spLocks noGrp="1"/>
+          </p:cNvSpPr>
+          <p:nvPr>
+            <p:ph type="pic" idx="1"/>
+          </p:nvPr>
+        </p:nvSpPr>
+        <p:spPr>
+          <a:xfrm>
+            <a:off x="2957275" y="955901"/>
+            <a:ext cx="9052560" cy="6418898"/>
+          </a:xfrm>
+        </p:spPr>
+        <p:txBody>
+          <a:bodyPr/>
+          <a:lstStyle>
+            <a:lvl1pPr marL="0" indent="0">
+              <a:buNone/>
+              <a:defRPr sz="3700"/>
+            </a:lvl1pPr>
+            <a:lvl2pPr marL="526237" indent="0">
+              <a:buNone/>
+              <a:defRPr sz="3200"/>
+            </a:lvl2pPr>
+            <a:lvl3pPr marL="1052474" indent="0">
+              <a:buNone/>
+              <a:defRPr sz="2800"/>
+            </a:lvl3pPr>
+            <a:lvl4pPr marL="1578712" indent="0">
+              <a:buNone/>
+              <a:defRPr sz="2300"/>
+            </a:lvl4pPr>
+            <a:lvl5pPr marL="2104949" indent="0">
+              <a:buNone/>
+              <a:defRPr sz="2300"/>
+            </a:lvl5pPr>
+            <a:lvl6pPr marL="2631186" indent="0">
+              <a:buNone/>
+              <a:defRPr sz="2300"/>
+            </a:lvl6pPr>
+            <a:lvl7pPr marL="3157423" indent="0">
+              <a:buNone/>
+              <a:defRPr sz="2300"/>
+            </a:lvl7pPr>
+            <a:lvl8pPr marL="3683660" indent="0">
+              <a:buNone/>
+              <a:defRPr sz="2300"/>
+            </a:lvl8pPr>
+            <a:lvl9pPr marL="4209898" indent="0">
+              <a:buNone/>
+              <a:defRPr sz="2300"/>
+            </a:lvl9pPr>
+          </a:lstStyle>
+          <a:p>
+            <a:endParaRPr lang="en-GB"/>
+          </a:p>
+        </p:txBody>
+      </p:sp>
+      <p:sp>
+        <p:nvSpPr>
+          <p:cNvPr id="4" name="Text Placeholder 3"/>
+          <p:cNvSpPr>
+            <a:spLocks noGrp="1"/>
+          </p:cNvSpPr>
+          <p:nvPr>
+            <p:ph type="body" sz="half" idx="2"/>
+          </p:nvPr>
+        </p:nvSpPr>
+        <p:spPr>
+          <a:xfrm>
+            <a:off x="2957275" y="8372800"/>
+            <a:ext cx="9052560" cy="1255547"/>
+          </a:xfrm>
+        </p:spPr>
+        <p:txBody>
+          <a:bodyPr/>
+          <a:lstStyle>
+            <a:lvl1pPr marL="0" indent="0">
+              <a:buNone/>
+              <a:defRPr sz="1600"/>
+            </a:lvl1pPr>
+            <a:lvl2pPr marL="526237" indent="0">
+              <a:buNone/>
+              <a:defRPr sz="1400"/>
+            </a:lvl2pPr>
+            <a:lvl3pPr marL="1052474" indent="0">
+              <a:buNone/>
+              <a:defRPr sz="1200"/>
+            </a:lvl3pPr>
+            <a:lvl4pPr marL="1578712" indent="0">
+              <a:buNone/>
+              <a:defRPr sz="1000"/>
+            </a:lvl4pPr>
+            <a:lvl5pPr marL="2104949" indent="0">
+              <a:buNone/>
+              <a:defRPr sz="1000"/>
+            </a:lvl5pPr>
+            <a:lvl6pPr marL="2631186" indent="0">
+              <a:buNone/>
+              <a:defRPr sz="1000"/>
+            </a:lvl6pPr>
+            <a:lvl7pPr marL="3157423" indent="0">
+              <a:buNone/>
+              <a:defRPr sz="1000"/>
+            </a:lvl7pPr>
+            <a:lvl8pPr marL="3683660" indent="0">
+              <a:buNone/>
+              <a:defRPr sz="1000"/>
+            </a:lvl8pPr>
+            <a:lvl9pPr marL="4209898" indent="0">
+              <a:buNone/>
+              <a:defRPr sz="1000"/>
+            </a:lvl9pPr>
+          </a:lstStyle>
+          <a:p>
+            <a:pPr lvl="0"/>
+            <a:r>
+              <a:rPr lang="en-US" smtClean="0"/>
+              <a:t>Click to edit Master text styles</a:t>
+            </a:r>
+          </a:p>
+        </p:txBody>
+      </p:sp>
+      <p:sp>
+        <p:nvSpPr>
+          <p:cNvPr id="5" name="Date Placeholder 4"/>
+          <p:cNvSpPr>
+            <a:spLocks noGrp="1"/>
+          </p:cNvSpPr>
+          <p:nvPr>
+            <p:ph type="dt" sz="half" idx="10"/>
+          </p:nvPr>
+        </p:nvSpPr>
+        <p:spPr/>
+        <p:txBody>
+          <a:bodyPr/>
+          <a:lstStyle/>
+          <a:p>
+            <a:fld id="{6BA5D40C-A8DC-479A-A5D3-E7B4936A184B}" type="datetimeFigureOut">
+              <a:rPr lang="en-GB" smtClean="0"/>
+              <a:t>15/07/2015</a:t>
+            </a:fld>
+            <a:endParaRPr lang="en-GB"/>
+          </a:p>
+        </p:txBody>
+      </p:sp>
+      <p:sp>
+        <p:nvSpPr>
+          <p:cNvPr id="6" name="Footer Placeholder 5"/>
+          <p:cNvSpPr>
+            <a:spLocks noGrp="1"/>
+          </p:cNvSpPr>
+          <p:nvPr>
+            <p:ph type="ftr" sz="quarter" idx="11"/>
+          </p:nvPr>
+        </p:nvSpPr>
+        <p:spPr/>
+        <p:txBody>
+          <a:bodyPr/>
+          <a:lstStyle/>
+          <a:p>
+            <a:endParaRPr lang="en-GB"/>
+          </a:p>
+        </p:txBody>
+      </p:sp>
+      <p:sp>
+        <p:nvSpPr>
+          <p:cNvPr id="7" name="Slide Number Placeholder 6"/>
+          <p:cNvSpPr>
+            <a:spLocks noGrp="1"/>
+          </p:cNvSpPr>
+          <p:nvPr>
+            <p:ph type="sldNum" sz="quarter" idx="12"/>
+          </p:nvPr>
+        </p:nvSpPr>
+        <p:spPr/>
+        <p:txBody>
+          <a:bodyPr/>
+          <a:lstStyle/>
+          <a:p>
+            <a:fld id="{52235FAC-C7EA-4164-B888-497B3F49A53C}" type="slidenum">
+              <a:rPr lang="en-GB" smtClean="0"/>
+              <a:t>‹#›</a:t>
+            </a:fld>
+            <a:endParaRPr lang="en-GB"/>
+          </a:p>
+        </p:txBody>
+      </p:sp>
+    </p:spTree>
+    <p:extLst>
+      <p:ext uri="{BB962C8B-B14F-4D97-AF65-F5344CB8AC3E}">
+        <p14:creationId xmlns:p14="http://schemas.microsoft.com/office/powerpoint/2010/main" val="1056271408"/>
       </p:ext>
     </p:extLst>
   </p:cSld>
@@ -1725,15 +2607,15 @@
         </p:nvSpPr>
         <p:spPr>
           <a:xfrm>
-            <a:off x="457200" y="274638"/>
-            <a:ext cx="8229600" cy="1143000"/>
+            <a:off x="754380" y="428422"/>
+            <a:ext cx="13578840" cy="1783027"/>
           </a:xfrm>
           <a:prstGeom prst="rect">
             <a:avLst/>
           </a:prstGeom>
         </p:spPr>
         <p:txBody>
-          <a:bodyPr vert="horz" lIns="91440" tIns="45720" rIns="91440" bIns="45720" rtlCol="0" anchor="ctr">
+          <a:bodyPr vert="horz" lIns="105247" tIns="52624" rIns="105247" bIns="52624" rtlCol="0" anchor="ctr">
             <a:normAutofit/>
           </a:bodyPr>
           <a:lstStyle/>
@@ -1758,15 +2640,15 @@
         </p:nvSpPr>
         <p:spPr>
           <a:xfrm>
-            <a:off x="457200" y="1600200"/>
-            <a:ext cx="8229600" cy="4525963"/>
+            <a:off x="754380" y="2496240"/>
+            <a:ext cx="13578840" cy="7060293"/>
           </a:xfrm>
           <a:prstGeom prst="rect">
             <a:avLst/>
           </a:prstGeom>
         </p:spPr>
         <p:txBody>
-          <a:bodyPr vert="horz" lIns="91440" tIns="45720" rIns="91440" bIns="45720" rtlCol="0">
+          <a:bodyPr vert="horz" lIns="105247" tIns="52624" rIns="105247" bIns="52624" rtlCol="0">
             <a:normAutofit/>
           </a:bodyPr>
           <a:lstStyle/>
@@ -1820,18 +2702,18 @@
         </p:nvSpPr>
         <p:spPr>
           <a:xfrm>
-            <a:off x="457200" y="6356350"/>
-            <a:ext cx="2133600" cy="365125"/>
+            <a:off x="754380" y="9915617"/>
+            <a:ext cx="3520440" cy="569578"/>
           </a:xfrm>
           <a:prstGeom prst="rect">
             <a:avLst/>
           </a:prstGeom>
         </p:spPr>
         <p:txBody>
-          <a:bodyPr vert="horz" lIns="91440" tIns="45720" rIns="91440" bIns="45720" rtlCol="0" anchor="ctr"/>
+          <a:bodyPr vert="horz" lIns="105247" tIns="52624" rIns="105247" bIns="52624" rtlCol="0" anchor="ctr"/>
           <a:lstStyle>
             <a:lvl1pPr algn="l">
-              <a:defRPr sz="1200">
+              <a:defRPr sz="1400">
                 <a:solidFill>
                   <a:schemeClr val="tx1">
                     <a:tint val="75000"/>
@@ -1841,9 +2723,9 @@
             </a:lvl1pPr>
           </a:lstStyle>
           <a:p>
-            <a:fld id="{E6744CE3-0875-4B69-89C0-6F72D8139561}" type="datetimeFigureOut">
+            <a:fld id="{6BA5D40C-A8DC-479A-A5D3-E7B4936A184B}" type="datetimeFigureOut">
               <a:rPr lang="en-GB" smtClean="0"/>
-              <a:t>26/05/17</a:t>
+              <a:t>15/07/2015</a:t>
             </a:fld>
             <a:endParaRPr lang="en-GB"/>
           </a:p>
@@ -1861,18 +2743,18 @@
         </p:nvSpPr>
         <p:spPr>
           <a:xfrm>
-            <a:off x="3124200" y="6356350"/>
-            <a:ext cx="2895600" cy="365125"/>
+            <a:off x="5154930" y="9915617"/>
+            <a:ext cx="4777740" cy="569578"/>
           </a:xfrm>
           <a:prstGeom prst="rect">
             <a:avLst/>
           </a:prstGeom>
         </p:spPr>
         <p:txBody>
-          <a:bodyPr vert="horz" lIns="91440" tIns="45720" rIns="91440" bIns="45720" rtlCol="0" anchor="ctr"/>
+          <a:bodyPr vert="horz" lIns="105247" tIns="52624" rIns="105247" bIns="52624" rtlCol="0" anchor="ctr"/>
           <a:lstStyle>
             <a:lvl1pPr algn="ctr">
-              <a:defRPr sz="1200">
+              <a:defRPr sz="1400">
                 <a:solidFill>
                   <a:schemeClr val="tx1">
                     <a:tint val="75000"/>
@@ -1898,18 +2780,18 @@
         </p:nvSpPr>
         <p:spPr>
           <a:xfrm>
-            <a:off x="6553200" y="6356350"/>
-            <a:ext cx="2133600" cy="365125"/>
+            <a:off x="10812780" y="9915617"/>
+            <a:ext cx="3520440" cy="569578"/>
           </a:xfrm>
           <a:prstGeom prst="rect">
             <a:avLst/>
           </a:prstGeom>
         </p:spPr>
         <p:txBody>
-          <a:bodyPr vert="horz" lIns="91440" tIns="45720" rIns="91440" bIns="45720" rtlCol="0" anchor="ctr"/>
+          <a:bodyPr vert="horz" lIns="105247" tIns="52624" rIns="105247" bIns="52624" rtlCol="0" anchor="ctr"/>
           <a:lstStyle>
             <a:lvl1pPr algn="r">
-              <a:defRPr sz="1200">
+              <a:defRPr sz="1400">
                 <a:solidFill>
                   <a:schemeClr val="tx1">
                     <a:tint val="75000"/>
@@ -1919,7 +2801,7 @@
             </a:lvl1pPr>
           </a:lstStyle>
           <a:p>
-            <a:fld id="{8DADB20D-508E-4C6D-A9E4-257D5607B0F6}" type="slidenum">
+            <a:fld id="{52235FAC-C7EA-4164-B888-497B3F49A53C}" type="slidenum">
               <a:rPr lang="en-GB" smtClean="0"/>
               <a:t>‹#›</a:t>
             </a:fld>
@@ -1930,7 +2812,7 @@
     </p:spTree>
     <p:extLst>
       <p:ext uri="{BB962C8B-B14F-4D97-AF65-F5344CB8AC3E}">
-        <p14:creationId xmlns:p14="http://schemas.microsoft.com/office/powerpoint/2010/main" val="307823620"/>
+        <p14:creationId xmlns:p14="http://schemas.microsoft.com/office/powerpoint/2010/main" val="666274591"/>
       </p:ext>
     </p:extLst>
   </p:cSld>
@@ -1943,15 +2825,19 @@
     <p:sldLayoutId id="2147483653" r:id="rId5"/>
     <p:sldLayoutId id="2147483654" r:id="rId6"/>
     <p:sldLayoutId id="2147483655" r:id="rId7"/>
+    <p:sldLayoutId id="2147483656" r:id="rId8"/>
+    <p:sldLayoutId id="2147483657" r:id="rId9"/>
+    <p:sldLayoutId id="2147483658" r:id="rId10"/>
+    <p:sldLayoutId id="2147483659" r:id="rId11"/>
   </p:sldLayoutIdLst>
   <p:txStyles>
     <p:titleStyle>
-      <a:lvl1pPr algn="ctr" defTabSz="914400" rtl="0" eaLnBrk="1" latinLnBrk="0" hangingPunct="1">
+      <a:lvl1pPr algn="ctr" defTabSz="1052474" rtl="0" eaLnBrk="1" latinLnBrk="0" hangingPunct="1">
         <a:spcBef>
           <a:spcPct val="0"/>
         </a:spcBef>
         <a:buNone/>
-        <a:defRPr sz="4400" kern="1200">
+        <a:defRPr sz="5100" kern="1200">
           <a:solidFill>
             <a:schemeClr val="tx1"/>
           </a:solidFill>
@@ -1962,12 +2848,27 @@
       </a:lvl1pPr>
     </p:titleStyle>
     <p:bodyStyle>
-      <a:lvl1pPr marL="342900" indent="-342900" algn="l" defTabSz="914400" rtl="0" eaLnBrk="1" latinLnBrk="0" hangingPunct="1">
+      <a:lvl1pPr marL="394678" indent="-394678" algn="l" defTabSz="1052474" rtl="0" eaLnBrk="1" latinLnBrk="0" hangingPunct="1">
         <a:spcBef>
           <a:spcPct val="20000"/>
         </a:spcBef>
         <a:buFont typeface="Arial" panose="020B0604020202020204" pitchFamily="34" charset="0"/>
         <a:buChar char="•"/>
+        <a:defRPr sz="3700" kern="1200">
+          <a:solidFill>
+            <a:schemeClr val="tx1"/>
+          </a:solidFill>
+          <a:latin typeface="+mn-lt"/>
+          <a:ea typeface="+mn-ea"/>
+          <a:cs typeface="+mn-cs"/>
+        </a:defRPr>
+      </a:lvl1pPr>
+      <a:lvl2pPr marL="855135" indent="-328898" algn="l" defTabSz="1052474" rtl="0" eaLnBrk="1" latinLnBrk="0" hangingPunct="1">
+        <a:spcBef>
+          <a:spcPct val="20000"/>
+        </a:spcBef>
+        <a:buFont typeface="Arial" panose="020B0604020202020204" pitchFamily="34" charset="0"/>
+        <a:buChar char="–"/>
         <a:defRPr sz="3200" kern="1200">
           <a:solidFill>
             <a:schemeClr val="tx1"/>
@@ -1976,13 +2877,13 @@
           <a:ea typeface="+mn-ea"/>
           <a:cs typeface="+mn-cs"/>
         </a:defRPr>
-      </a:lvl1pPr>
-      <a:lvl2pPr marL="742950" indent="-285750" algn="l" defTabSz="914400" rtl="0" eaLnBrk="1" latinLnBrk="0" hangingPunct="1">
+      </a:lvl2pPr>
+      <a:lvl3pPr marL="1315593" indent="-263119" algn="l" defTabSz="1052474" rtl="0" eaLnBrk="1" latinLnBrk="0" hangingPunct="1">
         <a:spcBef>
           <a:spcPct val="20000"/>
         </a:spcBef>
         <a:buFont typeface="Arial" panose="020B0604020202020204" pitchFamily="34" charset="0"/>
-        <a:buChar char="–"/>
+        <a:buChar char="•"/>
         <a:defRPr sz="2800" kern="1200">
           <a:solidFill>
             <a:schemeClr val="tx1"/>
@@ -1991,29 +2892,14 @@
           <a:ea typeface="+mn-ea"/>
           <a:cs typeface="+mn-cs"/>
         </a:defRPr>
-      </a:lvl2pPr>
-      <a:lvl3pPr marL="1143000" indent="-228600" algn="l" defTabSz="914400" rtl="0" eaLnBrk="1" latinLnBrk="0" hangingPunct="1">
-        <a:spcBef>
-          <a:spcPct val="20000"/>
-        </a:spcBef>
-        <a:buFont typeface="Arial" panose="020B0604020202020204" pitchFamily="34" charset="0"/>
-        <a:buChar char="•"/>
-        <a:defRPr sz="2400" kern="1200">
-          <a:solidFill>
-            <a:schemeClr val="tx1"/>
-          </a:solidFill>
-          <a:latin typeface="+mn-lt"/>
-          <a:ea typeface="+mn-ea"/>
-          <a:cs typeface="+mn-cs"/>
-        </a:defRPr>
       </a:lvl3pPr>
-      <a:lvl4pPr marL="1600200" indent="-228600" algn="l" defTabSz="914400" rtl="0" eaLnBrk="1" latinLnBrk="0" hangingPunct="1">
+      <a:lvl4pPr marL="1841830" indent="-263119" algn="l" defTabSz="1052474" rtl="0" eaLnBrk="1" latinLnBrk="0" hangingPunct="1">
         <a:spcBef>
           <a:spcPct val="20000"/>
         </a:spcBef>
         <a:buFont typeface="Arial" panose="020B0604020202020204" pitchFamily="34" charset="0"/>
         <a:buChar char="–"/>
-        <a:defRPr sz="2000" kern="1200">
+        <a:defRPr sz="2300" kern="1200">
           <a:solidFill>
             <a:schemeClr val="tx1"/>
           </a:solidFill>
@@ -2022,13 +2908,13 @@
           <a:cs typeface="+mn-cs"/>
         </a:defRPr>
       </a:lvl4pPr>
-      <a:lvl5pPr marL="2057400" indent="-228600" algn="l" defTabSz="914400" rtl="0" eaLnBrk="1" latinLnBrk="0" hangingPunct="1">
+      <a:lvl5pPr marL="2368067" indent="-263119" algn="l" defTabSz="1052474" rtl="0" eaLnBrk="1" latinLnBrk="0" hangingPunct="1">
         <a:spcBef>
           <a:spcPct val="20000"/>
         </a:spcBef>
         <a:buFont typeface="Arial" panose="020B0604020202020204" pitchFamily="34" charset="0"/>
         <a:buChar char="»"/>
-        <a:defRPr sz="2000" kern="1200">
+        <a:defRPr sz="2300" kern="1200">
           <a:solidFill>
             <a:schemeClr val="tx1"/>
           </a:solidFill>
@@ -2037,13 +2923,13 @@
           <a:cs typeface="+mn-cs"/>
         </a:defRPr>
       </a:lvl5pPr>
-      <a:lvl6pPr marL="2514600" indent="-228600" algn="l" defTabSz="914400" rtl="0" eaLnBrk="1" latinLnBrk="0" hangingPunct="1">
+      <a:lvl6pPr marL="2894305" indent="-263119" algn="l" defTabSz="1052474" rtl="0" eaLnBrk="1" latinLnBrk="0" hangingPunct="1">
         <a:spcBef>
           <a:spcPct val="20000"/>
         </a:spcBef>
         <a:buFont typeface="Arial" panose="020B0604020202020204" pitchFamily="34" charset="0"/>
         <a:buChar char="•"/>
-        <a:defRPr sz="2000" kern="1200">
+        <a:defRPr sz="2300" kern="1200">
           <a:solidFill>
             <a:schemeClr val="tx1"/>
           </a:solidFill>
@@ -2052,13 +2938,13 @@
           <a:cs typeface="+mn-cs"/>
         </a:defRPr>
       </a:lvl6pPr>
-      <a:lvl7pPr marL="2971800" indent="-228600" algn="l" defTabSz="914400" rtl="0" eaLnBrk="1" latinLnBrk="0" hangingPunct="1">
+      <a:lvl7pPr marL="3420542" indent="-263119" algn="l" defTabSz="1052474" rtl="0" eaLnBrk="1" latinLnBrk="0" hangingPunct="1">
         <a:spcBef>
           <a:spcPct val="20000"/>
         </a:spcBef>
         <a:buFont typeface="Arial" panose="020B0604020202020204" pitchFamily="34" charset="0"/>
         <a:buChar char="•"/>
-        <a:defRPr sz="2000" kern="1200">
+        <a:defRPr sz="2300" kern="1200">
           <a:solidFill>
             <a:schemeClr val="tx1"/>
           </a:solidFill>
@@ -2067,13 +2953,13 @@
           <a:cs typeface="+mn-cs"/>
         </a:defRPr>
       </a:lvl7pPr>
-      <a:lvl8pPr marL="3429000" indent="-228600" algn="l" defTabSz="914400" rtl="0" eaLnBrk="1" latinLnBrk="0" hangingPunct="1">
+      <a:lvl8pPr marL="3946779" indent="-263119" algn="l" defTabSz="1052474" rtl="0" eaLnBrk="1" latinLnBrk="0" hangingPunct="1">
         <a:spcBef>
           <a:spcPct val="20000"/>
         </a:spcBef>
         <a:buFont typeface="Arial" panose="020B0604020202020204" pitchFamily="34" charset="0"/>
         <a:buChar char="•"/>
-        <a:defRPr sz="2000" kern="1200">
+        <a:defRPr sz="2300" kern="1200">
           <a:solidFill>
             <a:schemeClr val="tx1"/>
           </a:solidFill>
@@ -2082,13 +2968,13 @@
           <a:cs typeface="+mn-cs"/>
         </a:defRPr>
       </a:lvl8pPr>
-      <a:lvl9pPr marL="3886200" indent="-228600" algn="l" defTabSz="914400" rtl="0" eaLnBrk="1" latinLnBrk="0" hangingPunct="1">
+      <a:lvl9pPr marL="4473016" indent="-263119" algn="l" defTabSz="1052474" rtl="0" eaLnBrk="1" latinLnBrk="0" hangingPunct="1">
         <a:spcBef>
           <a:spcPct val="20000"/>
         </a:spcBef>
         <a:buFont typeface="Arial" panose="020B0604020202020204" pitchFamily="34" charset="0"/>
         <a:buChar char="•"/>
-        <a:defRPr sz="2000" kern="1200">
+        <a:defRPr sz="2300" kern="1200">
           <a:solidFill>
             <a:schemeClr val="tx1"/>
           </a:solidFill>
@@ -2102,8 +2988,8 @@
       <a:defPPr>
         <a:defRPr lang="en-US"/>
       </a:defPPr>
-      <a:lvl1pPr marL="0" algn="l" defTabSz="914400" rtl="0" eaLnBrk="1" latinLnBrk="0" hangingPunct="1">
-        <a:defRPr sz="1800" kern="1200">
+      <a:lvl1pPr marL="0" algn="l" defTabSz="1052474" rtl="0" eaLnBrk="1" latinLnBrk="0" hangingPunct="1">
+        <a:defRPr sz="2100" kern="1200">
           <a:solidFill>
             <a:schemeClr val="tx1"/>
           </a:solidFill>
@@ -2112,8 +2998,8 @@
           <a:cs typeface="+mn-cs"/>
         </a:defRPr>
       </a:lvl1pPr>
-      <a:lvl2pPr marL="457200" algn="l" defTabSz="914400" rtl="0" eaLnBrk="1" latinLnBrk="0" hangingPunct="1">
-        <a:defRPr sz="1800" kern="1200">
+      <a:lvl2pPr marL="526237" algn="l" defTabSz="1052474" rtl="0" eaLnBrk="1" latinLnBrk="0" hangingPunct="1">
+        <a:defRPr sz="2100" kern="1200">
           <a:solidFill>
             <a:schemeClr val="tx1"/>
           </a:solidFill>
@@ -2122,8 +3008,8 @@
           <a:cs typeface="+mn-cs"/>
         </a:defRPr>
       </a:lvl2pPr>
-      <a:lvl3pPr marL="914400" algn="l" defTabSz="914400" rtl="0" eaLnBrk="1" latinLnBrk="0" hangingPunct="1">
-        <a:defRPr sz="1800" kern="1200">
+      <a:lvl3pPr marL="1052474" algn="l" defTabSz="1052474" rtl="0" eaLnBrk="1" latinLnBrk="0" hangingPunct="1">
+        <a:defRPr sz="2100" kern="1200">
           <a:solidFill>
             <a:schemeClr val="tx1"/>
           </a:solidFill>
@@ -2132,8 +3018,8 @@
           <a:cs typeface="+mn-cs"/>
         </a:defRPr>
       </a:lvl3pPr>
-      <a:lvl4pPr marL="1371600" algn="l" defTabSz="914400" rtl="0" eaLnBrk="1" latinLnBrk="0" hangingPunct="1">
-        <a:defRPr sz="1800" kern="1200">
+      <a:lvl4pPr marL="1578712" algn="l" defTabSz="1052474" rtl="0" eaLnBrk="1" latinLnBrk="0" hangingPunct="1">
+        <a:defRPr sz="2100" kern="1200">
           <a:solidFill>
             <a:schemeClr val="tx1"/>
           </a:solidFill>
@@ -2142,8 +3028,8 @@
           <a:cs typeface="+mn-cs"/>
         </a:defRPr>
       </a:lvl4pPr>
-      <a:lvl5pPr marL="1828800" algn="l" defTabSz="914400" rtl="0" eaLnBrk="1" latinLnBrk="0" hangingPunct="1">
-        <a:defRPr sz="1800" kern="1200">
+      <a:lvl5pPr marL="2104949" algn="l" defTabSz="1052474" rtl="0" eaLnBrk="1" latinLnBrk="0" hangingPunct="1">
+        <a:defRPr sz="2100" kern="1200">
           <a:solidFill>
             <a:schemeClr val="tx1"/>
           </a:solidFill>
@@ -2152,8 +3038,8 @@
           <a:cs typeface="+mn-cs"/>
         </a:defRPr>
       </a:lvl5pPr>
-      <a:lvl6pPr marL="2286000" algn="l" defTabSz="914400" rtl="0" eaLnBrk="1" latinLnBrk="0" hangingPunct="1">
-        <a:defRPr sz="1800" kern="1200">
+      <a:lvl6pPr marL="2631186" algn="l" defTabSz="1052474" rtl="0" eaLnBrk="1" latinLnBrk="0" hangingPunct="1">
+        <a:defRPr sz="2100" kern="1200">
           <a:solidFill>
             <a:schemeClr val="tx1"/>
           </a:solidFill>
@@ -2162,8 +3048,8 @@
           <a:cs typeface="+mn-cs"/>
         </a:defRPr>
       </a:lvl6pPr>
-      <a:lvl7pPr marL="2743200" algn="l" defTabSz="914400" rtl="0" eaLnBrk="1" latinLnBrk="0" hangingPunct="1">
-        <a:defRPr sz="1800" kern="1200">
+      <a:lvl7pPr marL="3157423" algn="l" defTabSz="1052474" rtl="0" eaLnBrk="1" latinLnBrk="0" hangingPunct="1">
+        <a:defRPr sz="2100" kern="1200">
           <a:solidFill>
             <a:schemeClr val="tx1"/>
           </a:solidFill>
@@ -2172,8 +3058,8 @@
           <a:cs typeface="+mn-cs"/>
         </a:defRPr>
       </a:lvl7pPr>
-      <a:lvl8pPr marL="3200400" algn="l" defTabSz="914400" rtl="0" eaLnBrk="1" latinLnBrk="0" hangingPunct="1">
-        <a:defRPr sz="1800" kern="1200">
+      <a:lvl8pPr marL="3683660" algn="l" defTabSz="1052474" rtl="0" eaLnBrk="1" latinLnBrk="0" hangingPunct="1">
+        <a:defRPr sz="2100" kern="1200">
           <a:solidFill>
             <a:schemeClr val="tx1"/>
           </a:solidFill>
@@ -2182,8 +3068,8 @@
           <a:cs typeface="+mn-cs"/>
         </a:defRPr>
       </a:lvl8pPr>
-      <a:lvl9pPr marL="3657600" algn="l" defTabSz="914400" rtl="0" eaLnBrk="1" latinLnBrk="0" hangingPunct="1">
-        <a:defRPr sz="1800" kern="1200">
+      <a:lvl9pPr marL="4209898" algn="l" defTabSz="1052474" rtl="0" eaLnBrk="1" latinLnBrk="0" hangingPunct="1">
+        <a:defRPr sz="2100" kern="1200">
           <a:solidFill>
             <a:schemeClr val="tx1"/>
           </a:solidFill>
@@ -2222,10 +3108,10 @@
         </p:nvGrpSpPr>
         <p:grpSpPr>
           <a:xfrm>
-            <a:off x="0" y="0"/>
-            <a:ext cx="9144000" cy="6858000"/>
-            <a:chOff x="0" y="0"/>
-            <a:chExt cx="9144000" cy="6858000"/>
+            <a:off x="1051560" y="1188562"/>
+            <a:ext cx="12984480" cy="8321040"/>
+            <a:chOff x="1051560" y="1188562"/>
+            <a:chExt cx="12984480" cy="8321040"/>
           </a:xfrm>
         </p:grpSpPr>
         <p:sp>
@@ -2236,8 +3122,8 @@
           </p:nvSpPr>
           <p:spPr>
             <a:xfrm>
-              <a:off x="0" y="0"/>
-              <a:ext cx="9144000" cy="6858000"/>
+              <a:off x="1051560" y="1188561"/>
+              <a:ext cx="12984480" cy="8321039"/>
             </a:xfrm>
             <a:prstGeom prst="rect">
               <a:avLst/>
@@ -2271,8 +3157,8 @@
           </p:nvSpPr>
           <p:spPr>
             <a:xfrm>
-              <a:off x="0" y="0"/>
-              <a:ext cx="9144000" cy="6858000"/>
+              <a:off x="1051560" y="1188561"/>
+              <a:ext cx="12984480" cy="8321039"/>
             </a:xfrm>
             <a:prstGeom prst="rect">
               <a:avLst/>
@@ -2297,8 +3183,8 @@
           </p:nvSpPr>
           <p:spPr>
             <a:xfrm>
-              <a:off x="544700" y="1034744"/>
-              <a:ext cx="7882677" cy="4560159"/>
+              <a:off x="1596260" y="2223305"/>
+              <a:ext cx="11723157" cy="6023199"/>
             </a:xfrm>
             <a:prstGeom prst="rect">
               <a:avLst/>
@@ -2323,21 +3209,21 @@
           </p:nvSpPr>
           <p:spPr>
             <a:xfrm>
-              <a:off x="544700" y="5594903"/>
-              <a:ext cx="7882677" cy="0"/>
+              <a:off x="1596260" y="8246505"/>
+              <a:ext cx="11723157" cy="0"/>
             </a:xfrm>
             <a:custGeom>
               <a:avLst/>
               <a:pathLst>
-                <a:path w="7882677" h="0">
+                <a:path w="11723157" h="0">
                   <a:moveTo>
                     <a:pt x="0" y="0"/>
                   </a:moveTo>
                   <a:lnTo>
-                    <a:pt x="7882677" y="0"/>
+                    <a:pt x="11723157" y="0"/>
                   </a:lnTo>
                   <a:lnTo>
-                    <a:pt x="7882677" y="0"/>
+                    <a:pt x="11723157" y="0"/>
                   </a:lnTo>
                 </a:path>
               </a:pathLst>
@@ -2366,21 +3252,21 @@
           </p:nvSpPr>
           <p:spPr>
             <a:xfrm>
-              <a:off x="544700" y="4253680"/>
-              <a:ext cx="7882677" cy="0"/>
+              <a:off x="1596260" y="6474975"/>
+              <a:ext cx="11723157" cy="0"/>
             </a:xfrm>
             <a:custGeom>
               <a:avLst/>
               <a:pathLst>
-                <a:path w="7882677" h="0">
+                <a:path w="11723157" h="0">
                   <a:moveTo>
                     <a:pt x="0" y="0"/>
                   </a:moveTo>
                   <a:lnTo>
-                    <a:pt x="7882677" y="0"/>
+                    <a:pt x="11723157" y="0"/>
                   </a:lnTo>
                   <a:lnTo>
-                    <a:pt x="7882677" y="0"/>
+                    <a:pt x="11723157" y="0"/>
                   </a:lnTo>
                 </a:path>
               </a:pathLst>
@@ -2409,21 +3295,21 @@
           </p:nvSpPr>
           <p:spPr>
             <a:xfrm>
-              <a:off x="544700" y="2912456"/>
-              <a:ext cx="7882677" cy="0"/>
+              <a:off x="1596260" y="4703446"/>
+              <a:ext cx="11723157" cy="0"/>
             </a:xfrm>
             <a:custGeom>
               <a:avLst/>
               <a:pathLst>
-                <a:path w="7882677" h="0">
+                <a:path w="11723157" h="0">
                   <a:moveTo>
                     <a:pt x="0" y="0"/>
                   </a:moveTo>
                   <a:lnTo>
-                    <a:pt x="7882677" y="0"/>
+                    <a:pt x="11723157" y="0"/>
                   </a:lnTo>
                   <a:lnTo>
-                    <a:pt x="7882677" y="0"/>
+                    <a:pt x="11723157" y="0"/>
                   </a:lnTo>
                 </a:path>
               </a:pathLst>
@@ -2452,21 +3338,21 @@
           </p:nvSpPr>
           <p:spPr>
             <a:xfrm>
-              <a:off x="544700" y="1571233"/>
-              <a:ext cx="7882677" cy="0"/>
+              <a:off x="1596260" y="2931917"/>
+              <a:ext cx="11723157" cy="0"/>
             </a:xfrm>
             <a:custGeom>
               <a:avLst/>
               <a:pathLst>
-                <a:path w="7882677" h="0">
+                <a:path w="11723157" h="0">
                   <a:moveTo>
                     <a:pt x="0" y="0"/>
                   </a:moveTo>
                   <a:lnTo>
-                    <a:pt x="7882677" y="0"/>
+                    <a:pt x="11723157" y="0"/>
                   </a:lnTo>
                   <a:lnTo>
-                    <a:pt x="7882677" y="0"/>
+                    <a:pt x="11723157" y="0"/>
                   </a:lnTo>
                 </a:path>
               </a:pathLst>
@@ -2495,8 +3381,8 @@
           </p:nvSpPr>
           <p:spPr>
             <a:xfrm>
-              <a:off x="1982943" y="4521924"/>
-              <a:ext cx="165951" cy="268244"/>
+              <a:off x="3735222" y="6829281"/>
+              <a:ext cx="246803" cy="354305"/>
             </a:xfrm>
             <a:prstGeom prst="rect">
               <a:avLst/>
@@ -2521,8 +3407,8 @@
           </p:nvSpPr>
           <p:spPr>
             <a:xfrm>
-              <a:off x="1982943" y="4320741"/>
-              <a:ext cx="165951" cy="201183"/>
+              <a:off x="3735222" y="6563552"/>
+              <a:ext cx="246803" cy="265729"/>
             </a:xfrm>
             <a:prstGeom prst="rect">
               <a:avLst/>
@@ -2547,8 +3433,8 @@
           </p:nvSpPr>
           <p:spPr>
             <a:xfrm>
-              <a:off x="1982943" y="3985435"/>
-              <a:ext cx="165951" cy="335305"/>
+              <a:off x="3735222" y="6120670"/>
+              <a:ext cx="246803" cy="442882"/>
             </a:xfrm>
             <a:prstGeom prst="rect">
               <a:avLst/>
@@ -2573,8 +3459,8 @@
           </p:nvSpPr>
           <p:spPr>
             <a:xfrm>
-              <a:off x="1982943" y="5192536"/>
-              <a:ext cx="165951" cy="67061"/>
+              <a:off x="3735222" y="7715046"/>
+              <a:ext cx="246803" cy="88576"/>
             </a:xfrm>
             <a:prstGeom prst="rect">
               <a:avLst/>
@@ -2599,8 +3485,8 @@
           </p:nvSpPr>
           <p:spPr>
             <a:xfrm>
-              <a:off x="1982943" y="5326658"/>
-              <a:ext cx="165951" cy="0"/>
+              <a:off x="3735222" y="7892199"/>
+              <a:ext cx="246803" cy="0"/>
             </a:xfrm>
             <a:prstGeom prst="rect">
               <a:avLst/>
@@ -2625,8 +3511,8 @@
           </p:nvSpPr>
           <p:spPr>
             <a:xfrm>
-              <a:off x="1982943" y="4991353"/>
-              <a:ext cx="165951" cy="201183"/>
+              <a:off x="3735222" y="7449316"/>
+              <a:ext cx="246803" cy="265729"/>
             </a:xfrm>
             <a:prstGeom prst="rect">
               <a:avLst/>
@@ -2651,8 +3537,8 @@
           </p:nvSpPr>
           <p:spPr>
             <a:xfrm>
-              <a:off x="1982943" y="5326658"/>
-              <a:ext cx="165951" cy="268244"/>
+              <a:off x="3735222" y="7892199"/>
+              <a:ext cx="246803" cy="354305"/>
             </a:xfrm>
             <a:prstGeom prst="rect">
               <a:avLst/>
@@ -2677,8 +3563,8 @@
           </p:nvSpPr>
           <p:spPr>
             <a:xfrm>
-              <a:off x="1982943" y="2644212"/>
-              <a:ext cx="165951" cy="1341223"/>
+              <a:off x="3735222" y="4349140"/>
+              <a:ext cx="246803" cy="1771529"/>
             </a:xfrm>
             <a:prstGeom prst="rect">
               <a:avLst/>
@@ -2703,8 +3589,8 @@
           </p:nvSpPr>
           <p:spPr>
             <a:xfrm>
-              <a:off x="1982943" y="4790169"/>
-              <a:ext cx="165951" cy="201183"/>
+              <a:off x="3735222" y="7183587"/>
+              <a:ext cx="246803" cy="265729"/>
             </a:xfrm>
             <a:prstGeom prst="rect">
               <a:avLst/>
@@ -2729,8 +3615,8 @@
           </p:nvSpPr>
           <p:spPr>
             <a:xfrm>
-              <a:off x="1982943" y="5259597"/>
-              <a:ext cx="165951" cy="67061"/>
+              <a:off x="3735222" y="7803622"/>
+              <a:ext cx="246803" cy="88576"/>
             </a:xfrm>
             <a:prstGeom prst="rect">
               <a:avLst/>
@@ -2755,8 +3641,8 @@
           </p:nvSpPr>
           <p:spPr>
             <a:xfrm>
-              <a:off x="1982943" y="5326658"/>
-              <a:ext cx="165951" cy="0"/>
+              <a:off x="3735222" y="7892199"/>
+              <a:ext cx="246803" cy="0"/>
             </a:xfrm>
             <a:prstGeom prst="rect">
               <a:avLst/>
@@ -2781,8 +3667,8 @@
           </p:nvSpPr>
           <p:spPr>
             <a:xfrm>
-              <a:off x="6362208" y="5058414"/>
-              <a:ext cx="165951" cy="134122"/>
+              <a:off x="10248087" y="7537893"/>
+              <a:ext cx="246803" cy="177152"/>
             </a:xfrm>
             <a:prstGeom prst="rect">
               <a:avLst/>
@@ -2807,8 +3693,8 @@
           </p:nvSpPr>
           <p:spPr>
             <a:xfrm>
-              <a:off x="6362208" y="4991353"/>
-              <a:ext cx="165951" cy="67061"/>
+              <a:off x="10248087" y="7449316"/>
+              <a:ext cx="246803" cy="88576"/>
             </a:xfrm>
             <a:prstGeom prst="rect">
               <a:avLst/>
@@ -2833,8 +3719,8 @@
           </p:nvSpPr>
           <p:spPr>
             <a:xfrm>
-              <a:off x="6362208" y="4924291"/>
-              <a:ext cx="165951" cy="67061"/>
+              <a:off x="10248087" y="7360740"/>
+              <a:ext cx="246803" cy="88576"/>
             </a:xfrm>
             <a:prstGeom prst="rect">
               <a:avLst/>
@@ -2859,8 +3745,8 @@
           </p:nvSpPr>
           <p:spPr>
             <a:xfrm>
-              <a:off x="6362208" y="5259597"/>
-              <a:ext cx="165951" cy="0"/>
+              <a:off x="10248087" y="7803622"/>
+              <a:ext cx="246803" cy="0"/>
             </a:xfrm>
             <a:prstGeom prst="rect">
               <a:avLst/>
@@ -2885,8 +3771,8 @@
           </p:nvSpPr>
           <p:spPr>
             <a:xfrm>
-              <a:off x="6362208" y="5326658"/>
-              <a:ext cx="165951" cy="67061"/>
+              <a:off x="10248087" y="7892199"/>
+              <a:ext cx="246803" cy="88576"/>
             </a:xfrm>
             <a:prstGeom prst="rect">
               <a:avLst/>
@@ -2911,8 +3797,8 @@
           </p:nvSpPr>
           <p:spPr>
             <a:xfrm>
-              <a:off x="6362208" y="5192536"/>
-              <a:ext cx="165951" cy="67061"/>
+              <a:off x="10248087" y="7715046"/>
+              <a:ext cx="246803" cy="88576"/>
             </a:xfrm>
             <a:prstGeom prst="rect">
               <a:avLst/>
@@ -2937,8 +3823,8 @@
           </p:nvSpPr>
           <p:spPr>
             <a:xfrm>
-              <a:off x="6362208" y="5460781"/>
-              <a:ext cx="165951" cy="134122"/>
+              <a:off x="10248087" y="8069352"/>
+              <a:ext cx="246803" cy="177152"/>
             </a:xfrm>
             <a:prstGeom prst="rect">
               <a:avLst/>
@@ -2963,8 +3849,8 @@
           </p:nvSpPr>
           <p:spPr>
             <a:xfrm>
-              <a:off x="6362208" y="4387802"/>
-              <a:ext cx="165951" cy="536489"/>
+              <a:off x="10248087" y="6652128"/>
+              <a:ext cx="246803" cy="708611"/>
             </a:xfrm>
             <a:prstGeom prst="rect">
               <a:avLst/>
@@ -2989,8 +3875,8 @@
           </p:nvSpPr>
           <p:spPr>
             <a:xfrm>
-              <a:off x="6362208" y="5192536"/>
-              <a:ext cx="165951" cy="0"/>
+              <a:off x="10248087" y="7715046"/>
+              <a:ext cx="246803" cy="0"/>
             </a:xfrm>
             <a:prstGeom prst="rect">
               <a:avLst/>
@@ -3015,8 +3901,8 @@
           </p:nvSpPr>
           <p:spPr>
             <a:xfrm>
-              <a:off x="6362208" y="5259597"/>
-              <a:ext cx="165951" cy="67061"/>
+              <a:off x="10248087" y="7803622"/>
+              <a:ext cx="246803" cy="88576"/>
             </a:xfrm>
             <a:prstGeom prst="rect">
               <a:avLst/>
@@ -3041,8 +3927,8 @@
           </p:nvSpPr>
           <p:spPr>
             <a:xfrm>
-              <a:off x="6362208" y="5393720"/>
-              <a:ext cx="165951" cy="67061"/>
+              <a:off x="10248087" y="7980775"/>
+              <a:ext cx="246803" cy="88576"/>
             </a:xfrm>
             <a:prstGeom prst="rect">
               <a:avLst/>
@@ -3067,8 +3953,8 @@
           </p:nvSpPr>
           <p:spPr>
             <a:xfrm>
-              <a:off x="7284159" y="5460781"/>
-              <a:ext cx="165951" cy="67061"/>
+              <a:off x="11619217" y="8069352"/>
+              <a:ext cx="246803" cy="88576"/>
             </a:xfrm>
             <a:prstGeom prst="rect">
               <a:avLst/>
@@ -3093,8 +3979,8 @@
           </p:nvSpPr>
           <p:spPr>
             <a:xfrm>
-              <a:off x="7284159" y="5393720"/>
-              <a:ext cx="165951" cy="67061"/>
+              <a:off x="11619217" y="7980775"/>
+              <a:ext cx="246803" cy="88576"/>
             </a:xfrm>
             <a:prstGeom prst="rect">
               <a:avLst/>
@@ -3119,8 +4005,8 @@
           </p:nvSpPr>
           <p:spPr>
             <a:xfrm>
-              <a:off x="7284159" y="5259597"/>
-              <a:ext cx="165951" cy="134122"/>
+              <a:off x="11619217" y="7803622"/>
+              <a:ext cx="246803" cy="177152"/>
             </a:xfrm>
             <a:prstGeom prst="rect">
               <a:avLst/>
@@ -3145,8 +4031,8 @@
           </p:nvSpPr>
           <p:spPr>
             <a:xfrm>
-              <a:off x="7284159" y="5527842"/>
-              <a:ext cx="165951" cy="0"/>
+              <a:off x="11619217" y="8157928"/>
+              <a:ext cx="246803" cy="0"/>
             </a:xfrm>
             <a:prstGeom prst="rect">
               <a:avLst/>
@@ -3171,8 +4057,8 @@
           </p:nvSpPr>
           <p:spPr>
             <a:xfrm>
-              <a:off x="7284159" y="5594903"/>
-              <a:ext cx="165951" cy="0"/>
+              <a:off x="11619217" y="8246505"/>
+              <a:ext cx="246803" cy="0"/>
             </a:xfrm>
             <a:prstGeom prst="rect">
               <a:avLst/>
@@ -3197,8 +4083,8 @@
           </p:nvSpPr>
           <p:spPr>
             <a:xfrm>
-              <a:off x="7284159" y="5527842"/>
-              <a:ext cx="165951" cy="0"/>
+              <a:off x="11619217" y="8157928"/>
+              <a:ext cx="246803" cy="0"/>
             </a:xfrm>
             <a:prstGeom prst="rect">
               <a:avLst/>
@@ -3223,8 +4109,8 @@
           </p:nvSpPr>
           <p:spPr>
             <a:xfrm>
-              <a:off x="7284159" y="5594903"/>
-              <a:ext cx="165951" cy="0"/>
+              <a:off x="11619217" y="8246505"/>
+              <a:ext cx="246803" cy="0"/>
             </a:xfrm>
             <a:prstGeom prst="rect">
               <a:avLst/>
@@ -3249,8 +4135,8 @@
           </p:nvSpPr>
           <p:spPr>
             <a:xfrm>
-              <a:off x="7284159" y="4790169"/>
-              <a:ext cx="165951" cy="469428"/>
+              <a:off x="11619217" y="7183587"/>
+              <a:ext cx="246803" cy="620035"/>
             </a:xfrm>
             <a:prstGeom prst="rect">
               <a:avLst/>
@@ -3275,8 +4161,8 @@
           </p:nvSpPr>
           <p:spPr>
             <a:xfrm>
-              <a:off x="7284159" y="5527842"/>
-              <a:ext cx="165951" cy="0"/>
+              <a:off x="11619217" y="8157928"/>
+              <a:ext cx="246803" cy="0"/>
             </a:xfrm>
             <a:prstGeom prst="rect">
               <a:avLst/>
@@ -3301,8 +4187,8 @@
           </p:nvSpPr>
           <p:spPr>
             <a:xfrm>
-              <a:off x="7284159" y="5527842"/>
-              <a:ext cx="165951" cy="67061"/>
+              <a:off x="11619217" y="8157928"/>
+              <a:ext cx="246803" cy="88576"/>
             </a:xfrm>
             <a:prstGeom prst="rect">
               <a:avLst/>
@@ -3327,8 +4213,8 @@
           </p:nvSpPr>
           <p:spPr>
             <a:xfrm>
-              <a:off x="7284159" y="5594903"/>
-              <a:ext cx="165951" cy="0"/>
+              <a:off x="11619217" y="8246505"/>
+              <a:ext cx="246803" cy="0"/>
             </a:xfrm>
             <a:prstGeom prst="rect">
               <a:avLst/>
@@ -3353,8 +4239,8 @@
           </p:nvSpPr>
           <p:spPr>
             <a:xfrm>
-              <a:off x="6592696" y="5058414"/>
-              <a:ext cx="165951" cy="67061"/>
+              <a:off x="10590870" y="7537893"/>
+              <a:ext cx="246803" cy="88576"/>
             </a:xfrm>
             <a:prstGeom prst="rect">
               <a:avLst/>
@@ -3379,8 +4265,8 @@
           </p:nvSpPr>
           <p:spPr>
             <a:xfrm>
-              <a:off x="6592696" y="4991353"/>
-              <a:ext cx="165951" cy="67061"/>
+              <a:off x="10590870" y="7449316"/>
+              <a:ext cx="246803" cy="88576"/>
             </a:xfrm>
             <a:prstGeom prst="rect">
               <a:avLst/>
@@ -3405,8 +4291,8 @@
           </p:nvSpPr>
           <p:spPr>
             <a:xfrm>
-              <a:off x="6592696" y="4656047"/>
-              <a:ext cx="165951" cy="335305"/>
+              <a:off x="10590870" y="7006434"/>
+              <a:ext cx="246803" cy="442882"/>
             </a:xfrm>
             <a:prstGeom prst="rect">
               <a:avLst/>
@@ -3431,8 +4317,8 @@
           </p:nvSpPr>
           <p:spPr>
             <a:xfrm>
-              <a:off x="6592696" y="5192536"/>
-              <a:ext cx="165951" cy="0"/>
+              <a:off x="10590870" y="7715046"/>
+              <a:ext cx="246803" cy="0"/>
             </a:xfrm>
             <a:prstGeom prst="rect">
               <a:avLst/>
@@ -3457,8 +4343,8 @@
           </p:nvSpPr>
           <p:spPr>
             <a:xfrm>
-              <a:off x="6592696" y="5192536"/>
-              <a:ext cx="165951" cy="134122"/>
+              <a:off x="10590870" y="7715046"/>
+              <a:ext cx="246803" cy="177152"/>
             </a:xfrm>
             <a:prstGeom prst="rect">
               <a:avLst/>
@@ -3483,8 +4369,8 @@
           </p:nvSpPr>
           <p:spPr>
             <a:xfrm>
-              <a:off x="6592696" y="5125475"/>
-              <a:ext cx="165951" cy="67061"/>
+              <a:off x="10590870" y="7626469"/>
+              <a:ext cx="246803" cy="88576"/>
             </a:xfrm>
             <a:prstGeom prst="rect">
               <a:avLst/>
@@ -3509,8 +4395,8 @@
           </p:nvSpPr>
           <p:spPr>
             <a:xfrm>
-              <a:off x="6592696" y="5460781"/>
-              <a:ext cx="165951" cy="134122"/>
+              <a:off x="10590870" y="8069352"/>
+              <a:ext cx="246803" cy="177152"/>
             </a:xfrm>
             <a:prstGeom prst="rect">
               <a:avLst/>
@@ -3535,8 +4421,8 @@
           </p:nvSpPr>
           <p:spPr>
             <a:xfrm>
-              <a:off x="6592696" y="4521924"/>
-              <a:ext cx="165951" cy="134122"/>
+              <a:off x="10590870" y="6829281"/>
+              <a:ext cx="246803" cy="177152"/>
             </a:xfrm>
             <a:prstGeom prst="rect">
               <a:avLst/>
@@ -3561,8 +4447,8 @@
           </p:nvSpPr>
           <p:spPr>
             <a:xfrm>
-              <a:off x="6592696" y="5125475"/>
-              <a:ext cx="165951" cy="0"/>
+              <a:off x="10590870" y="7626469"/>
+              <a:ext cx="246803" cy="0"/>
             </a:xfrm>
             <a:prstGeom prst="rect">
               <a:avLst/>
@@ -3587,8 +4473,8 @@
           </p:nvSpPr>
           <p:spPr>
             <a:xfrm>
-              <a:off x="6592696" y="5192536"/>
-              <a:ext cx="165951" cy="0"/>
+              <a:off x="10590870" y="7715046"/>
+              <a:ext cx="246803" cy="0"/>
             </a:xfrm>
             <a:prstGeom prst="rect">
               <a:avLst/>
@@ -3613,8 +4499,8 @@
           </p:nvSpPr>
           <p:spPr>
             <a:xfrm>
-              <a:off x="6592696" y="5326658"/>
-              <a:ext cx="165951" cy="134122"/>
+              <a:off x="10590870" y="7892199"/>
+              <a:ext cx="246803" cy="177152"/>
             </a:xfrm>
             <a:prstGeom prst="rect">
               <a:avLst/>
@@ -3639,8 +4525,8 @@
           </p:nvSpPr>
           <p:spPr>
             <a:xfrm>
-              <a:off x="1521968" y="4186619"/>
-              <a:ext cx="165951" cy="670611"/>
+              <a:off x="3049658" y="6386399"/>
+              <a:ext cx="246803" cy="885764"/>
             </a:xfrm>
             <a:prstGeom prst="rect">
               <a:avLst/>
@@ -3665,8 +4551,8 @@
           </p:nvSpPr>
           <p:spPr>
             <a:xfrm>
-              <a:off x="1521968" y="3985435"/>
-              <a:ext cx="165951" cy="201183"/>
+              <a:off x="3049658" y="6120670"/>
+              <a:ext cx="246803" cy="265729"/>
             </a:xfrm>
             <a:prstGeom prst="rect">
               <a:avLst/>
@@ -3691,8 +4577,8 @@
           </p:nvSpPr>
           <p:spPr>
             <a:xfrm>
-              <a:off x="1521968" y="3650129"/>
-              <a:ext cx="165951" cy="335305"/>
+              <a:off x="3049658" y="5677787"/>
+              <a:ext cx="246803" cy="442882"/>
             </a:xfrm>
             <a:prstGeom prst="rect">
               <a:avLst/>
@@ -3717,8 +4603,8 @@
           </p:nvSpPr>
           <p:spPr>
             <a:xfrm>
-              <a:off x="1521968" y="5125475"/>
-              <a:ext cx="165951" cy="134122"/>
+              <a:off x="3049658" y="7626469"/>
+              <a:ext cx="246803" cy="177152"/>
             </a:xfrm>
             <a:prstGeom prst="rect">
               <a:avLst/>
@@ -3743,8 +4629,8 @@
           </p:nvSpPr>
           <p:spPr>
             <a:xfrm>
-              <a:off x="1521968" y="5326658"/>
-              <a:ext cx="165951" cy="0"/>
+              <a:off x="3049658" y="7892199"/>
+              <a:ext cx="246803" cy="0"/>
             </a:xfrm>
             <a:prstGeom prst="rect">
               <a:avLst/>
@@ -3769,8 +4655,8 @@
           </p:nvSpPr>
           <p:spPr>
             <a:xfrm>
-              <a:off x="1521968" y="4991353"/>
-              <a:ext cx="165951" cy="134122"/>
+              <a:off x="3049658" y="7449316"/>
+              <a:ext cx="246803" cy="177152"/>
             </a:xfrm>
             <a:prstGeom prst="rect">
               <a:avLst/>
@@ -3795,8 +4681,8 @@
           </p:nvSpPr>
           <p:spPr>
             <a:xfrm>
-              <a:off x="1521968" y="5326658"/>
-              <a:ext cx="165951" cy="268244"/>
+              <a:off x="3049658" y="7892199"/>
+              <a:ext cx="246803" cy="354305"/>
             </a:xfrm>
             <a:prstGeom prst="rect">
               <a:avLst/>
@@ -3821,8 +4707,8 @@
           </p:nvSpPr>
           <p:spPr>
             <a:xfrm>
-              <a:off x="1521968" y="2040661"/>
-              <a:ext cx="165951" cy="1609468"/>
+              <a:off x="3049658" y="3551952"/>
+              <a:ext cx="246803" cy="2125835"/>
             </a:xfrm>
             <a:prstGeom prst="rect">
               <a:avLst/>
@@ -3847,8 +4733,8 @@
           </p:nvSpPr>
           <p:spPr>
             <a:xfrm>
-              <a:off x="1521968" y="4857230"/>
-              <a:ext cx="165951" cy="134122"/>
+              <a:off x="3049658" y="7272164"/>
+              <a:ext cx="246803" cy="177152"/>
             </a:xfrm>
             <a:prstGeom prst="rect">
               <a:avLst/>
@@ -3873,8 +4759,8 @@
           </p:nvSpPr>
           <p:spPr>
             <a:xfrm>
-              <a:off x="1521968" y="5259597"/>
-              <a:ext cx="165951" cy="67061"/>
+              <a:off x="3049658" y="7803622"/>
+              <a:ext cx="246803" cy="88576"/>
             </a:xfrm>
             <a:prstGeom prst="rect">
               <a:avLst/>
@@ -3899,8 +4785,8 @@
           </p:nvSpPr>
           <p:spPr>
             <a:xfrm>
-              <a:off x="1521968" y="5326658"/>
-              <a:ext cx="165951" cy="0"/>
+              <a:off x="3049658" y="7892199"/>
+              <a:ext cx="246803" cy="0"/>
             </a:xfrm>
             <a:prstGeom prst="rect">
               <a:avLst/>
@@ -3925,8 +4811,8 @@
           </p:nvSpPr>
           <p:spPr>
             <a:xfrm>
-              <a:off x="6823183" y="4991353"/>
-              <a:ext cx="165951" cy="67061"/>
+              <a:off x="10933652" y="7449316"/>
+              <a:ext cx="246803" cy="88576"/>
             </a:xfrm>
             <a:prstGeom prst="rect">
               <a:avLst/>
@@ -3951,8 +4837,8 @@
           </p:nvSpPr>
           <p:spPr>
             <a:xfrm>
-              <a:off x="6823183" y="4924291"/>
-              <a:ext cx="165951" cy="67061"/>
+              <a:off x="10933652" y="7360740"/>
+              <a:ext cx="246803" cy="88576"/>
             </a:xfrm>
             <a:prstGeom prst="rect">
               <a:avLst/>
@@ -3977,8 +4863,8 @@
           </p:nvSpPr>
           <p:spPr>
             <a:xfrm>
-              <a:off x="6823183" y="4924291"/>
-              <a:ext cx="165951" cy="0"/>
+              <a:off x="10933652" y="7360740"/>
+              <a:ext cx="246803" cy="0"/>
             </a:xfrm>
             <a:prstGeom prst="rect">
               <a:avLst/>
@@ -4003,8 +4889,8 @@
           </p:nvSpPr>
           <p:spPr>
             <a:xfrm>
-              <a:off x="6823183" y="5259597"/>
-              <a:ext cx="165951" cy="134122"/>
+              <a:off x="10933652" y="7803622"/>
+              <a:ext cx="246803" cy="177152"/>
             </a:xfrm>
             <a:prstGeom prst="rect">
               <a:avLst/>
@@ -4029,8 +4915,8 @@
           </p:nvSpPr>
           <p:spPr>
             <a:xfrm>
-              <a:off x="6823183" y="5393720"/>
-              <a:ext cx="165951" cy="0"/>
+              <a:off x="10933652" y="7980775"/>
+              <a:ext cx="246803" cy="0"/>
             </a:xfrm>
             <a:prstGeom prst="rect">
               <a:avLst/>
@@ -4055,8 +4941,8 @@
           </p:nvSpPr>
           <p:spPr>
             <a:xfrm>
-              <a:off x="6823183" y="5192536"/>
-              <a:ext cx="165951" cy="67061"/>
+              <a:off x="10933652" y="7715046"/>
+              <a:ext cx="246803" cy="88576"/>
             </a:xfrm>
             <a:prstGeom prst="rect">
               <a:avLst/>
@@ -4081,8 +4967,8 @@
           </p:nvSpPr>
           <p:spPr>
             <a:xfrm>
-              <a:off x="6823183" y="5460781"/>
-              <a:ext cx="165951" cy="134122"/>
+              <a:off x="10933652" y="8069352"/>
+              <a:ext cx="246803" cy="177152"/>
             </a:xfrm>
             <a:prstGeom prst="rect">
               <a:avLst/>
@@ -4107,8 +4993,8 @@
           </p:nvSpPr>
           <p:spPr>
             <a:xfrm>
-              <a:off x="6823183" y="4656047"/>
-              <a:ext cx="165951" cy="268244"/>
+              <a:off x="10933652" y="7006434"/>
+              <a:ext cx="246803" cy="354305"/>
             </a:xfrm>
             <a:prstGeom prst="rect">
               <a:avLst/>
@@ -4133,8 +5019,8 @@
           </p:nvSpPr>
           <p:spPr>
             <a:xfrm>
-              <a:off x="6823183" y="5058414"/>
-              <a:ext cx="165951" cy="134122"/>
+              <a:off x="10933652" y="7537893"/>
+              <a:ext cx="246803" cy="177152"/>
             </a:xfrm>
             <a:prstGeom prst="rect">
               <a:avLst/>
@@ -4159,8 +5045,8 @@
           </p:nvSpPr>
           <p:spPr>
             <a:xfrm>
-              <a:off x="6823183" y="5393720"/>
-              <a:ext cx="165951" cy="0"/>
+              <a:off x="10933652" y="7980775"/>
+              <a:ext cx="246803" cy="0"/>
             </a:xfrm>
             <a:prstGeom prst="rect">
               <a:avLst/>
@@ -4185,8 +5071,8 @@
           </p:nvSpPr>
           <p:spPr>
             <a:xfrm>
-              <a:off x="6823183" y="5393720"/>
-              <a:ext cx="165951" cy="67061"/>
+              <a:off x="10933652" y="7980775"/>
+              <a:ext cx="246803" cy="88576"/>
             </a:xfrm>
             <a:prstGeom prst="rect">
               <a:avLst/>
@@ -4211,8 +5097,8 @@
           </p:nvSpPr>
           <p:spPr>
             <a:xfrm>
-              <a:off x="2674406" y="4857230"/>
-              <a:ext cx="165951" cy="134122"/>
+              <a:off x="4763569" y="7272164"/>
+              <a:ext cx="246803" cy="177152"/>
             </a:xfrm>
             <a:prstGeom prst="rect">
               <a:avLst/>
@@ -4237,8 +5123,8 @@
           </p:nvSpPr>
           <p:spPr>
             <a:xfrm>
-              <a:off x="2674406" y="4790169"/>
-              <a:ext cx="165951" cy="67061"/>
+              <a:off x="4763569" y="7183587"/>
+              <a:ext cx="246803" cy="88576"/>
             </a:xfrm>
             <a:prstGeom prst="rect">
               <a:avLst/>
@@ -4263,8 +5149,8 @@
           </p:nvSpPr>
           <p:spPr>
             <a:xfrm>
-              <a:off x="2674406" y="4521924"/>
-              <a:ext cx="165951" cy="268244"/>
+              <a:off x="4763569" y="6829281"/>
+              <a:ext cx="246803" cy="354305"/>
             </a:xfrm>
             <a:prstGeom prst="rect">
               <a:avLst/>
@@ -4289,8 +5175,8 @@
           </p:nvSpPr>
           <p:spPr>
             <a:xfrm>
-              <a:off x="2674406" y="5125475"/>
-              <a:ext cx="165951" cy="0"/>
+              <a:off x="4763569" y="7626469"/>
+              <a:ext cx="246803" cy="0"/>
             </a:xfrm>
             <a:prstGeom prst="rect">
               <a:avLst/>
@@ -4315,8 +5201,8 @@
           </p:nvSpPr>
           <p:spPr>
             <a:xfrm>
-              <a:off x="2674406" y="5326658"/>
-              <a:ext cx="165951" cy="0"/>
+              <a:off x="4763569" y="7892199"/>
+              <a:ext cx="246803" cy="0"/>
             </a:xfrm>
             <a:prstGeom prst="rect">
               <a:avLst/>
@@ -4341,8 +5227,8 @@
           </p:nvSpPr>
           <p:spPr>
             <a:xfrm>
-              <a:off x="2674406" y="5125475"/>
-              <a:ext cx="165951" cy="0"/>
+              <a:off x="4763569" y="7626469"/>
+              <a:ext cx="246803" cy="0"/>
             </a:xfrm>
             <a:prstGeom prst="rect">
               <a:avLst/>
@@ -4367,8 +5253,8 @@
           </p:nvSpPr>
           <p:spPr>
             <a:xfrm>
-              <a:off x="2674406" y="5326658"/>
-              <a:ext cx="165951" cy="268244"/>
+              <a:off x="4763569" y="7892199"/>
+              <a:ext cx="246803" cy="354305"/>
             </a:xfrm>
             <a:prstGeom prst="rect">
               <a:avLst/>
@@ -4393,8 +5279,8 @@
           </p:nvSpPr>
           <p:spPr>
             <a:xfrm>
-              <a:off x="2674406" y="3046579"/>
-              <a:ext cx="165951" cy="1475345"/>
+              <a:off x="4763569" y="4880599"/>
+              <a:ext cx="246803" cy="1948682"/>
             </a:xfrm>
             <a:prstGeom prst="rect">
               <a:avLst/>
@@ -4419,8 +5305,8 @@
           </p:nvSpPr>
           <p:spPr>
             <a:xfrm>
-              <a:off x="2674406" y="4991353"/>
-              <a:ext cx="165951" cy="134122"/>
+              <a:off x="4763569" y="7449316"/>
+              <a:ext cx="246803" cy="177152"/>
             </a:xfrm>
             <a:prstGeom prst="rect">
               <a:avLst/>
@@ -4445,8 +5331,8 @@
           </p:nvSpPr>
           <p:spPr>
             <a:xfrm>
-              <a:off x="2674406" y="5125475"/>
-              <a:ext cx="165951" cy="201183"/>
+              <a:off x="4763569" y="7626469"/>
+              <a:ext cx="246803" cy="265729"/>
             </a:xfrm>
             <a:prstGeom prst="rect">
               <a:avLst/>
@@ -4471,8 +5357,8 @@
           </p:nvSpPr>
           <p:spPr>
             <a:xfrm>
-              <a:off x="2674406" y="5326658"/>
-              <a:ext cx="165951" cy="0"/>
+              <a:off x="4763569" y="7892199"/>
+              <a:ext cx="246803" cy="0"/>
             </a:xfrm>
             <a:prstGeom prst="rect">
               <a:avLst/>
@@ -4497,8 +5383,8 @@
           </p:nvSpPr>
           <p:spPr>
             <a:xfrm>
-              <a:off x="3826844" y="5125475"/>
-              <a:ext cx="165951" cy="67061"/>
+              <a:off x="6477481" y="7626469"/>
+              <a:ext cx="246803" cy="88576"/>
             </a:xfrm>
             <a:prstGeom prst="rect">
               <a:avLst/>
@@ -4523,8 +5409,8 @@
           </p:nvSpPr>
           <p:spPr>
             <a:xfrm>
-              <a:off x="3826844" y="4790169"/>
-              <a:ext cx="165951" cy="335305"/>
+              <a:off x="6477481" y="7183587"/>
+              <a:ext cx="246803" cy="442882"/>
             </a:xfrm>
             <a:prstGeom prst="rect">
               <a:avLst/>
@@ -4549,8 +5435,8 @@
           </p:nvSpPr>
           <p:spPr>
             <a:xfrm>
-              <a:off x="3826844" y="4454863"/>
-              <a:ext cx="165951" cy="335305"/>
+              <a:off x="6477481" y="6740705"/>
+              <a:ext cx="246803" cy="442882"/>
             </a:xfrm>
             <a:prstGeom prst="rect">
               <a:avLst/>
@@ -4575,8 +5461,8 @@
           </p:nvSpPr>
           <p:spPr>
             <a:xfrm>
-              <a:off x="3826844" y="5460781"/>
-              <a:ext cx="165951" cy="0"/>
+              <a:off x="6477481" y="8069352"/>
+              <a:ext cx="246803" cy="0"/>
             </a:xfrm>
             <a:prstGeom prst="rect">
               <a:avLst/>
@@ -4601,8 +5487,8 @@
           </p:nvSpPr>
           <p:spPr>
             <a:xfrm>
-              <a:off x="3826844" y="5460781"/>
-              <a:ext cx="165951" cy="0"/>
+              <a:off x="6477481" y="8069352"/>
+              <a:ext cx="246803" cy="0"/>
             </a:xfrm>
             <a:prstGeom prst="rect">
               <a:avLst/>
@@ -4627,8 +5513,8 @@
           </p:nvSpPr>
           <p:spPr>
             <a:xfrm>
-              <a:off x="3826844" y="5460781"/>
-              <a:ext cx="165951" cy="0"/>
+              <a:off x="6477481" y="8069352"/>
+              <a:ext cx="246803" cy="0"/>
             </a:xfrm>
             <a:prstGeom prst="rect">
               <a:avLst/>
@@ -4653,8 +5539,8 @@
           </p:nvSpPr>
           <p:spPr>
             <a:xfrm>
-              <a:off x="3826844" y="5460781"/>
-              <a:ext cx="165951" cy="134122"/>
+              <a:off x="6477481" y="8069352"/>
+              <a:ext cx="246803" cy="177152"/>
             </a:xfrm>
             <a:prstGeom prst="rect">
               <a:avLst/>
@@ -4679,8 +5565,8 @@
           </p:nvSpPr>
           <p:spPr>
             <a:xfrm>
-              <a:off x="3826844" y="3247762"/>
-              <a:ext cx="165951" cy="1207101"/>
+              <a:off x="6477481" y="5146328"/>
+              <a:ext cx="246803" cy="1594376"/>
             </a:xfrm>
             <a:prstGeom prst="rect">
               <a:avLst/>
@@ -4705,8 +5591,8 @@
           </p:nvSpPr>
           <p:spPr>
             <a:xfrm>
-              <a:off x="3826844" y="5192536"/>
-              <a:ext cx="165951" cy="268244"/>
+              <a:off x="6477481" y="7715046"/>
+              <a:ext cx="246803" cy="354305"/>
             </a:xfrm>
             <a:prstGeom prst="rect">
               <a:avLst/>
@@ -4731,8 +5617,8 @@
           </p:nvSpPr>
           <p:spPr>
             <a:xfrm>
-              <a:off x="3826844" y="5460781"/>
-              <a:ext cx="165951" cy="0"/>
+              <a:off x="6477481" y="8069352"/>
+              <a:ext cx="246803" cy="0"/>
             </a:xfrm>
             <a:prstGeom prst="rect">
               <a:avLst/>
@@ -4757,8 +5643,8 @@
           </p:nvSpPr>
           <p:spPr>
             <a:xfrm>
-              <a:off x="3826844" y="5460781"/>
-              <a:ext cx="165951" cy="0"/>
+              <a:off x="6477481" y="8069352"/>
+              <a:ext cx="246803" cy="0"/>
             </a:xfrm>
             <a:prstGeom prst="rect">
               <a:avLst/>
@@ -4783,8 +5669,8 @@
           </p:nvSpPr>
           <p:spPr>
             <a:xfrm>
-              <a:off x="4748795" y="5326658"/>
-              <a:ext cx="165951" cy="67061"/>
+              <a:off x="7848611" y="7892199"/>
+              <a:ext cx="246803" cy="88576"/>
             </a:xfrm>
             <a:prstGeom prst="rect">
               <a:avLst/>
@@ -4809,8 +5695,8 @@
           </p:nvSpPr>
           <p:spPr>
             <a:xfrm>
-              <a:off x="4748795" y="5192536"/>
-              <a:ext cx="165951" cy="134122"/>
+              <a:off x="7848611" y="7715046"/>
+              <a:ext cx="246803" cy="177152"/>
             </a:xfrm>
             <a:prstGeom prst="rect">
               <a:avLst/>
@@ -4835,8 +5721,8 @@
           </p:nvSpPr>
           <p:spPr>
             <a:xfrm>
-              <a:off x="4748795" y="4521924"/>
-              <a:ext cx="165951" cy="670611"/>
+              <a:off x="7848611" y="6829281"/>
+              <a:ext cx="246803" cy="885764"/>
             </a:xfrm>
             <a:prstGeom prst="rect">
               <a:avLst/>
@@ -4861,8 +5747,8 @@
           </p:nvSpPr>
           <p:spPr>
             <a:xfrm>
-              <a:off x="4748795" y="5527842"/>
-              <a:ext cx="165951" cy="0"/>
+              <a:off x="7848611" y="8157928"/>
+              <a:ext cx="246803" cy="0"/>
             </a:xfrm>
             <a:prstGeom prst="rect">
               <a:avLst/>
@@ -4887,8 +5773,8 @@
           </p:nvSpPr>
           <p:spPr>
             <a:xfrm>
-              <a:off x="4748795" y="5594903"/>
-              <a:ext cx="165951" cy="0"/>
+              <a:off x="7848611" y="8246505"/>
+              <a:ext cx="246803" cy="0"/>
             </a:xfrm>
             <a:prstGeom prst="rect">
               <a:avLst/>
@@ -4913,8 +5799,8 @@
           </p:nvSpPr>
           <p:spPr>
             <a:xfrm>
-              <a:off x="4748795" y="5527842"/>
-              <a:ext cx="165951" cy="0"/>
+              <a:off x="7848611" y="8157928"/>
+              <a:ext cx="246803" cy="0"/>
             </a:xfrm>
             <a:prstGeom prst="rect">
               <a:avLst/>
@@ -4939,8 +5825,8 @@
           </p:nvSpPr>
           <p:spPr>
             <a:xfrm>
-              <a:off x="4748795" y="5594903"/>
-              <a:ext cx="165951" cy="0"/>
+              <a:off x="7848611" y="8246505"/>
+              <a:ext cx="246803" cy="0"/>
             </a:xfrm>
             <a:prstGeom prst="rect">
               <a:avLst/>
@@ -4965,8 +5851,8 @@
           </p:nvSpPr>
           <p:spPr>
             <a:xfrm>
-              <a:off x="4748795" y="3516007"/>
-              <a:ext cx="165951" cy="1005917"/>
+              <a:off x="7848611" y="5500634"/>
+              <a:ext cx="246803" cy="1328646"/>
             </a:xfrm>
             <a:prstGeom prst="rect">
               <a:avLst/>
@@ -4991,8 +5877,8 @@
           </p:nvSpPr>
           <p:spPr>
             <a:xfrm>
-              <a:off x="4748795" y="5393720"/>
-              <a:ext cx="165951" cy="134122"/>
+              <a:off x="7848611" y="7980775"/>
+              <a:ext cx="246803" cy="177152"/>
             </a:xfrm>
             <a:prstGeom prst="rect">
               <a:avLst/>
@@ -5017,8 +5903,8 @@
           </p:nvSpPr>
           <p:spPr>
             <a:xfrm>
-              <a:off x="4748795" y="5527842"/>
-              <a:ext cx="165951" cy="67061"/>
+              <a:off x="7848611" y="8157928"/>
+              <a:ext cx="246803" cy="88576"/>
             </a:xfrm>
             <a:prstGeom prst="rect">
               <a:avLst/>
@@ -5043,8 +5929,8 @@
           </p:nvSpPr>
           <p:spPr>
             <a:xfrm>
-              <a:off x="4748795" y="5594903"/>
-              <a:ext cx="165951" cy="0"/>
+              <a:off x="7848611" y="8246505"/>
+              <a:ext cx="246803" cy="0"/>
             </a:xfrm>
             <a:prstGeom prst="rect">
               <a:avLst/>
@@ -5069,8 +5955,8 @@
           </p:nvSpPr>
           <p:spPr>
             <a:xfrm>
-              <a:off x="7053671" y="5259597"/>
-              <a:ext cx="165951" cy="0"/>
+              <a:off x="11276434" y="7803622"/>
+              <a:ext cx="246803" cy="0"/>
             </a:xfrm>
             <a:prstGeom prst="rect">
               <a:avLst/>
@@ -5095,8 +5981,8 @@
           </p:nvSpPr>
           <p:spPr>
             <a:xfrm>
-              <a:off x="7053671" y="5125475"/>
-              <a:ext cx="165951" cy="134122"/>
+              <a:off x="11276434" y="7626469"/>
+              <a:ext cx="246803" cy="177152"/>
             </a:xfrm>
             <a:prstGeom prst="rect">
               <a:avLst/>
@@ -5121,8 +6007,8 @@
           </p:nvSpPr>
           <p:spPr>
             <a:xfrm>
-              <a:off x="7053671" y="5058414"/>
-              <a:ext cx="165951" cy="67061"/>
+              <a:off x="11276434" y="7537893"/>
+              <a:ext cx="246803" cy="88576"/>
             </a:xfrm>
             <a:prstGeom prst="rect">
               <a:avLst/>
@@ -5147,8 +6033,8 @@
           </p:nvSpPr>
           <p:spPr>
             <a:xfrm>
-              <a:off x="7053671" y="5259597"/>
-              <a:ext cx="165951" cy="0"/>
+              <a:off x="11276434" y="7803622"/>
+              <a:ext cx="246803" cy="0"/>
             </a:xfrm>
             <a:prstGeom prst="rect">
               <a:avLst/>
@@ -5173,8 +6059,8 @@
           </p:nvSpPr>
           <p:spPr>
             <a:xfrm>
-              <a:off x="7053671" y="5326658"/>
-              <a:ext cx="165951" cy="0"/>
+              <a:off x="11276434" y="7892199"/>
+              <a:ext cx="246803" cy="0"/>
             </a:xfrm>
             <a:prstGeom prst="rect">
               <a:avLst/>
@@ -5199,8 +6085,8 @@
           </p:nvSpPr>
           <p:spPr>
             <a:xfrm>
-              <a:off x="7053671" y="5259597"/>
-              <a:ext cx="165951" cy="0"/>
+              <a:off x="11276434" y="7803622"/>
+              <a:ext cx="246803" cy="0"/>
             </a:xfrm>
             <a:prstGeom prst="rect">
               <a:avLst/>
@@ -5225,8 +6111,8 @@
           </p:nvSpPr>
           <p:spPr>
             <a:xfrm>
-              <a:off x="7053671" y="5393720"/>
-              <a:ext cx="165951" cy="201183"/>
+              <a:off x="11276434" y="7980775"/>
+              <a:ext cx="246803" cy="265729"/>
             </a:xfrm>
             <a:prstGeom prst="rect">
               <a:avLst/>
@@ -5251,8 +6137,8 @@
           </p:nvSpPr>
           <p:spPr>
             <a:xfrm>
-              <a:off x="7053671" y="4723108"/>
-              <a:ext cx="165951" cy="335305"/>
+              <a:off x="11276434" y="7095011"/>
+              <a:ext cx="246803" cy="442882"/>
             </a:xfrm>
             <a:prstGeom prst="rect">
               <a:avLst/>
@@ -5277,8 +6163,8 @@
           </p:nvSpPr>
           <p:spPr>
             <a:xfrm>
-              <a:off x="7053671" y="5259597"/>
-              <a:ext cx="165951" cy="0"/>
+              <a:off x="11276434" y="7803622"/>
+              <a:ext cx="246803" cy="0"/>
             </a:xfrm>
             <a:prstGeom prst="rect">
               <a:avLst/>
@@ -5303,8 +6189,8 @@
           </p:nvSpPr>
           <p:spPr>
             <a:xfrm>
-              <a:off x="7053671" y="5259597"/>
-              <a:ext cx="165951" cy="67061"/>
+              <a:off x="11276434" y="7803622"/>
+              <a:ext cx="246803" cy="88576"/>
             </a:xfrm>
             <a:prstGeom prst="rect">
               <a:avLst/>
@@ -5329,8 +6215,8 @@
           </p:nvSpPr>
           <p:spPr>
             <a:xfrm>
-              <a:off x="7053671" y="5326658"/>
-              <a:ext cx="165951" cy="67061"/>
+              <a:off x="11276434" y="7892199"/>
+              <a:ext cx="246803" cy="88576"/>
             </a:xfrm>
             <a:prstGeom prst="rect">
               <a:avLst/>
@@ -5355,8 +6241,8 @@
           </p:nvSpPr>
           <p:spPr>
             <a:xfrm>
-              <a:off x="6131721" y="5192536"/>
-              <a:ext cx="165951" cy="134122"/>
+              <a:off x="9905305" y="7715046"/>
+              <a:ext cx="246803" cy="177152"/>
             </a:xfrm>
             <a:prstGeom prst="rect">
               <a:avLst/>
@@ -5381,8 +6267,8 @@
           </p:nvSpPr>
           <p:spPr>
             <a:xfrm>
-              <a:off x="6131721" y="5125475"/>
-              <a:ext cx="165951" cy="67061"/>
+              <a:off x="9905305" y="7626469"/>
+              <a:ext cx="246803" cy="88576"/>
             </a:xfrm>
             <a:prstGeom prst="rect">
               <a:avLst/>
@@ -5407,8 +6293,8 @@
           </p:nvSpPr>
           <p:spPr>
             <a:xfrm>
-              <a:off x="6131721" y="5058414"/>
-              <a:ext cx="165951" cy="67061"/>
+              <a:off x="9905305" y="7537893"/>
+              <a:ext cx="246803" cy="88576"/>
             </a:xfrm>
             <a:prstGeom prst="rect">
               <a:avLst/>
@@ -5433,8 +6319,8 @@
           </p:nvSpPr>
           <p:spPr>
             <a:xfrm>
-              <a:off x="6131721" y="5460781"/>
-              <a:ext cx="165951" cy="67061"/>
+              <a:off x="9905305" y="8069352"/>
+              <a:ext cx="246803" cy="88576"/>
             </a:xfrm>
             <a:prstGeom prst="rect">
               <a:avLst/>
@@ -5459,8 +6345,8 @@
           </p:nvSpPr>
           <p:spPr>
             <a:xfrm>
-              <a:off x="6131721" y="5527842"/>
-              <a:ext cx="165951" cy="0"/>
+              <a:off x="9905305" y="8157928"/>
+              <a:ext cx="246803" cy="0"/>
             </a:xfrm>
             <a:prstGeom prst="rect">
               <a:avLst/>
@@ -5485,8 +6371,8 @@
           </p:nvSpPr>
           <p:spPr>
             <a:xfrm>
-              <a:off x="6131721" y="5393720"/>
-              <a:ext cx="165951" cy="67061"/>
+              <a:off x="9905305" y="7980775"/>
+              <a:ext cx="246803" cy="88576"/>
             </a:xfrm>
             <a:prstGeom prst="rect">
               <a:avLst/>
@@ -5511,8 +6397,8 @@
           </p:nvSpPr>
           <p:spPr>
             <a:xfrm>
-              <a:off x="6131721" y="5527842"/>
-              <a:ext cx="165951" cy="67061"/>
+              <a:off x="9905305" y="8157928"/>
+              <a:ext cx="246803" cy="88576"/>
             </a:xfrm>
             <a:prstGeom prst="rect">
               <a:avLst/>
@@ -5537,8 +6423,8 @@
           </p:nvSpPr>
           <p:spPr>
             <a:xfrm>
-              <a:off x="6131721" y="4119557"/>
-              <a:ext cx="165951" cy="938856"/>
+              <a:off x="9905305" y="6297822"/>
+              <a:ext cx="246803" cy="1240070"/>
             </a:xfrm>
             <a:prstGeom prst="rect">
               <a:avLst/>
@@ -5563,8 +6449,8 @@
           </p:nvSpPr>
           <p:spPr>
             <a:xfrm>
-              <a:off x="6131721" y="5326658"/>
-              <a:ext cx="165951" cy="67061"/>
+              <a:off x="9905305" y="7892199"/>
+              <a:ext cx="246803" cy="88576"/>
             </a:xfrm>
             <a:prstGeom prst="rect">
               <a:avLst/>
@@ -5589,8 +6475,8 @@
           </p:nvSpPr>
           <p:spPr>
             <a:xfrm>
-              <a:off x="6131721" y="5527842"/>
-              <a:ext cx="165951" cy="0"/>
+              <a:off x="9905305" y="8157928"/>
+              <a:ext cx="246803" cy="0"/>
             </a:xfrm>
             <a:prstGeom prst="rect">
               <a:avLst/>
@@ -5615,8 +6501,8 @@
           </p:nvSpPr>
           <p:spPr>
             <a:xfrm>
-              <a:off x="6131721" y="5527842"/>
-              <a:ext cx="165951" cy="0"/>
+              <a:off x="9905305" y="8157928"/>
+              <a:ext cx="246803" cy="0"/>
             </a:xfrm>
             <a:prstGeom prst="rect">
               <a:avLst/>
@@ -5641,8 +6527,8 @@
           </p:nvSpPr>
           <p:spPr>
             <a:xfrm>
-              <a:off x="2443918" y="4991353"/>
-              <a:ext cx="165951" cy="201183"/>
+              <a:off x="4420787" y="7449316"/>
+              <a:ext cx="246803" cy="265729"/>
             </a:xfrm>
             <a:prstGeom prst="rect">
               <a:avLst/>
@@ -5667,8 +6553,8 @@
           </p:nvSpPr>
           <p:spPr>
             <a:xfrm>
-              <a:off x="2443918" y="4723108"/>
-              <a:ext cx="165951" cy="268244"/>
+              <a:off x="4420787" y="7095011"/>
+              <a:ext cx="246803" cy="354305"/>
             </a:xfrm>
             <a:prstGeom prst="rect">
               <a:avLst/>
@@ -5693,8 +6579,8 @@
           </p:nvSpPr>
           <p:spPr>
             <a:xfrm>
-              <a:off x="2443918" y="4521924"/>
-              <a:ext cx="165951" cy="201183"/>
+              <a:off x="4420787" y="6829281"/>
+              <a:ext cx="246803" cy="265729"/>
             </a:xfrm>
             <a:prstGeom prst="rect">
               <a:avLst/>
@@ -5719,8 +6605,8 @@
           </p:nvSpPr>
           <p:spPr>
             <a:xfrm>
-              <a:off x="2443918" y="5259597"/>
-              <a:ext cx="165951" cy="67061"/>
+              <a:off x="4420787" y="7803622"/>
+              <a:ext cx="246803" cy="88576"/>
             </a:xfrm>
             <a:prstGeom prst="rect">
               <a:avLst/>
@@ -5745,8 +6631,8 @@
           </p:nvSpPr>
           <p:spPr>
             <a:xfrm>
-              <a:off x="2443918" y="5393720"/>
-              <a:ext cx="165951" cy="67061"/>
+              <a:off x="4420787" y="7980775"/>
+              <a:ext cx="246803" cy="88576"/>
             </a:xfrm>
             <a:prstGeom prst="rect">
               <a:avLst/>
@@ -5771,8 +6657,8 @@
           </p:nvSpPr>
           <p:spPr>
             <a:xfrm>
-              <a:off x="2443918" y="5259597"/>
-              <a:ext cx="165951" cy="0"/>
+              <a:off x="4420787" y="7803622"/>
+              <a:ext cx="246803" cy="0"/>
             </a:xfrm>
             <a:prstGeom prst="rect">
               <a:avLst/>
@@ -5797,8 +6683,8 @@
           </p:nvSpPr>
           <p:spPr>
             <a:xfrm>
-              <a:off x="2443918" y="5460781"/>
-              <a:ext cx="165951" cy="134122"/>
+              <a:off x="4420787" y="8069352"/>
+              <a:ext cx="246803" cy="177152"/>
             </a:xfrm>
             <a:prstGeom prst="rect">
               <a:avLst/>
@@ -5823,8 +6709,8 @@
           </p:nvSpPr>
           <p:spPr>
             <a:xfrm>
-              <a:off x="2443918" y="3046579"/>
-              <a:ext cx="165951" cy="1475345"/>
+              <a:off x="4420787" y="4880599"/>
+              <a:ext cx="246803" cy="1948682"/>
             </a:xfrm>
             <a:prstGeom prst="rect">
               <a:avLst/>
@@ -5849,8 +6735,8 @@
           </p:nvSpPr>
           <p:spPr>
             <a:xfrm>
-              <a:off x="2443918" y="5192536"/>
-              <a:ext cx="165951" cy="67061"/>
+              <a:off x="4420787" y="7715046"/>
+              <a:ext cx="246803" cy="88576"/>
             </a:xfrm>
             <a:prstGeom prst="rect">
               <a:avLst/>
@@ -5875,8 +6761,8 @@
           </p:nvSpPr>
           <p:spPr>
             <a:xfrm>
-              <a:off x="2443918" y="5326658"/>
-              <a:ext cx="165951" cy="67061"/>
+              <a:off x="4420787" y="7892199"/>
+              <a:ext cx="246803" cy="88576"/>
             </a:xfrm>
             <a:prstGeom prst="rect">
               <a:avLst/>
@@ -5901,8 +6787,8 @@
           </p:nvSpPr>
           <p:spPr>
             <a:xfrm>
-              <a:off x="2443918" y="5460781"/>
-              <a:ext cx="165951" cy="0"/>
+              <a:off x="4420787" y="8069352"/>
+              <a:ext cx="246803" cy="0"/>
             </a:xfrm>
             <a:prstGeom prst="rect">
               <a:avLst/>
@@ -5927,8 +6813,8 @@
           </p:nvSpPr>
           <p:spPr>
             <a:xfrm>
-              <a:off x="7745134" y="5594903"/>
-              <a:ext cx="165951" cy="0"/>
+              <a:off x="12304782" y="8246505"/>
+              <a:ext cx="246803" cy="0"/>
             </a:xfrm>
             <a:prstGeom prst="rect">
               <a:avLst/>
@@ -5953,8 +6839,8 @@
           </p:nvSpPr>
           <p:spPr>
             <a:xfrm>
-              <a:off x="7745134" y="5594903"/>
-              <a:ext cx="165951" cy="0"/>
+              <a:off x="12304782" y="8246505"/>
+              <a:ext cx="246803" cy="0"/>
             </a:xfrm>
             <a:prstGeom prst="rect">
               <a:avLst/>
@@ -5979,8 +6865,8 @@
           </p:nvSpPr>
           <p:spPr>
             <a:xfrm>
-              <a:off x="7745134" y="5594903"/>
-              <a:ext cx="165951" cy="0"/>
+              <a:off x="12304782" y="8246505"/>
+              <a:ext cx="246803" cy="0"/>
             </a:xfrm>
             <a:prstGeom prst="rect">
               <a:avLst/>
@@ -6005,8 +6891,8 @@
           </p:nvSpPr>
           <p:spPr>
             <a:xfrm>
-              <a:off x="7745134" y="5594903"/>
-              <a:ext cx="165951" cy="0"/>
+              <a:off x="12304782" y="8246505"/>
+              <a:ext cx="246803" cy="0"/>
             </a:xfrm>
             <a:prstGeom prst="rect">
               <a:avLst/>
@@ -6031,8 +6917,8 @@
           </p:nvSpPr>
           <p:spPr>
             <a:xfrm>
-              <a:off x="7745134" y="5594903"/>
-              <a:ext cx="165951" cy="0"/>
+              <a:off x="12304782" y="8246505"/>
+              <a:ext cx="246803" cy="0"/>
             </a:xfrm>
             <a:prstGeom prst="rect">
               <a:avLst/>
@@ -6057,8 +6943,8 @@
           </p:nvSpPr>
           <p:spPr>
             <a:xfrm>
-              <a:off x="7745134" y="5594903"/>
-              <a:ext cx="165951" cy="0"/>
+              <a:off x="12304782" y="8246505"/>
+              <a:ext cx="246803" cy="0"/>
             </a:xfrm>
             <a:prstGeom prst="rect">
               <a:avLst/>
@@ -6083,8 +6969,8 @@
           </p:nvSpPr>
           <p:spPr>
             <a:xfrm>
-              <a:off x="7745134" y="5594903"/>
-              <a:ext cx="165951" cy="0"/>
+              <a:off x="12304782" y="8246505"/>
+              <a:ext cx="246803" cy="0"/>
             </a:xfrm>
             <a:prstGeom prst="rect">
               <a:avLst/>
@@ -6109,8 +6995,8 @@
           </p:nvSpPr>
           <p:spPr>
             <a:xfrm>
-              <a:off x="7745134" y="5527842"/>
-              <a:ext cx="165951" cy="67061"/>
+              <a:off x="12304782" y="8157928"/>
+              <a:ext cx="246803" cy="88576"/>
             </a:xfrm>
             <a:prstGeom prst="rect">
               <a:avLst/>
@@ -6135,8 +7021,8 @@
           </p:nvSpPr>
           <p:spPr>
             <a:xfrm>
-              <a:off x="7745134" y="5594903"/>
-              <a:ext cx="165951" cy="0"/>
+              <a:off x="12304782" y="8246505"/>
+              <a:ext cx="246803" cy="0"/>
             </a:xfrm>
             <a:prstGeom prst="rect">
               <a:avLst/>
@@ -6161,8 +7047,8 @@
           </p:nvSpPr>
           <p:spPr>
             <a:xfrm>
-              <a:off x="7745134" y="5594903"/>
-              <a:ext cx="165951" cy="0"/>
+              <a:off x="12304782" y="8246505"/>
+              <a:ext cx="246803" cy="0"/>
             </a:xfrm>
             <a:prstGeom prst="rect">
               <a:avLst/>
@@ -6187,8 +7073,8 @@
           </p:nvSpPr>
           <p:spPr>
             <a:xfrm>
-              <a:off x="7745134" y="5594903"/>
-              <a:ext cx="165951" cy="0"/>
+              <a:off x="12304782" y="8246505"/>
+              <a:ext cx="246803" cy="0"/>
             </a:xfrm>
             <a:prstGeom prst="rect">
               <a:avLst/>
@@ -6213,8 +7099,8 @@
           </p:nvSpPr>
           <p:spPr>
             <a:xfrm>
-              <a:off x="3365869" y="5527842"/>
-              <a:ext cx="165951" cy="0"/>
+              <a:off x="5791917" y="8157928"/>
+              <a:ext cx="246803" cy="0"/>
             </a:xfrm>
             <a:prstGeom prst="rect">
               <a:avLst/>
@@ -6239,8 +7125,8 @@
           </p:nvSpPr>
           <p:spPr>
             <a:xfrm>
-              <a:off x="3365869" y="5393720"/>
-              <a:ext cx="165951" cy="134122"/>
+              <a:off x="5791917" y="7980775"/>
+              <a:ext cx="246803" cy="177152"/>
             </a:xfrm>
             <a:prstGeom prst="rect">
               <a:avLst/>
@@ -6265,8 +7151,8 @@
           </p:nvSpPr>
           <p:spPr>
             <a:xfrm>
-              <a:off x="3365869" y="4924291"/>
-              <a:ext cx="165951" cy="469428"/>
+              <a:off x="5791917" y="7360740"/>
+              <a:ext cx="246803" cy="620035"/>
             </a:xfrm>
             <a:prstGeom prst="rect">
               <a:avLst/>
@@ -6291,8 +7177,8 @@
           </p:nvSpPr>
           <p:spPr>
             <a:xfrm>
-              <a:off x="3365869" y="5594903"/>
-              <a:ext cx="165951" cy="0"/>
+              <a:off x="5791917" y="8246505"/>
+              <a:ext cx="246803" cy="0"/>
             </a:xfrm>
             <a:prstGeom prst="rect">
               <a:avLst/>
@@ -6317,8 +7203,8 @@
           </p:nvSpPr>
           <p:spPr>
             <a:xfrm>
-              <a:off x="3365869" y="5594903"/>
-              <a:ext cx="165951" cy="0"/>
+              <a:off x="5791917" y="8246505"/>
+              <a:ext cx="246803" cy="0"/>
             </a:xfrm>
             <a:prstGeom prst="rect">
               <a:avLst/>
@@ -6343,8 +7229,8 @@
           </p:nvSpPr>
           <p:spPr>
             <a:xfrm>
-              <a:off x="3365869" y="5594903"/>
-              <a:ext cx="165951" cy="0"/>
+              <a:off x="5791917" y="8246505"/>
+              <a:ext cx="246803" cy="0"/>
             </a:xfrm>
             <a:prstGeom prst="rect">
               <a:avLst/>
@@ -6369,8 +7255,8 @@
           </p:nvSpPr>
           <p:spPr>
             <a:xfrm>
-              <a:off x="3365869" y="5594903"/>
-              <a:ext cx="165951" cy="0"/>
+              <a:off x="5791917" y="8246505"/>
+              <a:ext cx="246803" cy="0"/>
             </a:xfrm>
             <a:prstGeom prst="rect">
               <a:avLst/>
@@ -6395,8 +7281,8 @@
           </p:nvSpPr>
           <p:spPr>
             <a:xfrm>
-              <a:off x="3365869" y="3247762"/>
-              <a:ext cx="165951" cy="1676529"/>
+              <a:off x="5791917" y="5146328"/>
+              <a:ext cx="246803" cy="2214411"/>
             </a:xfrm>
             <a:prstGeom prst="rect">
               <a:avLst/>
@@ -6421,8 +7307,8 @@
           </p:nvSpPr>
           <p:spPr>
             <a:xfrm>
-              <a:off x="3365869" y="5527842"/>
-              <a:ext cx="165951" cy="67061"/>
+              <a:off x="5791917" y="8157928"/>
+              <a:ext cx="246803" cy="88576"/>
             </a:xfrm>
             <a:prstGeom prst="rect">
               <a:avLst/>
@@ -6447,8 +7333,8 @@
           </p:nvSpPr>
           <p:spPr>
             <a:xfrm>
-              <a:off x="3365869" y="5594903"/>
-              <a:ext cx="165951" cy="0"/>
+              <a:off x="5791917" y="8246505"/>
+              <a:ext cx="246803" cy="0"/>
             </a:xfrm>
             <a:prstGeom prst="rect">
               <a:avLst/>
@@ -6473,8 +7359,8 @@
           </p:nvSpPr>
           <p:spPr>
             <a:xfrm>
-              <a:off x="3365869" y="5594903"/>
-              <a:ext cx="165951" cy="0"/>
+              <a:off x="5791917" y="8246505"/>
+              <a:ext cx="246803" cy="0"/>
             </a:xfrm>
             <a:prstGeom prst="rect">
               <a:avLst/>
@@ -6499,8 +7385,8 @@
           </p:nvSpPr>
           <p:spPr>
             <a:xfrm>
-              <a:off x="1060993" y="4723108"/>
-              <a:ext cx="165951" cy="402367"/>
+              <a:off x="2364093" y="7095011"/>
+              <a:ext cx="246803" cy="531458"/>
             </a:xfrm>
             <a:prstGeom prst="rect">
               <a:avLst/>
@@ -6525,8 +7411,8 @@
           </p:nvSpPr>
           <p:spPr>
             <a:xfrm>
-              <a:off x="1060993" y="4656047"/>
-              <a:ext cx="165951" cy="67061"/>
+              <a:off x="2364093" y="7006434"/>
+              <a:ext cx="246803" cy="88576"/>
             </a:xfrm>
             <a:prstGeom prst="rect">
               <a:avLst/>
@@ -6551,8 +7437,8 @@
           </p:nvSpPr>
           <p:spPr>
             <a:xfrm>
-              <a:off x="1060993" y="4320741"/>
-              <a:ext cx="165951" cy="335305"/>
+              <a:off x="2364093" y="6563552"/>
+              <a:ext cx="246803" cy="442882"/>
             </a:xfrm>
             <a:prstGeom prst="rect">
               <a:avLst/>
@@ -6577,8 +7463,8 @@
           </p:nvSpPr>
           <p:spPr>
             <a:xfrm>
-              <a:off x="1060993" y="5259597"/>
-              <a:ext cx="165951" cy="67061"/>
+              <a:off x="2364093" y="7803622"/>
+              <a:ext cx="246803" cy="88576"/>
             </a:xfrm>
             <a:prstGeom prst="rect">
               <a:avLst/>
@@ -6603,8 +7489,8 @@
           </p:nvSpPr>
           <p:spPr>
             <a:xfrm>
-              <a:off x="1060993" y="5393720"/>
-              <a:ext cx="165951" cy="0"/>
+              <a:off x="2364093" y="7980775"/>
+              <a:ext cx="246803" cy="0"/>
             </a:xfrm>
             <a:prstGeom prst="rect">
               <a:avLst/>
@@ -6629,8 +7515,8 @@
           </p:nvSpPr>
           <p:spPr>
             <a:xfrm>
-              <a:off x="1060993" y="5192536"/>
-              <a:ext cx="165951" cy="67061"/>
+              <a:off x="2364093" y="7715046"/>
+              <a:ext cx="246803" cy="88576"/>
             </a:xfrm>
             <a:prstGeom prst="rect">
               <a:avLst/>
@@ -6655,8 +7541,8 @@
           </p:nvSpPr>
           <p:spPr>
             <a:xfrm>
-              <a:off x="1060993" y="5393720"/>
-              <a:ext cx="165951" cy="201183"/>
+              <a:off x="2364093" y="7980775"/>
+              <a:ext cx="246803" cy="265729"/>
             </a:xfrm>
             <a:prstGeom prst="rect">
               <a:avLst/>
@@ -6681,8 +7567,8 @@
           </p:nvSpPr>
           <p:spPr>
             <a:xfrm>
-              <a:off x="1060993" y="1437111"/>
-              <a:ext cx="165951" cy="2883630"/>
+              <a:off x="2364093" y="2754764"/>
+              <a:ext cx="246803" cy="3808787"/>
             </a:xfrm>
             <a:prstGeom prst="rect">
               <a:avLst/>
@@ -6707,8 +7593,8 @@
           </p:nvSpPr>
           <p:spPr>
             <a:xfrm>
-              <a:off x="1060993" y="5125475"/>
-              <a:ext cx="165951" cy="67061"/>
+              <a:off x="2364093" y="7626469"/>
+              <a:ext cx="246803" cy="88576"/>
             </a:xfrm>
             <a:prstGeom prst="rect">
               <a:avLst/>
@@ -6733,8 +7619,8 @@
           </p:nvSpPr>
           <p:spPr>
             <a:xfrm>
-              <a:off x="1060993" y="5326658"/>
-              <a:ext cx="165951" cy="67061"/>
+              <a:off x="2364093" y="7892199"/>
+              <a:ext cx="246803" cy="88576"/>
             </a:xfrm>
             <a:prstGeom prst="rect">
               <a:avLst/>
@@ -6759,8 +7645,8 @@
           </p:nvSpPr>
           <p:spPr>
             <a:xfrm>
-              <a:off x="1060993" y="5393720"/>
-              <a:ext cx="165951" cy="0"/>
+              <a:off x="2364093" y="7980775"/>
+              <a:ext cx="246803" cy="0"/>
             </a:xfrm>
             <a:prstGeom prst="rect">
               <a:avLst/>
@@ -6785,8 +7671,8 @@
           </p:nvSpPr>
           <p:spPr>
             <a:xfrm>
-              <a:off x="2904894" y="4857230"/>
-              <a:ext cx="165951" cy="134122"/>
+              <a:off x="5106352" y="7272164"/>
+              <a:ext cx="246803" cy="177152"/>
             </a:xfrm>
             <a:prstGeom prst="rect">
               <a:avLst/>
@@ -6811,8 +7697,8 @@
           </p:nvSpPr>
           <p:spPr>
             <a:xfrm>
-              <a:off x="2904894" y="4790169"/>
-              <a:ext cx="165951" cy="67061"/>
+              <a:off x="5106352" y="7183587"/>
+              <a:ext cx="246803" cy="88576"/>
             </a:xfrm>
             <a:prstGeom prst="rect">
               <a:avLst/>
@@ -6837,8 +7723,8 @@
           </p:nvSpPr>
           <p:spPr>
             <a:xfrm>
-              <a:off x="2904894" y="4521924"/>
-              <a:ext cx="165951" cy="268244"/>
+              <a:off x="5106352" y="6829281"/>
+              <a:ext cx="246803" cy="354305"/>
             </a:xfrm>
             <a:prstGeom prst="rect">
               <a:avLst/>
@@ -6863,8 +7749,8 @@
           </p:nvSpPr>
           <p:spPr>
             <a:xfrm>
-              <a:off x="2904894" y="5192536"/>
-              <a:ext cx="165951" cy="134122"/>
+              <a:off x="5106352" y="7715046"/>
+              <a:ext cx="246803" cy="177152"/>
             </a:xfrm>
             <a:prstGeom prst="rect">
               <a:avLst/>
@@ -6889,8 +7775,8 @@
           </p:nvSpPr>
           <p:spPr>
             <a:xfrm>
-              <a:off x="2904894" y="5393720"/>
-              <a:ext cx="165951" cy="67061"/>
+              <a:off x="5106352" y="7980775"/>
+              <a:ext cx="246803" cy="88576"/>
             </a:xfrm>
             <a:prstGeom prst="rect">
               <a:avLst/>
@@ -6915,8 +7801,8 @@
           </p:nvSpPr>
           <p:spPr>
             <a:xfrm>
-              <a:off x="2904894" y="4991353"/>
-              <a:ext cx="165951" cy="201183"/>
+              <a:off x="5106352" y="7449316"/>
+              <a:ext cx="246803" cy="265729"/>
             </a:xfrm>
             <a:prstGeom prst="rect">
               <a:avLst/>
@@ -6941,8 +7827,8 @@
           </p:nvSpPr>
           <p:spPr>
             <a:xfrm>
-              <a:off x="2904894" y="5460781"/>
-              <a:ext cx="165951" cy="134122"/>
+              <a:off x="5106352" y="8069352"/>
+              <a:ext cx="246803" cy="177152"/>
             </a:xfrm>
             <a:prstGeom prst="rect">
               <a:avLst/>
@@ -6967,8 +7853,8 @@
           </p:nvSpPr>
           <p:spPr>
             <a:xfrm>
-              <a:off x="2904894" y="3180701"/>
-              <a:ext cx="165951" cy="1341223"/>
+              <a:off x="5106352" y="5057752"/>
+              <a:ext cx="246803" cy="1771529"/>
             </a:xfrm>
             <a:prstGeom prst="rect">
               <a:avLst/>
@@ -6993,8 +7879,8 @@
           </p:nvSpPr>
           <p:spPr>
             <a:xfrm>
-              <a:off x="2904894" y="4991353"/>
-              <a:ext cx="165951" cy="0"/>
+              <a:off x="5106352" y="7449316"/>
+              <a:ext cx="246803" cy="0"/>
             </a:xfrm>
             <a:prstGeom prst="rect">
               <a:avLst/>
@@ -7019,8 +7905,8 @@
           </p:nvSpPr>
           <p:spPr>
             <a:xfrm>
-              <a:off x="2904894" y="5326658"/>
-              <a:ext cx="165951" cy="67061"/>
+              <a:off x="5106352" y="7892199"/>
+              <a:ext cx="246803" cy="88576"/>
             </a:xfrm>
             <a:prstGeom prst="rect">
               <a:avLst/>
@@ -7045,8 +7931,8 @@
           </p:nvSpPr>
           <p:spPr>
             <a:xfrm>
-              <a:off x="2904894" y="5460781"/>
-              <a:ext cx="165951" cy="0"/>
+              <a:off x="5106352" y="8069352"/>
+              <a:ext cx="246803" cy="0"/>
             </a:xfrm>
             <a:prstGeom prst="rect">
               <a:avLst/>
@@ -7071,8 +7957,8 @@
           </p:nvSpPr>
           <p:spPr>
             <a:xfrm>
-              <a:off x="1752455" y="4723108"/>
-              <a:ext cx="165951" cy="201183"/>
+              <a:off x="3392440" y="7095011"/>
+              <a:ext cx="246803" cy="265729"/>
             </a:xfrm>
             <a:prstGeom prst="rect">
               <a:avLst/>
@@ -7097,8 +7983,8 @@
           </p:nvSpPr>
           <p:spPr>
             <a:xfrm>
-              <a:off x="1752455" y="4588986"/>
-              <a:ext cx="165951" cy="134122"/>
+              <a:off x="3392440" y="6917858"/>
+              <a:ext cx="246803" cy="177152"/>
             </a:xfrm>
             <a:prstGeom prst="rect">
               <a:avLst/>
@@ -7123,8 +8009,8 @@
           </p:nvSpPr>
           <p:spPr>
             <a:xfrm>
-              <a:off x="1752455" y="4186619"/>
-              <a:ext cx="165951" cy="402367"/>
+              <a:off x="3392440" y="6386399"/>
+              <a:ext cx="246803" cy="531458"/>
             </a:xfrm>
             <a:prstGeom prst="rect">
               <a:avLst/>
@@ -7149,8 +8035,8 @@
           </p:nvSpPr>
           <p:spPr>
             <a:xfrm>
-              <a:off x="1752455" y="5192536"/>
-              <a:ext cx="165951" cy="67061"/>
+              <a:off x="3392440" y="7715046"/>
+              <a:ext cx="246803" cy="88576"/>
             </a:xfrm>
             <a:prstGeom prst="rect">
               <a:avLst/>
@@ -7175,8 +8061,8 @@
           </p:nvSpPr>
           <p:spPr>
             <a:xfrm>
-              <a:off x="1752455" y="5259597"/>
-              <a:ext cx="165951" cy="67061"/>
+              <a:off x="3392440" y="7803622"/>
+              <a:ext cx="246803" cy="88576"/>
             </a:xfrm>
             <a:prstGeom prst="rect">
               <a:avLst/>
@@ -7201,8 +8087,8 @@
           </p:nvSpPr>
           <p:spPr>
             <a:xfrm>
-              <a:off x="1752455" y="5192536"/>
-              <a:ext cx="165951" cy="0"/>
+              <a:off x="3392440" y="7715046"/>
+              <a:ext cx="246803" cy="0"/>
             </a:xfrm>
             <a:prstGeom prst="rect">
               <a:avLst/>
@@ -7227,8 +8113,8 @@
           </p:nvSpPr>
           <p:spPr>
             <a:xfrm>
-              <a:off x="1752455" y="5460781"/>
-              <a:ext cx="165951" cy="134122"/>
+              <a:off x="3392440" y="8069352"/>
+              <a:ext cx="246803" cy="177152"/>
             </a:xfrm>
             <a:prstGeom prst="rect">
               <a:avLst/>
@@ -7253,8 +8139,8 @@
           </p:nvSpPr>
           <p:spPr>
             <a:xfrm>
-              <a:off x="1752455" y="2241845"/>
-              <a:ext cx="165951" cy="1944773"/>
+              <a:off x="3392440" y="3817682"/>
+              <a:ext cx="246803" cy="2568717"/>
             </a:xfrm>
             <a:prstGeom prst="rect">
               <a:avLst/>
@@ -7279,8 +8165,8 @@
           </p:nvSpPr>
           <p:spPr>
             <a:xfrm>
-              <a:off x="1752455" y="4924291"/>
-              <a:ext cx="165951" cy="268244"/>
+              <a:off x="3392440" y="7360740"/>
+              <a:ext cx="246803" cy="354305"/>
             </a:xfrm>
             <a:prstGeom prst="rect">
               <a:avLst/>
@@ -7305,8 +8191,8 @@
           </p:nvSpPr>
           <p:spPr>
             <a:xfrm>
-              <a:off x="1752455" y="5259597"/>
-              <a:ext cx="165951" cy="0"/>
+              <a:off x="3392440" y="7803622"/>
+              <a:ext cx="246803" cy="0"/>
             </a:xfrm>
             <a:prstGeom prst="rect">
               <a:avLst/>
@@ -7331,8 +8217,8 @@
           </p:nvSpPr>
           <p:spPr>
             <a:xfrm>
-              <a:off x="1752455" y="5326658"/>
-              <a:ext cx="165951" cy="134122"/>
+              <a:off x="3392440" y="7892199"/>
+              <a:ext cx="246803" cy="177152"/>
             </a:xfrm>
             <a:prstGeom prst="rect">
               <a:avLst/>
@@ -7357,8 +8243,8 @@
           </p:nvSpPr>
           <p:spPr>
             <a:xfrm>
-              <a:off x="4287819" y="5125475"/>
-              <a:ext cx="165951" cy="0"/>
+              <a:off x="7163046" y="7626469"/>
+              <a:ext cx="246803" cy="0"/>
             </a:xfrm>
             <a:prstGeom prst="rect">
               <a:avLst/>
@@ -7383,8 +8269,8 @@
           </p:nvSpPr>
           <p:spPr>
             <a:xfrm>
-              <a:off x="4287819" y="5058414"/>
-              <a:ext cx="165951" cy="67061"/>
+              <a:off x="7163046" y="7537893"/>
+              <a:ext cx="246803" cy="88576"/>
             </a:xfrm>
             <a:prstGeom prst="rect">
               <a:avLst/>
@@ -7409,8 +8295,8 @@
           </p:nvSpPr>
           <p:spPr>
             <a:xfrm>
-              <a:off x="4287819" y="4857230"/>
-              <a:ext cx="165951" cy="201183"/>
+              <a:off x="7163046" y="7272164"/>
+              <a:ext cx="246803" cy="265729"/>
             </a:xfrm>
             <a:prstGeom prst="rect">
               <a:avLst/>
@@ -7435,8 +8321,8 @@
           </p:nvSpPr>
           <p:spPr>
             <a:xfrm>
-              <a:off x="4287819" y="5326658"/>
-              <a:ext cx="165951" cy="134122"/>
+              <a:off x="7163046" y="7892199"/>
+              <a:ext cx="246803" cy="177152"/>
             </a:xfrm>
             <a:prstGeom prst="rect">
               <a:avLst/>
@@ -7461,8 +8347,8 @@
           </p:nvSpPr>
           <p:spPr>
             <a:xfrm>
-              <a:off x="4287819" y="5527842"/>
-              <a:ext cx="165951" cy="0"/>
+              <a:off x="7163046" y="8157928"/>
+              <a:ext cx="246803" cy="0"/>
             </a:xfrm>
             <a:prstGeom prst="rect">
               <a:avLst/>
@@ -7487,8 +8373,8 @@
           </p:nvSpPr>
           <p:spPr>
             <a:xfrm>
-              <a:off x="4287819" y="5192536"/>
-              <a:ext cx="165951" cy="134122"/>
+              <a:off x="7163046" y="7715046"/>
+              <a:ext cx="246803" cy="177152"/>
             </a:xfrm>
             <a:prstGeom prst="rect">
               <a:avLst/>
@@ -7513,8 +8399,8 @@
           </p:nvSpPr>
           <p:spPr>
             <a:xfrm>
-              <a:off x="4287819" y="5594903"/>
-              <a:ext cx="165951" cy="0"/>
+              <a:off x="7163046" y="8246505"/>
+              <a:ext cx="246803" cy="0"/>
             </a:xfrm>
             <a:prstGeom prst="rect">
               <a:avLst/>
@@ -7539,8 +8425,8 @@
           </p:nvSpPr>
           <p:spPr>
             <a:xfrm>
-              <a:off x="4287819" y="3516007"/>
-              <a:ext cx="165951" cy="1341223"/>
+              <a:off x="7163046" y="5500634"/>
+              <a:ext cx="246803" cy="1771529"/>
             </a:xfrm>
             <a:prstGeom prst="rect">
               <a:avLst/>
@@ -7565,8 +8451,8 @@
           </p:nvSpPr>
           <p:spPr>
             <a:xfrm>
-              <a:off x="4287819" y="5125475"/>
-              <a:ext cx="165951" cy="67061"/>
+              <a:off x="7163046" y="7626469"/>
+              <a:ext cx="246803" cy="88576"/>
             </a:xfrm>
             <a:prstGeom prst="rect">
               <a:avLst/>
@@ -7591,8 +8477,8 @@
           </p:nvSpPr>
           <p:spPr>
             <a:xfrm>
-              <a:off x="4287819" y="5460781"/>
-              <a:ext cx="165951" cy="67061"/>
+              <a:off x="7163046" y="8069352"/>
+              <a:ext cx="246803" cy="88576"/>
             </a:xfrm>
             <a:prstGeom prst="rect">
               <a:avLst/>
@@ -7617,8 +8503,8 @@
           </p:nvSpPr>
           <p:spPr>
             <a:xfrm>
-              <a:off x="4287819" y="5527842"/>
-              <a:ext cx="165951" cy="67061"/>
+              <a:off x="7163046" y="8157928"/>
+              <a:ext cx="246803" cy="88576"/>
             </a:xfrm>
             <a:prstGeom prst="rect">
               <a:avLst/>
@@ -7643,8 +8529,8 @@
           </p:nvSpPr>
           <p:spPr>
             <a:xfrm>
-              <a:off x="5209770" y="5192536"/>
-              <a:ext cx="165951" cy="0"/>
+              <a:off x="8534176" y="7715046"/>
+              <a:ext cx="246803" cy="0"/>
             </a:xfrm>
             <a:prstGeom prst="rect">
               <a:avLst/>
@@ -7669,8 +8555,8 @@
           </p:nvSpPr>
           <p:spPr>
             <a:xfrm>
-              <a:off x="5209770" y="4723108"/>
-              <a:ext cx="165951" cy="469428"/>
+              <a:off x="8534176" y="7095011"/>
+              <a:ext cx="246803" cy="620035"/>
             </a:xfrm>
             <a:prstGeom prst="rect">
               <a:avLst/>
@@ -7695,8 +8581,8 @@
           </p:nvSpPr>
           <p:spPr>
             <a:xfrm>
-              <a:off x="5209770" y="4253680"/>
-              <a:ext cx="165951" cy="469428"/>
+              <a:off x="8534176" y="6474975"/>
+              <a:ext cx="246803" cy="620035"/>
             </a:xfrm>
             <a:prstGeom prst="rect">
               <a:avLst/>
@@ -7721,8 +8607,8 @@
           </p:nvSpPr>
           <p:spPr>
             <a:xfrm>
-              <a:off x="5209770" y="5460781"/>
-              <a:ext cx="165951" cy="67061"/>
+              <a:off x="8534176" y="8069352"/>
+              <a:ext cx="246803" cy="88576"/>
             </a:xfrm>
             <a:prstGeom prst="rect">
               <a:avLst/>
@@ -7747,8 +8633,8 @@
           </p:nvSpPr>
           <p:spPr>
             <a:xfrm>
-              <a:off x="5209770" y="5527842"/>
-              <a:ext cx="165951" cy="0"/>
+              <a:off x="8534176" y="8157928"/>
+              <a:ext cx="246803" cy="0"/>
             </a:xfrm>
             <a:prstGeom prst="rect">
               <a:avLst/>
@@ -7773,8 +8659,8 @@
           </p:nvSpPr>
           <p:spPr>
             <a:xfrm>
-              <a:off x="5209770" y="5259597"/>
-              <a:ext cx="165951" cy="201183"/>
+              <a:off x="8534176" y="7803622"/>
+              <a:ext cx="246803" cy="265729"/>
             </a:xfrm>
             <a:prstGeom prst="rect">
               <a:avLst/>
@@ -7799,8 +8685,8 @@
           </p:nvSpPr>
           <p:spPr>
             <a:xfrm>
-              <a:off x="5209770" y="5527842"/>
-              <a:ext cx="165951" cy="67061"/>
+              <a:off x="8534176" y="8157928"/>
+              <a:ext cx="246803" cy="88576"/>
             </a:xfrm>
             <a:prstGeom prst="rect">
               <a:avLst/>
@@ -7825,8 +8711,8 @@
           </p:nvSpPr>
           <p:spPr>
             <a:xfrm>
-              <a:off x="5209770" y="3717190"/>
-              <a:ext cx="165951" cy="536489"/>
+              <a:off x="8534176" y="5766364"/>
+              <a:ext cx="246803" cy="708611"/>
             </a:xfrm>
             <a:prstGeom prst="rect">
               <a:avLst/>
@@ -7851,8 +8737,8 @@
           </p:nvSpPr>
           <p:spPr>
             <a:xfrm>
-              <a:off x="5209770" y="5192536"/>
-              <a:ext cx="165951" cy="67061"/>
+              <a:off x="8534176" y="7715046"/>
+              <a:ext cx="246803" cy="88576"/>
             </a:xfrm>
             <a:prstGeom prst="rect">
               <a:avLst/>
@@ -7877,8 +8763,8 @@
           </p:nvSpPr>
           <p:spPr>
             <a:xfrm>
-              <a:off x="5209770" y="5527842"/>
-              <a:ext cx="165951" cy="0"/>
+              <a:off x="8534176" y="8157928"/>
+              <a:ext cx="246803" cy="0"/>
             </a:xfrm>
             <a:prstGeom prst="rect">
               <a:avLst/>
@@ -7903,8 +8789,8 @@
           </p:nvSpPr>
           <p:spPr>
             <a:xfrm>
-              <a:off x="5209770" y="5527842"/>
-              <a:ext cx="165951" cy="0"/>
+              <a:off x="8534176" y="8157928"/>
+              <a:ext cx="246803" cy="0"/>
             </a:xfrm>
             <a:prstGeom prst="rect">
               <a:avLst/>
@@ -7929,8 +8815,8 @@
           </p:nvSpPr>
           <p:spPr>
             <a:xfrm>
-              <a:off x="3135381" y="4588986"/>
-              <a:ext cx="165951" cy="268244"/>
+              <a:off x="5449134" y="6917858"/>
+              <a:ext cx="246803" cy="354305"/>
             </a:xfrm>
             <a:prstGeom prst="rect">
               <a:avLst/>
@@ -7955,8 +8841,8 @@
           </p:nvSpPr>
           <p:spPr>
             <a:xfrm>
-              <a:off x="3135381" y="4387802"/>
-              <a:ext cx="165951" cy="201183"/>
+              <a:off x="5449134" y="6652128"/>
+              <a:ext cx="246803" cy="265729"/>
             </a:xfrm>
             <a:prstGeom prst="rect">
               <a:avLst/>
@@ -7981,8 +8867,8 @@
           </p:nvSpPr>
           <p:spPr>
             <a:xfrm>
-              <a:off x="3135381" y="3918374"/>
-              <a:ext cx="165951" cy="469428"/>
+              <a:off x="5449134" y="6032093"/>
+              <a:ext cx="246803" cy="620035"/>
             </a:xfrm>
             <a:prstGeom prst="rect">
               <a:avLst/>
@@ -8007,8 +8893,8 @@
           </p:nvSpPr>
           <p:spPr>
             <a:xfrm>
-              <a:off x="3135381" y="5058414"/>
-              <a:ext cx="165951" cy="0"/>
+              <a:off x="5449134" y="7537893"/>
+              <a:ext cx="246803" cy="0"/>
             </a:xfrm>
             <a:prstGeom prst="rect">
               <a:avLst/>
@@ -8033,8 +8919,8 @@
           </p:nvSpPr>
           <p:spPr>
             <a:xfrm>
-              <a:off x="3135381" y="5058414"/>
-              <a:ext cx="165951" cy="67061"/>
+              <a:off x="5449134" y="7537893"/>
+              <a:ext cx="246803" cy="88576"/>
             </a:xfrm>
             <a:prstGeom prst="rect">
               <a:avLst/>
@@ -8059,8 +8945,8 @@
           </p:nvSpPr>
           <p:spPr>
             <a:xfrm>
-              <a:off x="3135381" y="4991353"/>
-              <a:ext cx="165951" cy="67061"/>
+              <a:off x="5449134" y="7449316"/>
+              <a:ext cx="246803" cy="88576"/>
             </a:xfrm>
             <a:prstGeom prst="rect">
               <a:avLst/>
@@ -8085,8 +8971,8 @@
           </p:nvSpPr>
           <p:spPr>
             <a:xfrm>
-              <a:off x="3135381" y="5259597"/>
-              <a:ext cx="165951" cy="335305"/>
+              <a:off x="5449134" y="7803622"/>
+              <a:ext cx="246803" cy="442882"/>
             </a:xfrm>
             <a:prstGeom prst="rect">
               <a:avLst/>
@@ -8111,8 +8997,8 @@
           </p:nvSpPr>
           <p:spPr>
             <a:xfrm>
-              <a:off x="3135381" y="3247762"/>
-              <a:ext cx="165951" cy="670611"/>
+              <a:off x="5449134" y="5146328"/>
+              <a:ext cx="246803" cy="885764"/>
             </a:xfrm>
             <a:prstGeom prst="rect">
               <a:avLst/>
@@ -8137,8 +9023,8 @@
           </p:nvSpPr>
           <p:spPr>
             <a:xfrm>
-              <a:off x="3135381" y="4857230"/>
-              <a:ext cx="165951" cy="134122"/>
+              <a:off x="5449134" y="7272164"/>
+              <a:ext cx="246803" cy="177152"/>
             </a:xfrm>
             <a:prstGeom prst="rect">
               <a:avLst/>
@@ -8163,8 +9049,8 @@
           </p:nvSpPr>
           <p:spPr>
             <a:xfrm>
-              <a:off x="3135381" y="5058414"/>
-              <a:ext cx="165951" cy="0"/>
+              <a:off x="5449134" y="7537893"/>
+              <a:ext cx="246803" cy="0"/>
             </a:xfrm>
             <a:prstGeom prst="rect">
               <a:avLst/>
@@ -8189,8 +9075,8 @@
           </p:nvSpPr>
           <p:spPr>
             <a:xfrm>
-              <a:off x="3135381" y="5125475"/>
-              <a:ext cx="165951" cy="134122"/>
+              <a:off x="5449134" y="7626469"/>
+              <a:ext cx="246803" cy="177152"/>
             </a:xfrm>
             <a:prstGeom prst="rect">
               <a:avLst/>
@@ -8215,8 +9101,8 @@
           </p:nvSpPr>
           <p:spPr>
             <a:xfrm>
-              <a:off x="8206109" y="5594903"/>
-              <a:ext cx="165951" cy="0"/>
+              <a:off x="12990346" y="8246505"/>
+              <a:ext cx="246803" cy="0"/>
             </a:xfrm>
             <a:prstGeom prst="rect">
               <a:avLst/>
@@ -8241,8 +9127,8 @@
           </p:nvSpPr>
           <p:spPr>
             <a:xfrm>
-              <a:off x="8206109" y="5594903"/>
-              <a:ext cx="165951" cy="0"/>
+              <a:off x="12990346" y="8246505"/>
+              <a:ext cx="246803" cy="0"/>
             </a:xfrm>
             <a:prstGeom prst="rect">
               <a:avLst/>
@@ -8267,8 +9153,8 @@
           </p:nvSpPr>
           <p:spPr>
             <a:xfrm>
-              <a:off x="8206109" y="5594903"/>
-              <a:ext cx="165951" cy="0"/>
+              <a:off x="12990346" y="8246505"/>
+              <a:ext cx="246803" cy="0"/>
             </a:xfrm>
             <a:prstGeom prst="rect">
               <a:avLst/>
@@ -8293,8 +9179,8 @@
           </p:nvSpPr>
           <p:spPr>
             <a:xfrm>
-              <a:off x="8206109" y="5594903"/>
-              <a:ext cx="165951" cy="0"/>
+              <a:off x="12990346" y="8246505"/>
+              <a:ext cx="246803" cy="0"/>
             </a:xfrm>
             <a:prstGeom prst="rect">
               <a:avLst/>
@@ -8319,8 +9205,8 @@
           </p:nvSpPr>
           <p:spPr>
             <a:xfrm>
-              <a:off x="8206109" y="5594903"/>
-              <a:ext cx="165951" cy="0"/>
+              <a:off x="12990346" y="8246505"/>
+              <a:ext cx="246803" cy="0"/>
             </a:xfrm>
             <a:prstGeom prst="rect">
               <a:avLst/>
@@ -8345,8 +9231,8 @@
           </p:nvSpPr>
           <p:spPr>
             <a:xfrm>
-              <a:off x="8206109" y="5594903"/>
-              <a:ext cx="165951" cy="0"/>
+              <a:off x="12990346" y="8246505"/>
+              <a:ext cx="246803" cy="0"/>
             </a:xfrm>
             <a:prstGeom prst="rect">
               <a:avLst/>
@@ -8371,8 +9257,8 @@
           </p:nvSpPr>
           <p:spPr>
             <a:xfrm>
-              <a:off x="8206109" y="5594903"/>
-              <a:ext cx="165951" cy="0"/>
+              <a:off x="12990346" y="8246505"/>
+              <a:ext cx="246803" cy="0"/>
             </a:xfrm>
             <a:prstGeom prst="rect">
               <a:avLst/>
@@ -8397,8 +9283,8 @@
           </p:nvSpPr>
           <p:spPr>
             <a:xfrm>
-              <a:off x="8206109" y="5594903"/>
-              <a:ext cx="165951" cy="0"/>
+              <a:off x="12990346" y="8246505"/>
+              <a:ext cx="246803" cy="0"/>
             </a:xfrm>
             <a:prstGeom prst="rect">
               <a:avLst/>
@@ -8423,8 +9309,8 @@
           </p:nvSpPr>
           <p:spPr>
             <a:xfrm>
-              <a:off x="8206109" y="5594903"/>
-              <a:ext cx="165951" cy="0"/>
+              <a:off x="12990346" y="8246505"/>
+              <a:ext cx="246803" cy="0"/>
             </a:xfrm>
             <a:prstGeom prst="rect">
               <a:avLst/>
@@ -8449,8 +9335,8 @@
           </p:nvSpPr>
           <p:spPr>
             <a:xfrm>
-              <a:off x="8206109" y="5594903"/>
-              <a:ext cx="165951" cy="0"/>
+              <a:off x="12990346" y="8246505"/>
+              <a:ext cx="246803" cy="0"/>
             </a:xfrm>
             <a:prstGeom prst="rect">
               <a:avLst/>
@@ -8475,8 +9361,8 @@
           </p:nvSpPr>
           <p:spPr>
             <a:xfrm>
-              <a:off x="8206109" y="5594903"/>
-              <a:ext cx="165951" cy="0"/>
+              <a:off x="12990346" y="8246505"/>
+              <a:ext cx="246803" cy="0"/>
             </a:xfrm>
             <a:prstGeom prst="rect">
               <a:avLst/>
@@ -8501,8 +9387,8 @@
           </p:nvSpPr>
           <p:spPr>
             <a:xfrm>
-              <a:off x="5901233" y="5125475"/>
-              <a:ext cx="165951" cy="201183"/>
+              <a:off x="9562523" y="7626469"/>
+              <a:ext cx="246803" cy="265729"/>
             </a:xfrm>
             <a:prstGeom prst="rect">
               <a:avLst/>
@@ -8527,8 +9413,8 @@
           </p:nvSpPr>
           <p:spPr>
             <a:xfrm>
-              <a:off x="5901233" y="5058414"/>
-              <a:ext cx="165951" cy="67061"/>
+              <a:off x="9562523" y="7537893"/>
+              <a:ext cx="246803" cy="88576"/>
             </a:xfrm>
             <a:prstGeom prst="rect">
               <a:avLst/>
@@ -8553,8 +9439,8 @@
           </p:nvSpPr>
           <p:spPr>
             <a:xfrm>
-              <a:off x="5901233" y="4790169"/>
-              <a:ext cx="165951" cy="268244"/>
+              <a:off x="9562523" y="7183587"/>
+              <a:ext cx="246803" cy="354305"/>
             </a:xfrm>
             <a:prstGeom prst="rect">
               <a:avLst/>
@@ -8579,8 +9465,8 @@
           </p:nvSpPr>
           <p:spPr>
             <a:xfrm>
-              <a:off x="5901233" y="5460781"/>
-              <a:ext cx="165951" cy="0"/>
+              <a:off x="9562523" y="8069352"/>
+              <a:ext cx="246803" cy="0"/>
             </a:xfrm>
             <a:prstGeom prst="rect">
               <a:avLst/>
@@ -8605,8 +9491,8 @@
           </p:nvSpPr>
           <p:spPr>
             <a:xfrm>
-              <a:off x="5901233" y="5460781"/>
-              <a:ext cx="165951" cy="0"/>
+              <a:off x="9562523" y="8069352"/>
+              <a:ext cx="246803" cy="0"/>
             </a:xfrm>
             <a:prstGeom prst="rect">
               <a:avLst/>
@@ -8631,8 +9517,8 @@
           </p:nvSpPr>
           <p:spPr>
             <a:xfrm>
-              <a:off x="5901233" y="5326658"/>
-              <a:ext cx="165951" cy="134122"/>
+              <a:off x="9562523" y="7892199"/>
+              <a:ext cx="246803" cy="177152"/>
             </a:xfrm>
             <a:prstGeom prst="rect">
               <a:avLst/>
@@ -8657,8 +9543,8 @@
           </p:nvSpPr>
           <p:spPr>
             <a:xfrm>
-              <a:off x="5901233" y="5460781"/>
-              <a:ext cx="165951" cy="134122"/>
+              <a:off x="9562523" y="8069352"/>
+              <a:ext cx="246803" cy="177152"/>
             </a:xfrm>
             <a:prstGeom prst="rect">
               <a:avLst/>
@@ -8683,8 +9569,8 @@
           </p:nvSpPr>
           <p:spPr>
             <a:xfrm>
-              <a:off x="5901233" y="3985435"/>
-              <a:ext cx="165951" cy="804734"/>
+              <a:off x="9562523" y="6120670"/>
+              <a:ext cx="246803" cy="1062917"/>
             </a:xfrm>
             <a:prstGeom prst="rect">
               <a:avLst/>
@@ -8709,8 +9595,8 @@
           </p:nvSpPr>
           <p:spPr>
             <a:xfrm>
-              <a:off x="5901233" y="5326658"/>
-              <a:ext cx="165951" cy="0"/>
+              <a:off x="9562523" y="7892199"/>
+              <a:ext cx="246803" cy="0"/>
             </a:xfrm>
             <a:prstGeom prst="rect">
               <a:avLst/>
@@ -8735,8 +9621,8 @@
           </p:nvSpPr>
           <p:spPr>
             <a:xfrm>
-              <a:off x="5901233" y="5460781"/>
-              <a:ext cx="165951" cy="0"/>
+              <a:off x="9562523" y="8069352"/>
+              <a:ext cx="246803" cy="0"/>
             </a:xfrm>
             <a:prstGeom prst="rect">
               <a:avLst/>
@@ -8761,8 +9647,8 @@
           </p:nvSpPr>
           <p:spPr>
             <a:xfrm>
-              <a:off x="5901233" y="5460781"/>
-              <a:ext cx="165951" cy="0"/>
+              <a:off x="9562523" y="8069352"/>
+              <a:ext cx="246803" cy="0"/>
             </a:xfrm>
             <a:prstGeom prst="rect">
               <a:avLst/>
@@ -8787,8 +9673,8 @@
           </p:nvSpPr>
           <p:spPr>
             <a:xfrm>
-              <a:off x="4979282" y="4991353"/>
-              <a:ext cx="165951" cy="67061"/>
+              <a:off x="8191393" y="7449316"/>
+              <a:ext cx="246803" cy="88576"/>
             </a:xfrm>
             <a:prstGeom prst="rect">
               <a:avLst/>
@@ -8813,8 +9699,8 @@
           </p:nvSpPr>
           <p:spPr>
             <a:xfrm>
-              <a:off x="4979282" y="4991353"/>
-              <a:ext cx="165951" cy="0"/>
+              <a:off x="8191393" y="7449316"/>
+              <a:ext cx="246803" cy="0"/>
             </a:xfrm>
             <a:prstGeom prst="rect">
               <a:avLst/>
@@ -8839,8 +9725,8 @@
           </p:nvSpPr>
           <p:spPr>
             <a:xfrm>
-              <a:off x="4979282" y="4924291"/>
-              <a:ext cx="165951" cy="67061"/>
+              <a:off x="8191393" y="7360740"/>
+              <a:ext cx="246803" cy="88576"/>
             </a:xfrm>
             <a:prstGeom prst="rect">
               <a:avLst/>
@@ -8865,8 +9751,8 @@
           </p:nvSpPr>
           <p:spPr>
             <a:xfrm>
-              <a:off x="4979282" y="5192536"/>
-              <a:ext cx="165951" cy="0"/>
+              <a:off x="8191393" y="7715046"/>
+              <a:ext cx="246803" cy="0"/>
             </a:xfrm>
             <a:prstGeom prst="rect">
               <a:avLst/>
@@ -8891,8 +9777,8 @@
           </p:nvSpPr>
           <p:spPr>
             <a:xfrm>
-              <a:off x="4979282" y="5192536"/>
-              <a:ext cx="165951" cy="134122"/>
+              <a:off x="8191393" y="7715046"/>
+              <a:ext cx="246803" cy="177152"/>
             </a:xfrm>
             <a:prstGeom prst="rect">
               <a:avLst/>
@@ -8917,8 +9803,8 @@
           </p:nvSpPr>
           <p:spPr>
             <a:xfrm>
-              <a:off x="4979282" y="5125475"/>
-              <a:ext cx="165951" cy="67061"/>
+              <a:off x="8191393" y="7626469"/>
+              <a:ext cx="246803" cy="88576"/>
             </a:xfrm>
             <a:prstGeom prst="rect">
               <a:avLst/>
@@ -8943,8 +9829,8 @@
           </p:nvSpPr>
           <p:spPr>
             <a:xfrm>
-              <a:off x="4979282" y="5326658"/>
-              <a:ext cx="165951" cy="268244"/>
+              <a:off x="8191393" y="7892199"/>
+              <a:ext cx="246803" cy="354305"/>
             </a:xfrm>
             <a:prstGeom prst="rect">
               <a:avLst/>
@@ -8969,8 +9855,8 @@
           </p:nvSpPr>
           <p:spPr>
             <a:xfrm>
-              <a:off x="4979282" y="3516007"/>
-              <a:ext cx="165951" cy="1408284"/>
+              <a:off x="8191393" y="5500634"/>
+              <a:ext cx="246803" cy="1860105"/>
             </a:xfrm>
             <a:prstGeom prst="rect">
               <a:avLst/>
@@ -8995,8 +9881,8 @@
           </p:nvSpPr>
           <p:spPr>
             <a:xfrm>
-              <a:off x="4979282" y="5058414"/>
-              <a:ext cx="165951" cy="67061"/>
+              <a:off x="8191393" y="7537893"/>
+              <a:ext cx="246803" cy="88576"/>
             </a:xfrm>
             <a:prstGeom prst="rect">
               <a:avLst/>
@@ -9021,8 +9907,8 @@
           </p:nvSpPr>
           <p:spPr>
             <a:xfrm>
-              <a:off x="4979282" y="5192536"/>
-              <a:ext cx="165951" cy="0"/>
+              <a:off x="8191393" y="7715046"/>
+              <a:ext cx="246803" cy="0"/>
             </a:xfrm>
             <a:prstGeom prst="rect">
               <a:avLst/>
@@ -9047,8 +9933,8 @@
           </p:nvSpPr>
           <p:spPr>
             <a:xfrm>
-              <a:off x="4979282" y="5326658"/>
-              <a:ext cx="165951" cy="0"/>
+              <a:off x="8191393" y="7892199"/>
+              <a:ext cx="246803" cy="0"/>
             </a:xfrm>
             <a:prstGeom prst="rect">
               <a:avLst/>
@@ -9073,8 +9959,8 @@
           </p:nvSpPr>
           <p:spPr>
             <a:xfrm>
-              <a:off x="1291480" y="4387802"/>
-              <a:ext cx="165951" cy="335305"/>
+              <a:off x="2706875" y="6652128"/>
+              <a:ext cx="246803" cy="442882"/>
             </a:xfrm>
             <a:prstGeom prst="rect">
               <a:avLst/>
@@ -9099,8 +9985,8 @@
           </p:nvSpPr>
           <p:spPr>
             <a:xfrm>
-              <a:off x="1291480" y="4119557"/>
-              <a:ext cx="165951" cy="268244"/>
+              <a:off x="2706875" y="6297822"/>
+              <a:ext cx="246803" cy="354305"/>
             </a:xfrm>
             <a:prstGeom prst="rect">
               <a:avLst/>
@@ -9125,8 +10011,8 @@
           </p:nvSpPr>
           <p:spPr>
             <a:xfrm>
-              <a:off x="1291480" y="3381885"/>
-              <a:ext cx="165951" cy="737672"/>
+              <a:off x="2706875" y="5323481"/>
+              <a:ext cx="246803" cy="974341"/>
             </a:xfrm>
             <a:prstGeom prst="rect">
               <a:avLst/>
@@ -9151,8 +10037,8 @@
           </p:nvSpPr>
           <p:spPr>
             <a:xfrm>
-              <a:off x="1291480" y="4924291"/>
-              <a:ext cx="165951" cy="0"/>
+              <a:off x="2706875" y="7360740"/>
+              <a:ext cx="246803" cy="0"/>
             </a:xfrm>
             <a:prstGeom prst="rect">
               <a:avLst/>
@@ -9177,8 +10063,8 @@
           </p:nvSpPr>
           <p:spPr>
             <a:xfrm>
-              <a:off x="1291480" y="4924291"/>
-              <a:ext cx="165951" cy="67061"/>
+              <a:off x="2706875" y="7360740"/>
+              <a:ext cx="246803" cy="88576"/>
             </a:xfrm>
             <a:prstGeom prst="rect">
               <a:avLst/>
@@ -9203,8 +10089,8 @@
           </p:nvSpPr>
           <p:spPr>
             <a:xfrm>
-              <a:off x="1291480" y="4857230"/>
-              <a:ext cx="165951" cy="67061"/>
+              <a:off x="2706875" y="7272164"/>
+              <a:ext cx="246803" cy="88576"/>
             </a:xfrm>
             <a:prstGeom prst="rect">
               <a:avLst/>
@@ -9229,8 +10115,8 @@
           </p:nvSpPr>
           <p:spPr>
             <a:xfrm>
-              <a:off x="1291480" y="5058414"/>
-              <a:ext cx="165951" cy="536489"/>
+              <a:off x="2706875" y="7537893"/>
+              <a:ext cx="246803" cy="708611"/>
             </a:xfrm>
             <a:prstGeom prst="rect">
               <a:avLst/>
@@ -9255,8 +10141,8 @@
           </p:nvSpPr>
           <p:spPr>
             <a:xfrm>
-              <a:off x="1291480" y="1638294"/>
-              <a:ext cx="165951" cy="1743590"/>
+              <a:off x="2706875" y="3020493"/>
+              <a:ext cx="246803" cy="2302988"/>
             </a:xfrm>
             <a:prstGeom prst="rect">
               <a:avLst/>
@@ -9281,8 +10167,8 @@
           </p:nvSpPr>
           <p:spPr>
             <a:xfrm>
-              <a:off x="1291480" y="4723108"/>
-              <a:ext cx="165951" cy="134122"/>
+              <a:off x="2706875" y="7095011"/>
+              <a:ext cx="246803" cy="177152"/>
             </a:xfrm>
             <a:prstGeom prst="rect">
               <a:avLst/>
@@ -9307,8 +10193,8 @@
           </p:nvSpPr>
           <p:spPr>
             <a:xfrm>
-              <a:off x="1291480" y="4924291"/>
-              <a:ext cx="165951" cy="0"/>
+              <a:off x="2706875" y="7360740"/>
+              <a:ext cx="246803" cy="0"/>
             </a:xfrm>
             <a:prstGeom prst="rect">
               <a:avLst/>
@@ -9333,8 +10219,8 @@
           </p:nvSpPr>
           <p:spPr>
             <a:xfrm>
-              <a:off x="1291480" y="4991353"/>
-              <a:ext cx="165951" cy="67061"/>
+              <a:off x="2706875" y="7449316"/>
+              <a:ext cx="246803" cy="88576"/>
             </a:xfrm>
             <a:prstGeom prst="rect">
               <a:avLst/>
@@ -9359,8 +10245,8 @@
           </p:nvSpPr>
           <p:spPr>
             <a:xfrm>
-              <a:off x="4518307" y="4991353"/>
-              <a:ext cx="165951" cy="67061"/>
+              <a:off x="7505828" y="7449316"/>
+              <a:ext cx="246803" cy="88576"/>
             </a:xfrm>
             <a:prstGeom prst="rect">
               <a:avLst/>
@@ -9385,8 +10271,8 @@
           </p:nvSpPr>
           <p:spPr>
             <a:xfrm>
-              <a:off x="4518307" y="4723108"/>
-              <a:ext cx="165951" cy="268244"/>
+              <a:off x="7505828" y="7095011"/>
+              <a:ext cx="246803" cy="354305"/>
             </a:xfrm>
             <a:prstGeom prst="rect">
               <a:avLst/>
@@ -9411,8 +10297,8 @@
           </p:nvSpPr>
           <p:spPr>
             <a:xfrm>
-              <a:off x="4518307" y="4454863"/>
-              <a:ext cx="165951" cy="268244"/>
+              <a:off x="7505828" y="6740705"/>
+              <a:ext cx="246803" cy="354305"/>
             </a:xfrm>
             <a:prstGeom prst="rect">
               <a:avLst/>
@@ -9437,8 +10323,8 @@
           </p:nvSpPr>
           <p:spPr>
             <a:xfrm>
-              <a:off x="4518307" y="5259597"/>
-              <a:ext cx="165951" cy="0"/>
+              <a:off x="7505828" y="7803622"/>
+              <a:ext cx="246803" cy="0"/>
             </a:xfrm>
             <a:prstGeom prst="rect">
               <a:avLst/>
@@ -9463,8 +10349,8 @@
           </p:nvSpPr>
           <p:spPr>
             <a:xfrm>
-              <a:off x="4518307" y="5259597"/>
-              <a:ext cx="165951" cy="134122"/>
+              <a:off x="7505828" y="7803622"/>
+              <a:ext cx="246803" cy="177152"/>
             </a:xfrm>
             <a:prstGeom prst="rect">
               <a:avLst/>
@@ -9489,8 +10375,8 @@
           </p:nvSpPr>
           <p:spPr>
             <a:xfrm>
-              <a:off x="4518307" y="5192536"/>
-              <a:ext cx="165951" cy="67061"/>
+              <a:off x="7505828" y="7715046"/>
+              <a:ext cx="246803" cy="88576"/>
             </a:xfrm>
             <a:prstGeom prst="rect">
               <a:avLst/>
@@ -9515,8 +10401,8 @@
           </p:nvSpPr>
           <p:spPr>
             <a:xfrm>
-              <a:off x="4518307" y="5393720"/>
-              <a:ext cx="165951" cy="201183"/>
+              <a:off x="7505828" y="7980775"/>
+              <a:ext cx="246803" cy="265729"/>
             </a:xfrm>
             <a:prstGeom prst="rect">
               <a:avLst/>
@@ -9541,8 +10427,8 @@
           </p:nvSpPr>
           <p:spPr>
             <a:xfrm>
-              <a:off x="4518307" y="3516007"/>
-              <a:ext cx="165951" cy="938856"/>
+              <a:off x="7505828" y="5500634"/>
+              <a:ext cx="246803" cy="1240070"/>
             </a:xfrm>
             <a:prstGeom prst="rect">
               <a:avLst/>
@@ -9567,8 +10453,8 @@
           </p:nvSpPr>
           <p:spPr>
             <a:xfrm>
-              <a:off x="4518307" y="5058414"/>
-              <a:ext cx="165951" cy="134122"/>
+              <a:off x="7505828" y="7537893"/>
+              <a:ext cx="246803" cy="177152"/>
             </a:xfrm>
             <a:prstGeom prst="rect">
               <a:avLst/>
@@ -9593,8 +10479,8 @@
           </p:nvSpPr>
           <p:spPr>
             <a:xfrm>
-              <a:off x="4518307" y="5259597"/>
-              <a:ext cx="165951" cy="0"/>
+              <a:off x="7505828" y="7803622"/>
+              <a:ext cx="246803" cy="0"/>
             </a:xfrm>
             <a:prstGeom prst="rect">
               <a:avLst/>
@@ -9619,8 +10505,8 @@
           </p:nvSpPr>
           <p:spPr>
             <a:xfrm>
-              <a:off x="4518307" y="5393720"/>
-              <a:ext cx="165951" cy="0"/>
+              <a:off x="7505828" y="7980775"/>
+              <a:ext cx="246803" cy="0"/>
             </a:xfrm>
             <a:prstGeom prst="rect">
               <a:avLst/>
@@ -9645,8 +10531,8 @@
           </p:nvSpPr>
           <p:spPr>
             <a:xfrm>
-              <a:off x="5670745" y="5326658"/>
-              <a:ext cx="165951" cy="67061"/>
+              <a:off x="9219740" y="7892199"/>
+              <a:ext cx="246803" cy="88576"/>
             </a:xfrm>
             <a:prstGeom prst="rect">
               <a:avLst/>
@@ -9671,8 +10557,8 @@
           </p:nvSpPr>
           <p:spPr>
             <a:xfrm>
-              <a:off x="5670745" y="5192536"/>
-              <a:ext cx="165951" cy="134122"/>
+              <a:off x="9219740" y="7715046"/>
+              <a:ext cx="246803" cy="177152"/>
             </a:xfrm>
             <a:prstGeom prst="rect">
               <a:avLst/>
@@ -9697,8 +10583,8 @@
           </p:nvSpPr>
           <p:spPr>
             <a:xfrm>
-              <a:off x="5670745" y="5058414"/>
-              <a:ext cx="165951" cy="134122"/>
+              <a:off x="9219740" y="7537893"/>
+              <a:ext cx="246803" cy="177152"/>
             </a:xfrm>
             <a:prstGeom prst="rect">
               <a:avLst/>
@@ -9723,8 +10609,8 @@
           </p:nvSpPr>
           <p:spPr>
             <a:xfrm>
-              <a:off x="5670745" y="5393720"/>
-              <a:ext cx="165951" cy="0"/>
+              <a:off x="9219740" y="7980775"/>
+              <a:ext cx="246803" cy="0"/>
             </a:xfrm>
             <a:prstGeom prst="rect">
               <a:avLst/>
@@ -9749,8 +10635,8 @@
           </p:nvSpPr>
           <p:spPr>
             <a:xfrm>
-              <a:off x="5670745" y="5393720"/>
-              <a:ext cx="165951" cy="67061"/>
+              <a:off x="9219740" y="7980775"/>
+              <a:ext cx="246803" cy="88576"/>
             </a:xfrm>
             <a:prstGeom prst="rect">
               <a:avLst/>
@@ -9775,8 +10661,8 @@
           </p:nvSpPr>
           <p:spPr>
             <a:xfrm>
-              <a:off x="5670745" y="5393720"/>
-              <a:ext cx="165951" cy="0"/>
+              <a:off x="9219740" y="7980775"/>
+              <a:ext cx="246803" cy="0"/>
             </a:xfrm>
             <a:prstGeom prst="rect">
               <a:avLst/>
@@ -9801,8 +10687,8 @@
           </p:nvSpPr>
           <p:spPr>
             <a:xfrm>
-              <a:off x="5670745" y="5460781"/>
-              <a:ext cx="165951" cy="134122"/>
+              <a:off x="9219740" y="8069352"/>
+              <a:ext cx="246803" cy="177152"/>
             </a:xfrm>
             <a:prstGeom prst="rect">
               <a:avLst/>
@@ -9827,8 +10713,8 @@
           </p:nvSpPr>
           <p:spPr>
             <a:xfrm>
-              <a:off x="5670745" y="3918374"/>
-              <a:ext cx="165951" cy="1140039"/>
+              <a:off x="9219740" y="6032093"/>
+              <a:ext cx="246803" cy="1505799"/>
             </a:xfrm>
             <a:prstGeom prst="rect">
               <a:avLst/>
@@ -9853,8 +10739,8 @@
           </p:nvSpPr>
           <p:spPr>
             <a:xfrm>
-              <a:off x="5670745" y="5393720"/>
-              <a:ext cx="165951" cy="0"/>
+              <a:off x="9219740" y="7980775"/>
+              <a:ext cx="246803" cy="0"/>
             </a:xfrm>
             <a:prstGeom prst="rect">
               <a:avLst/>
@@ -9879,8 +10765,8 @@
           </p:nvSpPr>
           <p:spPr>
             <a:xfrm>
-              <a:off x="5670745" y="5393720"/>
-              <a:ext cx="165951" cy="0"/>
+              <a:off x="9219740" y="7980775"/>
+              <a:ext cx="246803" cy="0"/>
             </a:xfrm>
             <a:prstGeom prst="rect">
               <a:avLst/>
@@ -9905,8 +10791,8 @@
           </p:nvSpPr>
           <p:spPr>
             <a:xfrm>
-              <a:off x="5670745" y="5460781"/>
-              <a:ext cx="165951" cy="0"/>
+              <a:off x="9219740" y="8069352"/>
+              <a:ext cx="246803" cy="0"/>
             </a:xfrm>
             <a:prstGeom prst="rect">
               <a:avLst/>
@@ -9931,8 +10817,8 @@
           </p:nvSpPr>
           <p:spPr>
             <a:xfrm>
-              <a:off x="7514646" y="5192536"/>
-              <a:ext cx="165951" cy="67061"/>
+              <a:off x="11961999" y="7715046"/>
+              <a:ext cx="246803" cy="88576"/>
             </a:xfrm>
             <a:prstGeom prst="rect">
               <a:avLst/>
@@ -9957,8 +10843,8 @@
           </p:nvSpPr>
           <p:spPr>
             <a:xfrm>
-              <a:off x="7514646" y="5192536"/>
-              <a:ext cx="165951" cy="0"/>
+              <a:off x="11961999" y="7715046"/>
+              <a:ext cx="246803" cy="0"/>
             </a:xfrm>
             <a:prstGeom prst="rect">
               <a:avLst/>
@@ -9983,8 +10869,8 @@
           </p:nvSpPr>
           <p:spPr>
             <a:xfrm>
-              <a:off x="7514646" y="5125475"/>
-              <a:ext cx="165951" cy="67061"/>
+              <a:off x="11961999" y="7626469"/>
+              <a:ext cx="246803" cy="88576"/>
             </a:xfrm>
             <a:prstGeom prst="rect">
               <a:avLst/>
@@ -10009,8 +10895,8 @@
           </p:nvSpPr>
           <p:spPr>
             <a:xfrm>
-              <a:off x="7514646" y="5393720"/>
-              <a:ext cx="165951" cy="0"/>
+              <a:off x="11961999" y="7980775"/>
+              <a:ext cx="246803" cy="0"/>
             </a:xfrm>
             <a:prstGeom prst="rect">
               <a:avLst/>
@@ -10035,8 +10921,8 @@
           </p:nvSpPr>
           <p:spPr>
             <a:xfrm>
-              <a:off x="7514646" y="5460781"/>
-              <a:ext cx="165951" cy="0"/>
+              <a:off x="11961999" y="8069352"/>
+              <a:ext cx="246803" cy="0"/>
             </a:xfrm>
             <a:prstGeom prst="rect">
               <a:avLst/>
@@ -10061,8 +10947,8 @@
           </p:nvSpPr>
           <p:spPr>
             <a:xfrm>
-              <a:off x="7514646" y="5326658"/>
-              <a:ext cx="165951" cy="67061"/>
+              <a:off x="11961999" y="7892199"/>
+              <a:ext cx="246803" cy="88576"/>
             </a:xfrm>
             <a:prstGeom prst="rect">
               <a:avLst/>
@@ -10087,8 +10973,8 @@
           </p:nvSpPr>
           <p:spPr>
             <a:xfrm>
-              <a:off x="7514646" y="5460781"/>
-              <a:ext cx="165951" cy="134122"/>
+              <a:off x="11961999" y="8069352"/>
+              <a:ext cx="246803" cy="177152"/>
             </a:xfrm>
             <a:prstGeom prst="rect">
               <a:avLst/>
@@ -10113,8 +10999,8 @@
           </p:nvSpPr>
           <p:spPr>
             <a:xfrm>
-              <a:off x="7514646" y="4857230"/>
-              <a:ext cx="165951" cy="268244"/>
+              <a:off x="11961999" y="7272164"/>
+              <a:ext cx="246803" cy="354305"/>
             </a:xfrm>
             <a:prstGeom prst="rect">
               <a:avLst/>
@@ -10139,8 +11025,8 @@
           </p:nvSpPr>
           <p:spPr>
             <a:xfrm>
-              <a:off x="7514646" y="5259597"/>
-              <a:ext cx="165951" cy="67061"/>
+              <a:off x="11961999" y="7803622"/>
+              <a:ext cx="246803" cy="88576"/>
             </a:xfrm>
             <a:prstGeom prst="rect">
               <a:avLst/>
@@ -10165,8 +11051,8 @@
           </p:nvSpPr>
           <p:spPr>
             <a:xfrm>
-              <a:off x="7514646" y="5393720"/>
-              <a:ext cx="165951" cy="67061"/>
+              <a:off x="11961999" y="7980775"/>
+              <a:ext cx="246803" cy="88576"/>
             </a:xfrm>
             <a:prstGeom prst="rect">
               <a:avLst/>
@@ -10191,8 +11077,8 @@
           </p:nvSpPr>
           <p:spPr>
             <a:xfrm>
-              <a:off x="7514646" y="5460781"/>
-              <a:ext cx="165951" cy="0"/>
+              <a:off x="11961999" y="8069352"/>
+              <a:ext cx="246803" cy="0"/>
             </a:xfrm>
             <a:prstGeom prst="rect">
               <a:avLst/>
@@ -10217,8 +11103,8 @@
           </p:nvSpPr>
           <p:spPr>
             <a:xfrm>
-              <a:off x="3596357" y="4924291"/>
-              <a:ext cx="165951" cy="67061"/>
+              <a:off x="6134699" y="7360740"/>
+              <a:ext cx="246803" cy="88576"/>
             </a:xfrm>
             <a:prstGeom prst="rect">
               <a:avLst/>
@@ -10243,8 +11129,8 @@
           </p:nvSpPr>
           <p:spPr>
             <a:xfrm>
-              <a:off x="3596357" y="4790169"/>
-              <a:ext cx="165951" cy="134122"/>
+              <a:off x="6134699" y="7183587"/>
+              <a:ext cx="246803" cy="177152"/>
             </a:xfrm>
             <a:prstGeom prst="rect">
               <a:avLst/>
@@ -10269,8 +11155,8 @@
           </p:nvSpPr>
           <p:spPr>
             <a:xfrm>
-              <a:off x="3596357" y="4320741"/>
-              <a:ext cx="165951" cy="469428"/>
+              <a:off x="6134699" y="6563552"/>
+              <a:ext cx="246803" cy="620035"/>
             </a:xfrm>
             <a:prstGeom prst="rect">
               <a:avLst/>
@@ -10295,8 +11181,8 @@
           </p:nvSpPr>
           <p:spPr>
             <a:xfrm>
-              <a:off x="3596357" y="5259597"/>
-              <a:ext cx="165951" cy="0"/>
+              <a:off x="6134699" y="7803622"/>
+              <a:ext cx="246803" cy="0"/>
             </a:xfrm>
             <a:prstGeom prst="rect">
               <a:avLst/>
@@ -10321,8 +11207,8 @@
           </p:nvSpPr>
           <p:spPr>
             <a:xfrm>
-              <a:off x="3596357" y="5259597"/>
-              <a:ext cx="165951" cy="0"/>
+              <a:off x="6134699" y="7803622"/>
+              <a:ext cx="246803" cy="0"/>
             </a:xfrm>
             <a:prstGeom prst="rect">
               <a:avLst/>
@@ -10347,8 +11233,8 @@
           </p:nvSpPr>
           <p:spPr>
             <a:xfrm>
-              <a:off x="3596357" y="5125475"/>
-              <a:ext cx="165951" cy="134122"/>
+              <a:off x="6134699" y="7626469"/>
+              <a:ext cx="246803" cy="177152"/>
             </a:xfrm>
             <a:prstGeom prst="rect">
               <a:avLst/>
@@ -10373,8 +11259,8 @@
           </p:nvSpPr>
           <p:spPr>
             <a:xfrm>
-              <a:off x="3596357" y="5259597"/>
-              <a:ext cx="165951" cy="335305"/>
+              <a:off x="6134699" y="7803622"/>
+              <a:ext cx="246803" cy="442882"/>
             </a:xfrm>
             <a:prstGeom prst="rect">
               <a:avLst/>
@@ -10399,8 +11285,8 @@
           </p:nvSpPr>
           <p:spPr>
             <a:xfrm>
-              <a:off x="3596357" y="3247762"/>
-              <a:ext cx="165951" cy="1072978"/>
+              <a:off x="6134699" y="5146328"/>
+              <a:ext cx="246803" cy="1417223"/>
             </a:xfrm>
             <a:prstGeom prst="rect">
               <a:avLst/>
@@ -10425,8 +11311,8 @@
           </p:nvSpPr>
           <p:spPr>
             <a:xfrm>
-              <a:off x="3596357" y="4991353"/>
-              <a:ext cx="165951" cy="134122"/>
+              <a:off x="6134699" y="7449316"/>
+              <a:ext cx="246803" cy="177152"/>
             </a:xfrm>
             <a:prstGeom prst="rect">
               <a:avLst/>
@@ -10451,8 +11337,8 @@
           </p:nvSpPr>
           <p:spPr>
             <a:xfrm>
-              <a:off x="3596357" y="5259597"/>
-              <a:ext cx="165951" cy="0"/>
+              <a:off x="6134699" y="7803622"/>
+              <a:ext cx="246803" cy="0"/>
             </a:xfrm>
             <a:prstGeom prst="rect">
               <a:avLst/>
@@ -10477,8 +11363,8 @@
           </p:nvSpPr>
           <p:spPr>
             <a:xfrm>
-              <a:off x="3596357" y="5259597"/>
-              <a:ext cx="165951" cy="0"/>
+              <a:off x="6134699" y="7803622"/>
+              <a:ext cx="246803" cy="0"/>
             </a:xfrm>
             <a:prstGeom prst="rect">
               <a:avLst/>
@@ -10503,8 +11389,8 @@
           </p:nvSpPr>
           <p:spPr>
             <a:xfrm>
-              <a:off x="7975622" y="5527842"/>
-              <a:ext cx="165951" cy="0"/>
+              <a:off x="12647564" y="8157928"/>
+              <a:ext cx="246803" cy="0"/>
             </a:xfrm>
             <a:prstGeom prst="rect">
               <a:avLst/>
@@ -10529,8 +11415,8 @@
           </p:nvSpPr>
           <p:spPr>
             <a:xfrm>
-              <a:off x="7975622" y="5527842"/>
-              <a:ext cx="165951" cy="0"/>
+              <a:off x="12647564" y="8157928"/>
+              <a:ext cx="246803" cy="0"/>
             </a:xfrm>
             <a:prstGeom prst="rect">
               <a:avLst/>
@@ -10555,8 +11441,8 @@
           </p:nvSpPr>
           <p:spPr>
             <a:xfrm>
-              <a:off x="7975622" y="5527842"/>
-              <a:ext cx="165951" cy="0"/>
+              <a:off x="12647564" y="8157928"/>
+              <a:ext cx="246803" cy="0"/>
             </a:xfrm>
             <a:prstGeom prst="rect">
               <a:avLst/>
@@ -10581,8 +11467,8 @@
           </p:nvSpPr>
           <p:spPr>
             <a:xfrm>
-              <a:off x="7975622" y="5527842"/>
-              <a:ext cx="165951" cy="0"/>
+              <a:off x="12647564" y="8157928"/>
+              <a:ext cx="246803" cy="0"/>
             </a:xfrm>
             <a:prstGeom prst="rect">
               <a:avLst/>
@@ -10607,8 +11493,8 @@
           </p:nvSpPr>
           <p:spPr>
             <a:xfrm>
-              <a:off x="7975622" y="5527842"/>
-              <a:ext cx="165951" cy="0"/>
+              <a:off x="12647564" y="8157928"/>
+              <a:ext cx="246803" cy="0"/>
             </a:xfrm>
             <a:prstGeom prst="rect">
               <a:avLst/>
@@ -10633,8 +11519,8 @@
           </p:nvSpPr>
           <p:spPr>
             <a:xfrm>
-              <a:off x="7975622" y="5527842"/>
-              <a:ext cx="165951" cy="0"/>
+              <a:off x="12647564" y="8157928"/>
+              <a:ext cx="246803" cy="0"/>
             </a:xfrm>
             <a:prstGeom prst="rect">
               <a:avLst/>
@@ -10659,8 +11545,8 @@
           </p:nvSpPr>
           <p:spPr>
             <a:xfrm>
-              <a:off x="7975622" y="5594903"/>
-              <a:ext cx="165951" cy="0"/>
+              <a:off x="12647564" y="8246505"/>
+              <a:ext cx="246803" cy="0"/>
             </a:xfrm>
             <a:prstGeom prst="rect">
               <a:avLst/>
@@ -10685,8 +11571,8 @@
           </p:nvSpPr>
           <p:spPr>
             <a:xfrm>
-              <a:off x="7975622" y="5527842"/>
-              <a:ext cx="165951" cy="0"/>
+              <a:off x="12647564" y="8157928"/>
+              <a:ext cx="246803" cy="0"/>
             </a:xfrm>
             <a:prstGeom prst="rect">
               <a:avLst/>
@@ -10711,8 +11597,8 @@
           </p:nvSpPr>
           <p:spPr>
             <a:xfrm>
-              <a:off x="7975622" y="5527842"/>
-              <a:ext cx="165951" cy="0"/>
+              <a:off x="12647564" y="8157928"/>
+              <a:ext cx="246803" cy="0"/>
             </a:xfrm>
             <a:prstGeom prst="rect">
               <a:avLst/>
@@ -10737,8 +11623,8 @@
           </p:nvSpPr>
           <p:spPr>
             <a:xfrm>
-              <a:off x="7975622" y="5527842"/>
-              <a:ext cx="165951" cy="0"/>
+              <a:off x="12647564" y="8157928"/>
+              <a:ext cx="246803" cy="0"/>
             </a:xfrm>
             <a:prstGeom prst="rect">
               <a:avLst/>
@@ -10763,8 +11649,8 @@
           </p:nvSpPr>
           <p:spPr>
             <a:xfrm>
-              <a:off x="7975622" y="5527842"/>
-              <a:ext cx="165951" cy="67061"/>
+              <a:off x="12647564" y="8157928"/>
+              <a:ext cx="246803" cy="88576"/>
             </a:xfrm>
             <a:prstGeom prst="rect">
               <a:avLst/>
@@ -10789,8 +11675,8 @@
           </p:nvSpPr>
           <p:spPr>
             <a:xfrm>
-              <a:off x="5440258" y="4924291"/>
-              <a:ext cx="165951" cy="201183"/>
+              <a:off x="8876958" y="7360740"/>
+              <a:ext cx="246803" cy="265729"/>
             </a:xfrm>
             <a:prstGeom prst="rect">
               <a:avLst/>
@@ -10815,8 +11701,8 @@
           </p:nvSpPr>
           <p:spPr>
             <a:xfrm>
-              <a:off x="5440258" y="4857230"/>
-              <a:ext cx="165951" cy="67061"/>
+              <a:off x="8876958" y="7272164"/>
+              <a:ext cx="246803" cy="88576"/>
             </a:xfrm>
             <a:prstGeom prst="rect">
               <a:avLst/>
@@ -10841,8 +11727,8 @@
           </p:nvSpPr>
           <p:spPr>
             <a:xfrm>
-              <a:off x="5440258" y="4588986"/>
-              <a:ext cx="165951" cy="268244"/>
+              <a:off x="8876958" y="6917858"/>
+              <a:ext cx="246803" cy="354305"/>
             </a:xfrm>
             <a:prstGeom prst="rect">
               <a:avLst/>
@@ -10867,8 +11753,8 @@
           </p:nvSpPr>
           <p:spPr>
             <a:xfrm>
-              <a:off x="5440258" y="5393720"/>
-              <a:ext cx="165951" cy="0"/>
+              <a:off x="8876958" y="7980775"/>
+              <a:ext cx="246803" cy="0"/>
             </a:xfrm>
             <a:prstGeom prst="rect">
               <a:avLst/>
@@ -10893,8 +11779,8 @@
           </p:nvSpPr>
           <p:spPr>
             <a:xfrm>
-              <a:off x="5440258" y="5393720"/>
-              <a:ext cx="165951" cy="0"/>
+              <a:off x="8876958" y="7980775"/>
+              <a:ext cx="246803" cy="0"/>
             </a:xfrm>
             <a:prstGeom prst="rect">
               <a:avLst/>
@@ -10919,8 +11805,8 @@
           </p:nvSpPr>
           <p:spPr>
             <a:xfrm>
-              <a:off x="5440258" y="5326658"/>
-              <a:ext cx="165951" cy="67061"/>
+              <a:off x="8876958" y="7892199"/>
+              <a:ext cx="246803" cy="88576"/>
             </a:xfrm>
             <a:prstGeom prst="rect">
               <a:avLst/>
@@ -10945,8 +11831,8 @@
           </p:nvSpPr>
           <p:spPr>
             <a:xfrm>
-              <a:off x="5440258" y="5393720"/>
-              <a:ext cx="165951" cy="201183"/>
+              <a:off x="8876958" y="7980775"/>
+              <a:ext cx="246803" cy="265729"/>
             </a:xfrm>
             <a:prstGeom prst="rect">
               <a:avLst/>
@@ -10971,8 +11857,8 @@
           </p:nvSpPr>
           <p:spPr>
             <a:xfrm>
-              <a:off x="5440258" y="3851313"/>
-              <a:ext cx="165951" cy="737672"/>
+              <a:off x="8876958" y="5943517"/>
+              <a:ext cx="246803" cy="974341"/>
             </a:xfrm>
             <a:prstGeom prst="rect">
               <a:avLst/>
@@ -10997,8 +11883,8 @@
           </p:nvSpPr>
           <p:spPr>
             <a:xfrm>
-              <a:off x="5440258" y="5125475"/>
-              <a:ext cx="165951" cy="201183"/>
+              <a:off x="8876958" y="7626469"/>
+              <a:ext cx="246803" cy="265729"/>
             </a:xfrm>
             <a:prstGeom prst="rect">
               <a:avLst/>
@@ -11023,8 +11909,8 @@
           </p:nvSpPr>
           <p:spPr>
             <a:xfrm>
-              <a:off x="5440258" y="5393720"/>
-              <a:ext cx="165951" cy="0"/>
+              <a:off x="8876958" y="7980775"/>
+              <a:ext cx="246803" cy="0"/>
             </a:xfrm>
             <a:prstGeom prst="rect">
               <a:avLst/>
@@ -11049,8 +11935,8 @@
           </p:nvSpPr>
           <p:spPr>
             <a:xfrm>
-              <a:off x="5440258" y="5393720"/>
-              <a:ext cx="165951" cy="0"/>
+              <a:off x="8876958" y="7980775"/>
+              <a:ext cx="246803" cy="0"/>
             </a:xfrm>
             <a:prstGeom prst="rect">
               <a:avLst/>
@@ -11075,8 +11961,8 @@
           </p:nvSpPr>
           <p:spPr>
             <a:xfrm>
-              <a:off x="4057332" y="5125475"/>
-              <a:ext cx="165951" cy="201183"/>
+              <a:off x="6820264" y="7626469"/>
+              <a:ext cx="246803" cy="265729"/>
             </a:xfrm>
             <a:prstGeom prst="rect">
               <a:avLst/>
@@ -11101,8 +11987,8 @@
           </p:nvSpPr>
           <p:spPr>
             <a:xfrm>
-              <a:off x="4057332" y="4924291"/>
-              <a:ext cx="165951" cy="201183"/>
+              <a:off x="6820264" y="7360740"/>
+              <a:ext cx="246803" cy="265729"/>
             </a:xfrm>
             <a:prstGeom prst="rect">
               <a:avLst/>
@@ -11127,8 +12013,8 @@
           </p:nvSpPr>
           <p:spPr>
             <a:xfrm>
-              <a:off x="4057332" y="4454863"/>
-              <a:ext cx="165951" cy="469428"/>
+              <a:off x="6820264" y="6740705"/>
+              <a:ext cx="246803" cy="620035"/>
             </a:xfrm>
             <a:prstGeom prst="rect">
               <a:avLst/>
@@ -11153,8 +12039,8 @@
           </p:nvSpPr>
           <p:spPr>
             <a:xfrm>
-              <a:off x="4057332" y="5460781"/>
-              <a:ext cx="165951" cy="0"/>
+              <a:off x="6820264" y="8069352"/>
+              <a:ext cx="246803" cy="0"/>
             </a:xfrm>
             <a:prstGeom prst="rect">
               <a:avLst/>
@@ -11179,8 +12065,8 @@
           </p:nvSpPr>
           <p:spPr>
             <a:xfrm>
-              <a:off x="4057332" y="5460781"/>
-              <a:ext cx="165951" cy="0"/>
+              <a:off x="6820264" y="8069352"/>
+              <a:ext cx="246803" cy="0"/>
             </a:xfrm>
             <a:prstGeom prst="rect">
               <a:avLst/>
@@ -11205,8 +12091,8 @@
           </p:nvSpPr>
           <p:spPr>
             <a:xfrm>
-              <a:off x="4057332" y="5460781"/>
-              <a:ext cx="165951" cy="0"/>
+              <a:off x="6820264" y="8069352"/>
+              <a:ext cx="246803" cy="0"/>
             </a:xfrm>
             <a:prstGeom prst="rect">
               <a:avLst/>
@@ -11231,8 +12117,8 @@
           </p:nvSpPr>
           <p:spPr>
             <a:xfrm>
-              <a:off x="4057332" y="5460781"/>
-              <a:ext cx="165951" cy="134122"/>
+              <a:off x="6820264" y="8069352"/>
+              <a:ext cx="246803" cy="177152"/>
             </a:xfrm>
             <a:prstGeom prst="rect">
               <a:avLst/>
@@ -11257,8 +12143,8 @@
           </p:nvSpPr>
           <p:spPr>
             <a:xfrm>
-              <a:off x="4057332" y="3247762"/>
-              <a:ext cx="165951" cy="1207101"/>
+              <a:off x="6820264" y="5146328"/>
+              <a:ext cx="246803" cy="1594376"/>
             </a:xfrm>
             <a:prstGeom prst="rect">
               <a:avLst/>
@@ -11283,8 +12169,8 @@
           </p:nvSpPr>
           <p:spPr>
             <a:xfrm>
-              <a:off x="4057332" y="5326658"/>
-              <a:ext cx="165951" cy="134122"/>
+              <a:off x="6820264" y="7892199"/>
+              <a:ext cx="246803" cy="177152"/>
             </a:xfrm>
             <a:prstGeom prst="rect">
               <a:avLst/>
@@ -11309,8 +12195,8 @@
           </p:nvSpPr>
           <p:spPr>
             <a:xfrm>
-              <a:off x="4057332" y="5460781"/>
-              <a:ext cx="165951" cy="0"/>
+              <a:off x="6820264" y="8069352"/>
+              <a:ext cx="246803" cy="0"/>
             </a:xfrm>
             <a:prstGeom prst="rect">
               <a:avLst/>
@@ -11335,8 +12221,8 @@
           </p:nvSpPr>
           <p:spPr>
             <a:xfrm>
-              <a:off x="4057332" y="5460781"/>
-              <a:ext cx="165951" cy="0"/>
+              <a:off x="6820264" y="8069352"/>
+              <a:ext cx="246803" cy="0"/>
             </a:xfrm>
             <a:prstGeom prst="rect">
               <a:avLst/>
@@ -11361,8 +12247,8 @@
           </p:nvSpPr>
           <p:spPr>
             <a:xfrm>
-              <a:off x="600017" y="4253680"/>
-              <a:ext cx="165951" cy="134122"/>
+              <a:off x="1678528" y="6474975"/>
+              <a:ext cx="246803" cy="177152"/>
             </a:xfrm>
             <a:prstGeom prst="rect">
               <a:avLst/>
@@ -11387,8 +12273,8 @@
           </p:nvSpPr>
           <p:spPr>
             <a:xfrm>
-              <a:off x="600017" y="4052496"/>
-              <a:ext cx="165951" cy="201183"/>
+              <a:off x="1678528" y="6209246"/>
+              <a:ext cx="246803" cy="265729"/>
             </a:xfrm>
             <a:prstGeom prst="rect">
               <a:avLst/>
@@ -11413,8 +12299,8 @@
           </p:nvSpPr>
           <p:spPr>
             <a:xfrm>
-              <a:off x="600017" y="3650129"/>
-              <a:ext cx="165951" cy="402367"/>
+              <a:off x="1678528" y="5677787"/>
+              <a:ext cx="246803" cy="531458"/>
             </a:xfrm>
             <a:prstGeom prst="rect">
               <a:avLst/>
@@ -11439,8 +12325,8 @@
           </p:nvSpPr>
           <p:spPr>
             <a:xfrm>
-              <a:off x="600017" y="4588986"/>
-              <a:ext cx="165951" cy="67061"/>
+              <a:off x="1678528" y="6917858"/>
+              <a:ext cx="246803" cy="88576"/>
             </a:xfrm>
             <a:prstGeom prst="rect">
               <a:avLst/>
@@ -11465,8 +12351,8 @@
           </p:nvSpPr>
           <p:spPr>
             <a:xfrm>
-              <a:off x="600017" y="4723108"/>
-              <a:ext cx="165951" cy="268244"/>
+              <a:off x="1678528" y="7095011"/>
+              <a:ext cx="246803" cy="354305"/>
             </a:xfrm>
             <a:prstGeom prst="rect">
               <a:avLst/>
@@ -11491,8 +12377,8 @@
           </p:nvSpPr>
           <p:spPr>
             <a:xfrm>
-              <a:off x="600017" y="4588986"/>
-              <a:ext cx="165951" cy="0"/>
+              <a:off x="1678528" y="6917858"/>
+              <a:ext cx="246803" cy="0"/>
             </a:xfrm>
             <a:prstGeom prst="rect">
               <a:avLst/>
@@ -11517,8 +12403,8 @@
           </p:nvSpPr>
           <p:spPr>
             <a:xfrm>
-              <a:off x="600017" y="4991353"/>
-              <a:ext cx="165951" cy="603550"/>
+              <a:off x="1678528" y="7449316"/>
+              <a:ext cx="246803" cy="797188"/>
             </a:xfrm>
             <a:prstGeom prst="rect">
               <a:avLst/>
@@ -11543,8 +12429,8 @@
           </p:nvSpPr>
           <p:spPr>
             <a:xfrm>
-              <a:off x="600017" y="1034744"/>
-              <a:ext cx="165951" cy="2615385"/>
+              <a:off x="1678528" y="2223305"/>
+              <a:ext cx="246803" cy="3454482"/>
             </a:xfrm>
             <a:prstGeom prst="rect">
               <a:avLst/>
@@ -11569,8 +12455,8 @@
           </p:nvSpPr>
           <p:spPr>
             <a:xfrm>
-              <a:off x="600017" y="4387802"/>
-              <a:ext cx="165951" cy="201183"/>
+              <a:off x="1678528" y="6652128"/>
+              <a:ext cx="246803" cy="265729"/>
             </a:xfrm>
             <a:prstGeom prst="rect">
               <a:avLst/>
@@ -11595,8 +12481,8 @@
           </p:nvSpPr>
           <p:spPr>
             <a:xfrm>
-              <a:off x="600017" y="4656047"/>
-              <a:ext cx="165951" cy="67061"/>
+              <a:off x="1678528" y="7006434"/>
+              <a:ext cx="246803" cy="88576"/>
             </a:xfrm>
             <a:prstGeom prst="rect">
               <a:avLst/>
@@ -11621,8 +12507,8 @@
           </p:nvSpPr>
           <p:spPr>
             <a:xfrm>
-              <a:off x="600017" y="4991353"/>
-              <a:ext cx="165951" cy="0"/>
+              <a:off x="1678528" y="7449316"/>
+              <a:ext cx="246803" cy="0"/>
             </a:xfrm>
             <a:prstGeom prst="rect">
               <a:avLst/>
@@ -11647,8 +12533,8 @@
           </p:nvSpPr>
           <p:spPr>
             <a:xfrm>
-              <a:off x="830505" y="3851313"/>
-              <a:ext cx="165951" cy="134122"/>
+              <a:off x="2021310" y="5943517"/>
+              <a:ext cx="246803" cy="177152"/>
             </a:xfrm>
             <a:prstGeom prst="rect">
               <a:avLst/>
@@ -11673,8 +12559,8 @@
           </p:nvSpPr>
           <p:spPr>
             <a:xfrm>
-              <a:off x="830505" y="3516007"/>
-              <a:ext cx="165951" cy="335305"/>
+              <a:off x="2021310" y="5500634"/>
+              <a:ext cx="246803" cy="442882"/>
             </a:xfrm>
             <a:prstGeom prst="rect">
               <a:avLst/>
@@ -11699,8 +12585,8 @@
           </p:nvSpPr>
           <p:spPr>
             <a:xfrm>
-              <a:off x="830505" y="2174784"/>
-              <a:ext cx="165951" cy="1341223"/>
+              <a:off x="2021310" y="3729105"/>
+              <a:ext cx="246803" cy="1771529"/>
             </a:xfrm>
             <a:prstGeom prst="rect">
               <a:avLst/>
@@ -11725,8 +12611,8 @@
           </p:nvSpPr>
           <p:spPr>
             <a:xfrm>
-              <a:off x="830505" y="4656047"/>
-              <a:ext cx="165951" cy="134122"/>
+              <a:off x="2021310" y="7006434"/>
+              <a:ext cx="246803" cy="177152"/>
             </a:xfrm>
             <a:prstGeom prst="rect">
               <a:avLst/>
@@ -11751,8 +12637,8 @@
           </p:nvSpPr>
           <p:spPr>
             <a:xfrm>
-              <a:off x="830505" y="4857230"/>
-              <a:ext cx="165951" cy="0"/>
+              <a:off x="2021310" y="7272164"/>
+              <a:ext cx="246803" cy="0"/>
             </a:xfrm>
             <a:prstGeom prst="rect">
               <a:avLst/>
@@ -11777,8 +12663,8 @@
           </p:nvSpPr>
           <p:spPr>
             <a:xfrm>
-              <a:off x="830505" y="4186619"/>
-              <a:ext cx="165951" cy="469428"/>
+              <a:off x="2021310" y="6386399"/>
+              <a:ext cx="246803" cy="620035"/>
             </a:xfrm>
             <a:prstGeom prst="rect">
               <a:avLst/>
@@ -11803,8 +12689,8 @@
           </p:nvSpPr>
           <p:spPr>
             <a:xfrm>
-              <a:off x="830505" y="4924291"/>
-              <a:ext cx="165951" cy="670611"/>
+              <a:off x="2021310" y="7360740"/>
+              <a:ext cx="246803" cy="885764"/>
             </a:xfrm>
             <a:prstGeom prst="rect">
               <a:avLst/>
@@ -11829,8 +12715,8 @@
           </p:nvSpPr>
           <p:spPr>
             <a:xfrm>
-              <a:off x="830505" y="1370050"/>
-              <a:ext cx="165951" cy="804734"/>
+              <a:off x="2021310" y="2666188"/>
+              <a:ext cx="246803" cy="1062917"/>
             </a:xfrm>
             <a:prstGeom prst="rect">
               <a:avLst/>
@@ -11855,8 +12741,8 @@
           </p:nvSpPr>
           <p:spPr>
             <a:xfrm>
-              <a:off x="830505" y="3985435"/>
-              <a:ext cx="165951" cy="201183"/>
+              <a:off x="2021310" y="6120670"/>
+              <a:ext cx="246803" cy="265729"/>
             </a:xfrm>
             <a:prstGeom prst="rect">
               <a:avLst/>
@@ -11881,8 +12767,8 @@
           </p:nvSpPr>
           <p:spPr>
             <a:xfrm>
-              <a:off x="830505" y="4790169"/>
-              <a:ext cx="165951" cy="67061"/>
+              <a:off x="2021310" y="7183587"/>
+              <a:ext cx="246803" cy="88576"/>
             </a:xfrm>
             <a:prstGeom prst="rect">
               <a:avLst/>
@@ -11907,8 +12793,8 @@
           </p:nvSpPr>
           <p:spPr>
             <a:xfrm>
-              <a:off x="830505" y="4857230"/>
-              <a:ext cx="165951" cy="67061"/>
+              <a:off x="2021310" y="7272164"/>
+              <a:ext cx="246803" cy="88576"/>
             </a:xfrm>
             <a:prstGeom prst="rect">
               <a:avLst/>
@@ -11933,8 +12819,8 @@
           </p:nvSpPr>
           <p:spPr>
             <a:xfrm>
-              <a:off x="2213431" y="4723108"/>
-              <a:ext cx="165951" cy="67061"/>
+              <a:off x="4078005" y="7095011"/>
+              <a:ext cx="246803" cy="88576"/>
             </a:xfrm>
             <a:prstGeom prst="rect">
               <a:avLst/>
@@ -11959,8 +12845,8 @@
           </p:nvSpPr>
           <p:spPr>
             <a:xfrm>
-              <a:off x="2213431" y="4656047"/>
-              <a:ext cx="165951" cy="67061"/>
+              <a:off x="4078005" y="7006434"/>
+              <a:ext cx="246803" cy="88576"/>
             </a:xfrm>
             <a:prstGeom prst="rect">
               <a:avLst/>
@@ -11985,8 +12871,8 @@
           </p:nvSpPr>
           <p:spPr>
             <a:xfrm>
-              <a:off x="2213431" y="4186619"/>
-              <a:ext cx="165951" cy="469428"/>
+              <a:off x="4078005" y="6386399"/>
+              <a:ext cx="246803" cy="620035"/>
             </a:xfrm>
             <a:prstGeom prst="rect">
               <a:avLst/>
@@ -12011,8 +12897,8 @@
           </p:nvSpPr>
           <p:spPr>
             <a:xfrm>
-              <a:off x="2213431" y="4790169"/>
-              <a:ext cx="165951" cy="201183"/>
+              <a:off x="4078005" y="7183587"/>
+              <a:ext cx="246803" cy="265729"/>
             </a:xfrm>
             <a:prstGeom prst="rect">
               <a:avLst/>
@@ -12037,8 +12923,8 @@
           </p:nvSpPr>
           <p:spPr>
             <a:xfrm>
-              <a:off x="2213431" y="5125475"/>
-              <a:ext cx="165951" cy="0"/>
+              <a:off x="4078005" y="7626469"/>
+              <a:ext cx="246803" cy="0"/>
             </a:xfrm>
             <a:prstGeom prst="rect">
               <a:avLst/>
@@ -12063,8 +12949,8 @@
           </p:nvSpPr>
           <p:spPr>
             <a:xfrm>
-              <a:off x="2213431" y="4790169"/>
-              <a:ext cx="165951" cy="0"/>
+              <a:off x="4078005" y="7183587"/>
+              <a:ext cx="246803" cy="0"/>
             </a:xfrm>
             <a:prstGeom prst="rect">
               <a:avLst/>
@@ -12089,8 +12975,8 @@
           </p:nvSpPr>
           <p:spPr>
             <a:xfrm>
-              <a:off x="2213431" y="5259597"/>
-              <a:ext cx="165951" cy="335305"/>
+              <a:off x="4078005" y="7803622"/>
+              <a:ext cx="246803" cy="442882"/>
             </a:xfrm>
             <a:prstGeom prst="rect">
               <a:avLst/>
@@ -12115,8 +13001,8 @@
           </p:nvSpPr>
           <p:spPr>
             <a:xfrm>
-              <a:off x="2213431" y="3046579"/>
-              <a:ext cx="165951" cy="1140039"/>
+              <a:off x="4078005" y="4880599"/>
+              <a:ext cx="246803" cy="1505799"/>
             </a:xfrm>
             <a:prstGeom prst="rect">
               <a:avLst/>
@@ -12141,8 +13027,8 @@
           </p:nvSpPr>
           <p:spPr>
             <a:xfrm>
-              <a:off x="2213431" y="4790169"/>
-              <a:ext cx="165951" cy="0"/>
+              <a:off x="4078005" y="7183587"/>
+              <a:ext cx="246803" cy="0"/>
             </a:xfrm>
             <a:prstGeom prst="rect">
               <a:avLst/>
@@ -12167,8 +13053,8 @@
           </p:nvSpPr>
           <p:spPr>
             <a:xfrm>
-              <a:off x="2213431" y="4991353"/>
-              <a:ext cx="165951" cy="134122"/>
+              <a:off x="4078005" y="7449316"/>
+              <a:ext cx="246803" cy="177152"/>
             </a:xfrm>
             <a:prstGeom prst="rect">
               <a:avLst/>
@@ -12193,8 +13079,8 @@
           </p:nvSpPr>
           <p:spPr>
             <a:xfrm>
-              <a:off x="2213431" y="5125475"/>
-              <a:ext cx="165951" cy="134122"/>
+              <a:off x="4078005" y="7626469"/>
+              <a:ext cx="246803" cy="177152"/>
             </a:xfrm>
             <a:prstGeom prst="rect">
               <a:avLst/>
@@ -12219,117 +13105,117 @@
           </p:nvSpPr>
           <p:spPr>
             <a:xfrm>
-              <a:off x="682993" y="1411835"/>
-              <a:ext cx="7606091" cy="4183068"/>
+              <a:off x="1801930" y="2721379"/>
+              <a:ext cx="11311818" cy="5525125"/>
             </a:xfrm>
             <a:custGeom>
               <a:avLst/>
               <a:pathLst>
-                <a:path w="7606091" h="4183068">
+                <a:path w="11311818" h="5525125">
                   <a:moveTo>
                     <a:pt x="0" y="0"/>
                   </a:moveTo>
                   <a:lnTo>
-                    <a:pt x="230487" y="307578"/>
+                    <a:pt x="342782" y="406259"/>
                   </a:lnTo>
                   <a:lnTo>
-                    <a:pt x="460975" y="369094"/>
+                    <a:pt x="685564" y="487511"/>
                   </a:lnTo>
                   <a:lnTo>
-                    <a:pt x="691462" y="553641"/>
+                    <a:pt x="1028347" y="731266"/>
                   </a:lnTo>
                   <a:lnTo>
-                    <a:pt x="921950" y="922735"/>
+                    <a:pt x="1371129" y="1218777"/>
                   </a:lnTo>
                   <a:lnTo>
-                    <a:pt x="1152438" y="1107282"/>
+                    <a:pt x="1713911" y="1462533"/>
                   </a:lnTo>
                   <a:lnTo>
-                    <a:pt x="1382925" y="1476377"/>
+                    <a:pt x="2056694" y="1950044"/>
                   </a:lnTo>
                   <a:lnTo>
-                    <a:pt x="1613413" y="1845471"/>
+                    <a:pt x="2399476" y="2437555"/>
                   </a:lnTo>
                   <a:lnTo>
-                    <a:pt x="1843901" y="1845471"/>
+                    <a:pt x="2742258" y="2437555"/>
                   </a:lnTo>
                   <a:lnTo>
-                    <a:pt x="2074388" y="1845471"/>
+                    <a:pt x="3085041" y="2437555"/>
                   </a:lnTo>
                   <a:lnTo>
-                    <a:pt x="2304876" y="1968502"/>
+                    <a:pt x="3427823" y="2600059"/>
                   </a:lnTo>
                   <a:lnTo>
-                    <a:pt x="2535363" y="2030018"/>
+                    <a:pt x="3770606" y="2681310"/>
                   </a:lnTo>
                   <a:lnTo>
-                    <a:pt x="2765851" y="2030018"/>
+                    <a:pt x="4113388" y="2681310"/>
                   </a:lnTo>
                   <a:lnTo>
-                    <a:pt x="2996339" y="2030018"/>
+                    <a:pt x="4456170" y="2681310"/>
                   </a:lnTo>
                   <a:lnTo>
-                    <a:pt x="3226826" y="2030018"/>
+                    <a:pt x="4798953" y="2681310"/>
                   </a:lnTo>
                   <a:lnTo>
-                    <a:pt x="3457314" y="2030018"/>
+                    <a:pt x="5141735" y="2681310"/>
                   </a:lnTo>
                   <a:lnTo>
-                    <a:pt x="3687802" y="2276081"/>
+                    <a:pt x="5484517" y="3006318"/>
                   </a:lnTo>
                   <a:lnTo>
-                    <a:pt x="3918289" y="2276081"/>
+                    <a:pt x="5827300" y="3006318"/>
                   </a:lnTo>
                   <a:lnTo>
-                    <a:pt x="4148777" y="2276081"/>
+                    <a:pt x="6170082" y="3006318"/>
                   </a:lnTo>
                   <a:lnTo>
-                    <a:pt x="4379265" y="2276081"/>
+                    <a:pt x="6512865" y="3006318"/>
                   </a:lnTo>
                   <a:lnTo>
-                    <a:pt x="4609752" y="2460628"/>
+                    <a:pt x="6855647" y="3250073"/>
                   </a:lnTo>
                   <a:lnTo>
-                    <a:pt x="4840240" y="2583659"/>
+                    <a:pt x="7198429" y="3412577"/>
                   </a:lnTo>
                   <a:lnTo>
-                    <a:pt x="5070727" y="2645175"/>
+                    <a:pt x="7541212" y="3493829"/>
                   </a:lnTo>
                   <a:lnTo>
-                    <a:pt x="5301215" y="2706691"/>
+                    <a:pt x="7883994" y="3575081"/>
                   </a:lnTo>
                   <a:lnTo>
-                    <a:pt x="5531703" y="2829722"/>
+                    <a:pt x="8226776" y="3737584"/>
                   </a:lnTo>
                   <a:lnTo>
-                    <a:pt x="5762190" y="3075785"/>
+                    <a:pt x="8569559" y="4062592"/>
                   </a:lnTo>
                   <a:lnTo>
-                    <a:pt x="5992678" y="3198816"/>
+                    <a:pt x="8912341" y="4225096"/>
                   </a:lnTo>
                   <a:lnTo>
-                    <a:pt x="6223166" y="3321848"/>
+                    <a:pt x="9255124" y="4387599"/>
                   </a:lnTo>
                   <a:lnTo>
-                    <a:pt x="6453653" y="3383363"/>
+                    <a:pt x="9597906" y="4468851"/>
                   </a:lnTo>
                   <a:lnTo>
-                    <a:pt x="6684141" y="3444879"/>
+                    <a:pt x="9940688" y="4550103"/>
                   </a:lnTo>
                   <a:lnTo>
-                    <a:pt x="6914629" y="3506395"/>
+                    <a:pt x="10283471" y="4631355"/>
                   </a:lnTo>
                   <a:lnTo>
-                    <a:pt x="7145116" y="4121552"/>
+                    <a:pt x="10626253" y="5443873"/>
                   </a:lnTo>
                   <a:lnTo>
-                    <a:pt x="7375604" y="4121552"/>
+                    <a:pt x="10969035" y="5443873"/>
                   </a:lnTo>
                   <a:lnTo>
-                    <a:pt x="7606091" y="4183068"/>
+                    <a:pt x="11311818" y="5525125"/>
                   </a:lnTo>
                   <a:lnTo>
-                    <a:pt x="7606091" y="4183068"/>
+                    <a:pt x="11311818" y="5525125"/>
                   </a:lnTo>
                 </a:path>
               </a:pathLst>
@@ -12360,7 +13246,7 @@
           </p:nvSpPr>
           <p:spPr>
             <a:xfrm>
-              <a:off x="2030789" y="2853082"/>
+              <a:off x="3823494" y="4636294"/>
               <a:ext cx="70259" cy="70259"/>
             </a:xfrm>
             <a:prstGeom prst="ellipse">
@@ -12395,7 +13281,7 @@
           </p:nvSpPr>
           <p:spPr>
             <a:xfrm>
-              <a:off x="6410054" y="4452491"/>
+              <a:off x="10336359" y="6748842"/>
               <a:ext cx="70259" cy="70259"/>
             </a:xfrm>
             <a:prstGeom prst="ellipse">
@@ -12430,7 +13316,7 @@
           </p:nvSpPr>
           <p:spPr>
             <a:xfrm>
-              <a:off x="7332005" y="4821585"/>
+              <a:off x="11707489" y="7236353"/>
               <a:ext cx="70259" cy="70259"/>
             </a:xfrm>
             <a:prstGeom prst="ellipse">
@@ -12465,7 +13351,7 @@
           </p:nvSpPr>
           <p:spPr>
             <a:xfrm>
-              <a:off x="6640542" y="4575522"/>
+              <a:off x="10679142" y="6911346"/>
               <a:ext cx="70259" cy="70259"/>
             </a:xfrm>
             <a:prstGeom prst="ellipse">
@@ -12500,7 +13386,7 @@
           </p:nvSpPr>
           <p:spPr>
             <a:xfrm>
-              <a:off x="1569814" y="2299441"/>
+              <a:off x="3137930" y="3905027"/>
               <a:ext cx="70259" cy="70259"/>
             </a:xfrm>
             <a:prstGeom prst="ellipse">
@@ -12535,7 +13421,7 @@
           </p:nvSpPr>
           <p:spPr>
             <a:xfrm>
-              <a:off x="6871029" y="4698554"/>
+              <a:off x="11021924" y="7073849"/>
               <a:ext cx="70259" cy="70259"/>
             </a:xfrm>
             <a:prstGeom prst="ellipse">
@@ -12570,7 +13456,7 @@
           </p:nvSpPr>
           <p:spPr>
             <a:xfrm>
-              <a:off x="2722252" y="3222177"/>
+              <a:off x="4851842" y="5123805"/>
               <a:ext cx="70259" cy="70259"/>
             </a:xfrm>
             <a:prstGeom prst="ellipse">
@@ -12605,7 +13491,7 @@
           </p:nvSpPr>
           <p:spPr>
             <a:xfrm>
-              <a:off x="3874690" y="3406724"/>
+              <a:off x="6565753" y="5367560"/>
               <a:ext cx="70259" cy="70259"/>
             </a:xfrm>
             <a:prstGeom prst="ellipse">
@@ -12640,7 +13526,7 @@
           </p:nvSpPr>
           <p:spPr>
             <a:xfrm>
-              <a:off x="4796641" y="3652787"/>
+              <a:off x="7936883" y="5692568"/>
               <a:ext cx="70259" cy="70259"/>
             </a:xfrm>
             <a:prstGeom prst="ellipse">
@@ -12675,7 +13561,7 @@
           </p:nvSpPr>
           <p:spPr>
             <a:xfrm>
-              <a:off x="7101517" y="4760069"/>
+              <a:off x="11364707" y="7155101"/>
               <a:ext cx="70259" cy="70259"/>
             </a:xfrm>
             <a:prstGeom prst="ellipse">
@@ -12710,7 +13596,7 @@
           </p:nvSpPr>
           <p:spPr>
             <a:xfrm>
-              <a:off x="6179567" y="4206428"/>
+              <a:off x="9993577" y="6423834"/>
               <a:ext cx="70259" cy="70259"/>
             </a:xfrm>
             <a:prstGeom prst="ellipse">
@@ -12745,7 +13631,7 @@
           </p:nvSpPr>
           <p:spPr>
             <a:xfrm>
-              <a:off x="2491764" y="3222177"/>
+              <a:off x="4509059" y="5123805"/>
               <a:ext cx="70259" cy="70259"/>
             </a:xfrm>
             <a:prstGeom prst="ellipse">
@@ -12780,7 +13666,7 @@
           </p:nvSpPr>
           <p:spPr>
             <a:xfrm>
-              <a:off x="7792980" y="5498258"/>
+              <a:off x="12393054" y="8130123"/>
               <a:ext cx="70259" cy="70259"/>
             </a:xfrm>
             <a:prstGeom prst="ellipse">
@@ -12815,7 +13701,7 @@
           </p:nvSpPr>
           <p:spPr>
             <a:xfrm>
-              <a:off x="3413715" y="3406724"/>
+              <a:off x="5880189" y="5367560"/>
               <a:ext cx="70259" cy="70259"/>
             </a:xfrm>
             <a:prstGeom prst="ellipse">
@@ -12850,7 +13736,7 @@
           </p:nvSpPr>
           <p:spPr>
             <a:xfrm>
-              <a:off x="1108839" y="1745800"/>
+              <a:off x="2452365" y="3173761"/>
               <a:ext cx="70259" cy="70259"/>
             </a:xfrm>
             <a:prstGeom prst="ellipse">
@@ -12885,7 +13771,7 @@
           </p:nvSpPr>
           <p:spPr>
             <a:xfrm>
-              <a:off x="2952740" y="3345208"/>
+              <a:off x="5194624" y="5286309"/>
               <a:ext cx="70259" cy="70259"/>
             </a:xfrm>
             <a:prstGeom prst="ellipse">
@@ -12920,7 +13806,7 @@
           </p:nvSpPr>
           <p:spPr>
             <a:xfrm>
-              <a:off x="1800301" y="2483988"/>
+              <a:off x="3480712" y="4148783"/>
               <a:ext cx="70259" cy="70259"/>
             </a:xfrm>
             <a:prstGeom prst="ellipse">
@@ -12955,7 +13841,7 @@
           </p:nvSpPr>
           <p:spPr>
             <a:xfrm>
-              <a:off x="4335665" y="3652787"/>
+              <a:off x="7251318" y="5692568"/>
               <a:ext cx="70259" cy="70259"/>
             </a:xfrm>
             <a:prstGeom prst="ellipse">
@@ -12990,7 +13876,7 @@
           </p:nvSpPr>
           <p:spPr>
             <a:xfrm>
-              <a:off x="5257616" y="3837334"/>
+              <a:off x="8622448" y="5936323"/>
               <a:ext cx="70259" cy="70259"/>
             </a:xfrm>
             <a:prstGeom prst="ellipse">
@@ -13025,7 +13911,7 @@
           </p:nvSpPr>
           <p:spPr>
             <a:xfrm>
-              <a:off x="3183227" y="3406724"/>
+              <a:off x="5537406" y="5367560"/>
               <a:ext cx="70259" cy="70259"/>
             </a:xfrm>
             <a:prstGeom prst="ellipse">
@@ -13060,7 +13946,7 @@
           </p:nvSpPr>
           <p:spPr>
             <a:xfrm>
-              <a:off x="8253955" y="5559774"/>
+              <a:off x="13078618" y="8211375"/>
               <a:ext cx="70259" cy="70259"/>
             </a:xfrm>
             <a:prstGeom prst="ellipse">
@@ -13095,7 +13981,7 @@
           </p:nvSpPr>
           <p:spPr>
             <a:xfrm>
-              <a:off x="5949079" y="4083397"/>
+              <a:off x="9650795" y="6261331"/>
               <a:ext cx="70259" cy="70259"/>
             </a:xfrm>
             <a:prstGeom prst="ellipse">
@@ -13130,7 +14016,7 @@
           </p:nvSpPr>
           <p:spPr>
             <a:xfrm>
-              <a:off x="5027128" y="3652787"/>
+              <a:off x="8279665" y="5692568"/>
               <a:ext cx="70259" cy="70259"/>
             </a:xfrm>
             <a:prstGeom prst="ellipse">
@@ -13165,7 +14051,7 @@
           </p:nvSpPr>
           <p:spPr>
             <a:xfrm>
-              <a:off x="1339326" y="1930347"/>
+              <a:off x="2795147" y="3417516"/>
               <a:ext cx="70259" cy="70259"/>
             </a:xfrm>
             <a:prstGeom prst="ellipse">
@@ -13200,7 +14086,7 @@
           </p:nvSpPr>
           <p:spPr>
             <a:xfrm>
-              <a:off x="4566153" y="3652787"/>
+              <a:off x="7594100" y="5692568"/>
               <a:ext cx="70259" cy="70259"/>
             </a:xfrm>
             <a:prstGeom prst="ellipse">
@@ -13235,7 +14121,7 @@
           </p:nvSpPr>
           <p:spPr>
             <a:xfrm>
-              <a:off x="5718591" y="4021881"/>
+              <a:off x="9308012" y="6180079"/>
               <a:ext cx="70259" cy="70259"/>
             </a:xfrm>
             <a:prstGeom prst="ellipse">
@@ -13270,7 +14156,7 @@
           </p:nvSpPr>
           <p:spPr>
             <a:xfrm>
-              <a:off x="7562492" y="4883101"/>
+              <a:off x="12050271" y="7317605"/>
               <a:ext cx="70259" cy="70259"/>
             </a:xfrm>
             <a:prstGeom prst="ellipse">
@@ -13305,7 +14191,7 @@
           </p:nvSpPr>
           <p:spPr>
             <a:xfrm>
-              <a:off x="3644203" y="3406724"/>
+              <a:off x="6222971" y="5367560"/>
               <a:ext cx="70259" cy="70259"/>
             </a:xfrm>
             <a:prstGeom prst="ellipse">
@@ -13340,7 +14226,7 @@
           </p:nvSpPr>
           <p:spPr>
             <a:xfrm>
-              <a:off x="8023468" y="5498258"/>
+              <a:off x="12735836" y="8130123"/>
               <a:ext cx="70259" cy="70259"/>
             </a:xfrm>
             <a:prstGeom prst="ellipse">
@@ -13375,7 +14261,7 @@
           </p:nvSpPr>
           <p:spPr>
             <a:xfrm>
-              <a:off x="5488104" y="3960365"/>
+              <a:off x="8965230" y="6098827"/>
               <a:ext cx="70259" cy="70259"/>
             </a:xfrm>
             <a:prstGeom prst="ellipse">
@@ -13410,7 +14296,7 @@
           </p:nvSpPr>
           <p:spPr>
             <a:xfrm>
-              <a:off x="4105178" y="3406724"/>
+              <a:off x="6908536" y="5367560"/>
               <a:ext cx="70259" cy="70259"/>
             </a:xfrm>
             <a:prstGeom prst="ellipse">
@@ -13445,7 +14331,7 @@
           </p:nvSpPr>
           <p:spPr>
             <a:xfrm>
-              <a:off x="647863" y="1376705"/>
+              <a:off x="1766800" y="2686249"/>
               <a:ext cx="70259" cy="70259"/>
             </a:xfrm>
             <a:prstGeom prst="ellipse">
@@ -13480,7 +14366,7 @@
           </p:nvSpPr>
           <p:spPr>
             <a:xfrm>
-              <a:off x="878351" y="1684284"/>
+              <a:off x="2109583" y="3092509"/>
               <a:ext cx="70259" cy="70259"/>
             </a:xfrm>
             <a:prstGeom prst="ellipse">
@@ -13515,7 +14401,7 @@
           </p:nvSpPr>
           <p:spPr>
             <a:xfrm>
-              <a:off x="2261277" y="3222177"/>
+              <a:off x="4166277" y="5123805"/>
               <a:ext cx="70259" cy="70259"/>
             </a:xfrm>
             <a:prstGeom prst="ellipse">
@@ -13550,15 +14436,15 @@
           </p:nvSpPr>
           <p:spPr>
             <a:xfrm>
-              <a:off x="544700" y="1034744"/>
-              <a:ext cx="0" cy="4560159"/>
+              <a:off x="1596260" y="2223305"/>
+              <a:ext cx="0" cy="6023199"/>
             </a:xfrm>
             <a:custGeom>
               <a:avLst/>
               <a:pathLst>
-                <a:path w="0" h="4560159">
+                <a:path w="0" h="6023199">
                   <a:moveTo>
-                    <a:pt x="0" y="4560159"/>
+                    <a:pt x="0" y="6023199"/>
                   </a:moveTo>
                   <a:lnTo>
                     <a:pt x="0" y="0"/>
@@ -13590,7 +14476,7 @@
           </p:nvSpPr>
           <p:spPr>
             <a:xfrm>
-              <a:off x="388750" y="5541924"/>
+              <a:off x="1440310" y="8193526"/>
               <a:ext cx="81932" cy="105814"/>
             </a:xfrm>
             <a:prstGeom prst="rect">
@@ -13636,7 +14522,7 @@
           </p:nvSpPr>
           <p:spPr>
             <a:xfrm>
-              <a:off x="306818" y="4200341"/>
+              <a:off x="1358378" y="6421637"/>
               <a:ext cx="163864" cy="106173"/>
             </a:xfrm>
             <a:prstGeom prst="rect">
@@ -13682,7 +14568,7 @@
           </p:nvSpPr>
           <p:spPr>
             <a:xfrm>
-              <a:off x="306818" y="2859190"/>
+              <a:off x="1358378" y="4650179"/>
               <a:ext cx="163864" cy="106102"/>
             </a:xfrm>
             <a:prstGeom prst="rect">
@@ -13728,7 +14614,7 @@
           </p:nvSpPr>
           <p:spPr>
             <a:xfrm>
-              <a:off x="306818" y="1517822"/>
+              <a:off x="1358378" y="2878506"/>
               <a:ext cx="163864" cy="106245"/>
             </a:xfrm>
             <a:prstGeom prst="rect">
@@ -13774,7 +14660,7 @@
           </p:nvSpPr>
           <p:spPr>
             <a:xfrm>
-              <a:off x="503579" y="5594903"/>
+              <a:off x="1555139" y="8246505"/>
               <a:ext cx="41120" cy="0"/>
             </a:xfrm>
             <a:custGeom>
@@ -13814,7 +14700,7 @@
           </p:nvSpPr>
           <p:spPr>
             <a:xfrm>
-              <a:off x="503579" y="4253680"/>
+              <a:off x="1555139" y="6474975"/>
               <a:ext cx="41120" cy="0"/>
             </a:xfrm>
             <a:custGeom>
@@ -13854,7 +14740,7 @@
           </p:nvSpPr>
           <p:spPr>
             <a:xfrm>
-              <a:off x="503579" y="2912456"/>
+              <a:off x="1555139" y="4703446"/>
               <a:ext cx="41120" cy="0"/>
             </a:xfrm>
             <a:custGeom>
@@ -13894,7 +14780,7 @@
           </p:nvSpPr>
           <p:spPr>
             <a:xfrm>
-              <a:off x="503579" y="1571233"/>
+              <a:off x="1555139" y="2931917"/>
               <a:ext cx="41120" cy="0"/>
             </a:xfrm>
             <a:custGeom>
@@ -13934,15 +14820,15 @@
           </p:nvSpPr>
           <p:spPr>
             <a:xfrm>
-              <a:off x="8427377" y="1034744"/>
-              <a:ext cx="0" cy="4560159"/>
+              <a:off x="13319417" y="2223305"/>
+              <a:ext cx="0" cy="6023199"/>
             </a:xfrm>
             <a:custGeom>
               <a:avLst/>
               <a:pathLst>
-                <a:path w="0" h="4560159">
+                <a:path w="0" h="6023199">
                   <a:moveTo>
-                    <a:pt x="0" y="4560159"/>
+                    <a:pt x="0" y="6023199"/>
                   </a:moveTo>
                   <a:lnTo>
                     <a:pt x="0" y="0"/>
@@ -13974,7 +14860,7 @@
           </p:nvSpPr>
           <p:spPr>
             <a:xfrm>
-              <a:off x="8427377" y="5594903"/>
+              <a:off x="13319417" y="8246505"/>
               <a:ext cx="41120" cy="0"/>
             </a:xfrm>
             <a:custGeom>
@@ -14014,7 +14900,7 @@
           </p:nvSpPr>
           <p:spPr>
             <a:xfrm>
-              <a:off x="8427377" y="4292000"/>
+              <a:off x="13319417" y="6525591"/>
               <a:ext cx="41120" cy="0"/>
             </a:xfrm>
             <a:custGeom>
@@ -14054,7 +14940,7 @@
           </p:nvSpPr>
           <p:spPr>
             <a:xfrm>
-              <a:off x="8427377" y="2989098"/>
+              <a:off x="13319417" y="4804676"/>
               <a:ext cx="41120" cy="0"/>
             </a:xfrm>
             <a:custGeom>
@@ -14094,7 +14980,7 @@
           </p:nvSpPr>
           <p:spPr>
             <a:xfrm>
-              <a:off x="8427377" y="1686195"/>
+              <a:off x="13319417" y="3083762"/>
               <a:ext cx="41120" cy="0"/>
             </a:xfrm>
             <a:custGeom>
@@ -14134,7 +15020,7 @@
           </p:nvSpPr>
           <p:spPr>
             <a:xfrm>
-              <a:off x="8501395" y="5541924"/>
+              <a:off x="13393435" y="8193526"/>
               <a:ext cx="335786" cy="105814"/>
             </a:xfrm>
             <a:prstGeom prst="rect">
@@ -14180,7 +15066,7 @@
           </p:nvSpPr>
           <p:spPr>
             <a:xfrm>
-              <a:off x="8501395" y="4238662"/>
+              <a:off x="13393435" y="6472252"/>
               <a:ext cx="335786" cy="106173"/>
             </a:xfrm>
             <a:prstGeom prst="rect">
@@ -14226,7 +15112,7 @@
           </p:nvSpPr>
           <p:spPr>
             <a:xfrm>
-              <a:off x="8501395" y="2935831"/>
+              <a:off x="13393435" y="4751410"/>
               <a:ext cx="335786" cy="106102"/>
             </a:xfrm>
             <a:prstGeom prst="rect">
@@ -14272,7 +15158,7 @@
           </p:nvSpPr>
           <p:spPr>
             <a:xfrm>
-              <a:off x="8501395" y="1632784"/>
+              <a:off x="13393435" y="3030352"/>
               <a:ext cx="335786" cy="106245"/>
             </a:xfrm>
             <a:prstGeom prst="rect">
@@ -14318,18 +15204,18 @@
           </p:nvSpPr>
           <p:spPr>
             <a:xfrm>
-              <a:off x="544700" y="5594903"/>
-              <a:ext cx="7882677" cy="0"/>
+              <a:off x="1596260" y="8246505"/>
+              <a:ext cx="11723157" cy="0"/>
             </a:xfrm>
             <a:custGeom>
               <a:avLst/>
               <a:pathLst>
-                <a:path w="7882677" h="0">
+                <a:path w="11723157" h="0">
                   <a:moveTo>
                     <a:pt x="0" y="0"/>
                   </a:moveTo>
                   <a:lnTo>
-                    <a:pt x="7882677" y="0"/>
+                    <a:pt x="11723157" y="0"/>
                   </a:lnTo>
                 </a:path>
               </a:pathLst>
@@ -14358,7 +15244,7 @@
           </p:nvSpPr>
           <p:spPr>
             <a:xfrm>
-              <a:off x="682993" y="5594903"/>
+              <a:off x="1801930" y="8246505"/>
               <a:ext cx="0" cy="41120"/>
             </a:xfrm>
             <a:custGeom>
@@ -14398,7 +15284,7 @@
           </p:nvSpPr>
           <p:spPr>
             <a:xfrm>
-              <a:off x="913481" y="5594903"/>
+              <a:off x="2144712" y="8246505"/>
               <a:ext cx="0" cy="41120"/>
             </a:xfrm>
             <a:custGeom>
@@ -14438,7 +15324,7 @@
           </p:nvSpPr>
           <p:spPr>
             <a:xfrm>
-              <a:off x="1143968" y="5594903"/>
+              <a:off x="2487494" y="8246505"/>
               <a:ext cx="0" cy="41120"/>
             </a:xfrm>
             <a:custGeom>
@@ -14478,7 +15364,7 @@
           </p:nvSpPr>
           <p:spPr>
             <a:xfrm>
-              <a:off x="1374456" y="5594903"/>
+              <a:off x="2830277" y="8246505"/>
               <a:ext cx="0" cy="41120"/>
             </a:xfrm>
             <a:custGeom>
@@ -14518,7 +15404,7 @@
           </p:nvSpPr>
           <p:spPr>
             <a:xfrm>
-              <a:off x="1604943" y="5594903"/>
+              <a:off x="3173059" y="8246505"/>
               <a:ext cx="0" cy="41120"/>
             </a:xfrm>
             <a:custGeom>
@@ -14558,7 +15444,7 @@
           </p:nvSpPr>
           <p:spPr>
             <a:xfrm>
-              <a:off x="1835431" y="5594903"/>
+              <a:off x="3515842" y="8246505"/>
               <a:ext cx="0" cy="41120"/>
             </a:xfrm>
             <a:custGeom>
@@ -14598,7 +15484,7 @@
           </p:nvSpPr>
           <p:spPr>
             <a:xfrm>
-              <a:off x="2065919" y="5594903"/>
+              <a:off x="3858624" y="8246505"/>
               <a:ext cx="0" cy="41120"/>
             </a:xfrm>
             <a:custGeom>
@@ -14638,7 +15524,7 @@
           </p:nvSpPr>
           <p:spPr>
             <a:xfrm>
-              <a:off x="2296406" y="5594903"/>
+              <a:off x="4201406" y="8246505"/>
               <a:ext cx="0" cy="41120"/>
             </a:xfrm>
             <a:custGeom>
@@ -14678,7 +15564,7 @@
           </p:nvSpPr>
           <p:spPr>
             <a:xfrm>
-              <a:off x="2526894" y="5594903"/>
+              <a:off x="4544189" y="8246505"/>
               <a:ext cx="0" cy="41120"/>
             </a:xfrm>
             <a:custGeom>
@@ -14718,7 +15604,7 @@
           </p:nvSpPr>
           <p:spPr>
             <a:xfrm>
-              <a:off x="2757382" y="5594903"/>
+              <a:off x="4886971" y="8246505"/>
               <a:ext cx="0" cy="41120"/>
             </a:xfrm>
             <a:custGeom>
@@ -14758,7 +15644,7 @@
           </p:nvSpPr>
           <p:spPr>
             <a:xfrm>
-              <a:off x="2987869" y="5594903"/>
+              <a:off x="5229753" y="8246505"/>
               <a:ext cx="0" cy="41120"/>
             </a:xfrm>
             <a:custGeom>
@@ -14798,7 +15684,7 @@
           </p:nvSpPr>
           <p:spPr>
             <a:xfrm>
-              <a:off x="3218357" y="5594903"/>
+              <a:off x="5572536" y="8246505"/>
               <a:ext cx="0" cy="41120"/>
             </a:xfrm>
             <a:custGeom>
@@ -14838,7 +15724,7 @@
           </p:nvSpPr>
           <p:spPr>
             <a:xfrm>
-              <a:off x="3448844" y="5594903"/>
+              <a:off x="5915318" y="8246505"/>
               <a:ext cx="0" cy="41120"/>
             </a:xfrm>
             <a:custGeom>
@@ -14878,7 +15764,7 @@
           </p:nvSpPr>
           <p:spPr>
             <a:xfrm>
-              <a:off x="3679332" y="5594903"/>
+              <a:off x="6258101" y="8246505"/>
               <a:ext cx="0" cy="41120"/>
             </a:xfrm>
             <a:custGeom>
@@ -14918,7 +15804,7 @@
           </p:nvSpPr>
           <p:spPr>
             <a:xfrm>
-              <a:off x="3909820" y="5594903"/>
+              <a:off x="6600883" y="8246505"/>
               <a:ext cx="0" cy="41120"/>
             </a:xfrm>
             <a:custGeom>
@@ -14958,7 +15844,7 @@
           </p:nvSpPr>
           <p:spPr>
             <a:xfrm>
-              <a:off x="4140307" y="5594903"/>
+              <a:off x="6943665" y="8246505"/>
               <a:ext cx="0" cy="41120"/>
             </a:xfrm>
             <a:custGeom>
@@ -14998,7 +15884,7 @@
           </p:nvSpPr>
           <p:spPr>
             <a:xfrm>
-              <a:off x="4370795" y="5594903"/>
+              <a:off x="7286448" y="8246505"/>
               <a:ext cx="0" cy="41120"/>
             </a:xfrm>
             <a:custGeom>
@@ -15038,7 +15924,7 @@
           </p:nvSpPr>
           <p:spPr>
             <a:xfrm>
-              <a:off x="4601283" y="5594903"/>
+              <a:off x="7629230" y="8246505"/>
               <a:ext cx="0" cy="41120"/>
             </a:xfrm>
             <a:custGeom>
@@ -15078,7 +15964,7 @@
           </p:nvSpPr>
           <p:spPr>
             <a:xfrm>
-              <a:off x="4831770" y="5594903"/>
+              <a:off x="7972012" y="8246505"/>
               <a:ext cx="0" cy="41120"/>
             </a:xfrm>
             <a:custGeom>
@@ -15118,7 +16004,7 @@
           </p:nvSpPr>
           <p:spPr>
             <a:xfrm>
-              <a:off x="5062258" y="5594903"/>
+              <a:off x="8314795" y="8246505"/>
               <a:ext cx="0" cy="41120"/>
             </a:xfrm>
             <a:custGeom>
@@ -15158,7 +16044,7 @@
           </p:nvSpPr>
           <p:spPr>
             <a:xfrm>
-              <a:off x="5292746" y="5594903"/>
+              <a:off x="8657577" y="8246505"/>
               <a:ext cx="0" cy="41120"/>
             </a:xfrm>
             <a:custGeom>
@@ -15198,7 +16084,7 @@
           </p:nvSpPr>
           <p:spPr>
             <a:xfrm>
-              <a:off x="5523233" y="5594903"/>
+              <a:off x="9000360" y="8246505"/>
               <a:ext cx="0" cy="41120"/>
             </a:xfrm>
             <a:custGeom>
@@ -15238,7 +16124,7 @@
           </p:nvSpPr>
           <p:spPr>
             <a:xfrm>
-              <a:off x="5753721" y="5594903"/>
+              <a:off x="9343142" y="8246505"/>
               <a:ext cx="0" cy="41120"/>
             </a:xfrm>
             <a:custGeom>
@@ -15278,7 +16164,7 @@
           </p:nvSpPr>
           <p:spPr>
             <a:xfrm>
-              <a:off x="5984208" y="5594903"/>
+              <a:off x="9685924" y="8246505"/>
               <a:ext cx="0" cy="41120"/>
             </a:xfrm>
             <a:custGeom>
@@ -15318,7 +16204,7 @@
           </p:nvSpPr>
           <p:spPr>
             <a:xfrm>
-              <a:off x="6214696" y="5594903"/>
+              <a:off x="10028707" y="8246505"/>
               <a:ext cx="0" cy="41120"/>
             </a:xfrm>
             <a:custGeom>
@@ -15358,7 +16244,7 @@
           </p:nvSpPr>
           <p:spPr>
             <a:xfrm>
-              <a:off x="6445184" y="5594903"/>
+              <a:off x="10371489" y="8246505"/>
               <a:ext cx="0" cy="41120"/>
             </a:xfrm>
             <a:custGeom>
@@ -15398,7 +16284,7 @@
           </p:nvSpPr>
           <p:spPr>
             <a:xfrm>
-              <a:off x="6675671" y="5594903"/>
+              <a:off x="10714271" y="8246505"/>
               <a:ext cx="0" cy="41120"/>
             </a:xfrm>
             <a:custGeom>
@@ -15438,7 +16324,7 @@
           </p:nvSpPr>
           <p:spPr>
             <a:xfrm>
-              <a:off x="6906159" y="5594903"/>
+              <a:off x="11057054" y="8246505"/>
               <a:ext cx="0" cy="41120"/>
             </a:xfrm>
             <a:custGeom>
@@ -15478,7 +16364,7 @@
           </p:nvSpPr>
           <p:spPr>
             <a:xfrm>
-              <a:off x="7136647" y="5594903"/>
+              <a:off x="11399836" y="8246505"/>
               <a:ext cx="0" cy="41120"/>
             </a:xfrm>
             <a:custGeom>
@@ -15518,7 +16404,7 @@
           </p:nvSpPr>
           <p:spPr>
             <a:xfrm>
-              <a:off x="7367134" y="5594903"/>
+              <a:off x="11742619" y="8246505"/>
               <a:ext cx="0" cy="41120"/>
             </a:xfrm>
             <a:custGeom>
@@ -15558,7 +16444,7 @@
           </p:nvSpPr>
           <p:spPr>
             <a:xfrm>
-              <a:off x="7597622" y="5594903"/>
+              <a:off x="12085401" y="8246505"/>
               <a:ext cx="0" cy="41120"/>
             </a:xfrm>
             <a:custGeom>
@@ -15598,7 +16484,7 @@
           </p:nvSpPr>
           <p:spPr>
             <a:xfrm>
-              <a:off x="7828110" y="5594903"/>
+              <a:off x="12428183" y="8246505"/>
               <a:ext cx="0" cy="41120"/>
             </a:xfrm>
             <a:custGeom>
@@ -15638,7 +16524,7 @@
           </p:nvSpPr>
           <p:spPr>
             <a:xfrm>
-              <a:off x="8058597" y="5594903"/>
+              <a:off x="12770966" y="8246505"/>
               <a:ext cx="0" cy="41120"/>
             </a:xfrm>
             <a:custGeom>
@@ -15678,7 +16564,7 @@
           </p:nvSpPr>
           <p:spPr>
             <a:xfrm>
-              <a:off x="8289085" y="5594903"/>
+              <a:off x="13113748" y="8246505"/>
               <a:ext cx="0" cy="41120"/>
             </a:xfrm>
             <a:custGeom>
@@ -15718,7 +16604,7 @@
           </p:nvSpPr>
           <p:spPr>
             <a:xfrm rot="-5400000">
-              <a:off x="445640" y="5822325"/>
+              <a:off x="1564577" y="8473927"/>
               <a:ext cx="442681" cy="135872"/>
             </a:xfrm>
             <a:prstGeom prst="rect">
@@ -15764,7 +16650,7 @@
           </p:nvSpPr>
           <p:spPr>
             <a:xfrm rot="-5400000">
-              <a:off x="662625" y="5865307"/>
+              <a:off x="1893857" y="8516908"/>
               <a:ext cx="499165" cy="106393"/>
             </a:xfrm>
             <a:prstGeom prst="rect">
@@ -15810,7 +16696,7 @@
           </p:nvSpPr>
           <p:spPr>
             <a:xfrm rot="-5400000">
-              <a:off x="929378" y="5829041"/>
+              <a:off x="2272905" y="8480643"/>
               <a:ext cx="426634" cy="106393"/>
             </a:xfrm>
             <a:prstGeom prst="rect">
@@ -15856,7 +16742,7 @@
           </p:nvSpPr>
           <p:spPr>
             <a:xfrm rot="-5400000">
-              <a:off x="1109921" y="5875663"/>
+              <a:off x="2565742" y="8527265"/>
               <a:ext cx="523201" cy="109716"/>
             </a:xfrm>
             <a:prstGeom prst="rect">
@@ -15902,7 +16788,7 @@
           </p:nvSpPr>
           <p:spPr>
             <a:xfrm rot="-5400000">
-              <a:off x="1388798" y="5827415"/>
+              <a:off x="2956914" y="8479017"/>
               <a:ext cx="426563" cy="109574"/>
             </a:xfrm>
             <a:prstGeom prst="rect">
@@ -15948,7 +16834,7 @@
           </p:nvSpPr>
           <p:spPr>
             <a:xfrm rot="-5400000">
-              <a:off x="1569907" y="5850496"/>
+              <a:off x="3250317" y="8502098"/>
               <a:ext cx="499024" cy="135872"/>
             </a:xfrm>
             <a:prstGeom prst="rect">
@@ -15994,7 +16880,7 @@
           </p:nvSpPr>
           <p:spPr>
             <a:xfrm rot="-5400000">
-              <a:off x="1879571" y="5800940"/>
+              <a:off x="3672276" y="8452542"/>
               <a:ext cx="370291" cy="106252"/>
             </a:xfrm>
             <a:prstGeom prst="rect">
@@ -16040,7 +16926,7 @@
           </p:nvSpPr>
           <p:spPr>
             <a:xfrm rot="-5400000">
-              <a:off x="2002534" y="5878491"/>
+              <a:off x="3907534" y="8530093"/>
               <a:ext cx="555367" cy="136226"/>
             </a:xfrm>
             <a:prstGeom prst="rect">
@@ -16086,7 +16972,7 @@
           </p:nvSpPr>
           <p:spPr>
             <a:xfrm rot="-5400000">
-              <a:off x="2312234" y="5828970"/>
+              <a:off x="4329528" y="8480572"/>
               <a:ext cx="426634" cy="106534"/>
             </a:xfrm>
             <a:prstGeom prst="rect">
@@ -16132,7 +17018,7 @@
           </p:nvSpPr>
           <p:spPr>
             <a:xfrm rot="-5400000">
-              <a:off x="2470331" y="5869195"/>
+              <a:off x="4599921" y="8520796"/>
               <a:ext cx="539248" cy="138700"/>
             </a:xfrm>
             <a:prstGeom prst="rect">
@@ -16178,7 +17064,7 @@
           </p:nvSpPr>
           <p:spPr>
             <a:xfrm rot="-5400000">
-              <a:off x="2601636" y="5971205"/>
+              <a:off x="4843520" y="8622807"/>
               <a:ext cx="740442" cy="135872"/>
             </a:xfrm>
             <a:prstGeom prst="rect">
@@ -16224,7 +17110,7 @@
           </p:nvSpPr>
           <p:spPr>
             <a:xfrm rot="-5400000">
-              <a:off x="2928620" y="5874709"/>
+              <a:off x="5282799" y="8526310"/>
               <a:ext cx="547449" cy="135872"/>
             </a:xfrm>
             <a:prstGeom prst="rect">
@@ -16270,7 +17156,7 @@
           </p:nvSpPr>
           <p:spPr>
             <a:xfrm rot="-5400000">
-              <a:off x="3258185" y="5804617"/>
+              <a:off x="5724658" y="8456218"/>
               <a:ext cx="378280" cy="106888"/>
             </a:xfrm>
             <a:prstGeom prst="rect">
@@ -16316,7 +17202,7 @@
           </p:nvSpPr>
           <p:spPr>
             <a:xfrm rot="-5400000">
-              <a:off x="3414798" y="5875663"/>
+              <a:off x="5993566" y="8527265"/>
               <a:ext cx="523201" cy="109716"/>
             </a:xfrm>
             <a:prstGeom prst="rect">
@@ -16362,7 +17248,7 @@
           </p:nvSpPr>
           <p:spPr>
             <a:xfrm rot="-5400000">
-              <a:off x="3637403" y="5883828"/>
+              <a:off x="6328466" y="8535430"/>
               <a:ext cx="539248" cy="109433"/>
             </a:xfrm>
             <a:prstGeom prst="rect">
@@ -16408,7 +17294,7 @@
           </p:nvSpPr>
           <p:spPr>
             <a:xfrm rot="-5400000">
-              <a:off x="3866724" y="5858556"/>
+              <a:off x="6670082" y="8510157"/>
               <a:ext cx="515142" cy="135872"/>
             </a:xfrm>
             <a:prstGeom prst="rect">
@@ -16454,7 +17340,7 @@
           </p:nvSpPr>
           <p:spPr>
             <a:xfrm rot="-5400000">
-              <a:off x="4129448" y="5826319"/>
+              <a:off x="7045101" y="8477921"/>
               <a:ext cx="450670" cy="135872"/>
             </a:xfrm>
             <a:prstGeom prst="rect">
@@ -16500,7 +17386,7 @@
           </p:nvSpPr>
           <p:spPr>
             <a:xfrm rot="-5400000">
-              <a:off x="4253754" y="5929673"/>
+              <a:off x="7281701" y="8581275"/>
               <a:ext cx="660205" cy="138700"/>
             </a:xfrm>
             <a:prstGeom prst="rect">
@@ -16546,7 +17432,7 @@
           </p:nvSpPr>
           <p:spPr>
             <a:xfrm rot="-5400000">
-              <a:off x="4601098" y="5845124"/>
+              <a:off x="7741340" y="8496725"/>
               <a:ext cx="458799" cy="106393"/>
             </a:xfrm>
             <a:prstGeom prst="rect">
@@ -16592,7 +17478,7 @@
           </p:nvSpPr>
           <p:spPr>
             <a:xfrm rot="-5400000">
-              <a:off x="4795320" y="5849083"/>
+              <a:off x="8047857" y="8500684"/>
               <a:ext cx="499024" cy="138700"/>
             </a:xfrm>
             <a:prstGeom prst="rect">
@@ -16638,7 +17524,7 @@
           </p:nvSpPr>
           <p:spPr>
             <a:xfrm rot="-5400000">
-              <a:off x="5166664" y="5740321"/>
+              <a:off x="8531496" y="8391922"/>
               <a:ext cx="249406" cy="106605"/>
             </a:xfrm>
             <a:prstGeom prst="rect">
@@ -16684,7 +17570,7 @@
           </p:nvSpPr>
           <p:spPr>
             <a:xfrm rot="-5400000">
-              <a:off x="5294717" y="5814973"/>
+              <a:off x="8771843" y="8466575"/>
               <a:ext cx="426493" cy="134388"/>
             </a:xfrm>
             <a:prstGeom prst="rect">
@@ -16730,7 +17616,7 @@
           </p:nvSpPr>
           <p:spPr>
             <a:xfrm rot="-5400000">
-              <a:off x="5430369" y="5905496"/>
+              <a:off x="9019790" y="8557097"/>
               <a:ext cx="611851" cy="138700"/>
             </a:xfrm>
             <a:prstGeom prst="rect">
@@ -16776,7 +17662,7 @@
           </p:nvSpPr>
           <p:spPr>
             <a:xfrm rot="-5400000">
-              <a:off x="5726779" y="5842402"/>
+              <a:off x="9428494" y="8494004"/>
               <a:ext cx="482835" cy="135872"/>
             </a:xfrm>
             <a:prstGeom prst="rect">
@@ -16822,7 +17708,7 @@
           </p:nvSpPr>
           <p:spPr>
             <a:xfrm rot="-5400000">
-              <a:off x="5800256" y="5999412"/>
+              <a:off x="9614267" y="8651014"/>
               <a:ext cx="796855" cy="135872"/>
             </a:xfrm>
             <a:prstGeom prst="rect">
@@ -16868,7 +17754,7 @@
           </p:nvSpPr>
           <p:spPr>
             <a:xfrm rot="-5400000">
-              <a:off x="6211860" y="5818296"/>
+              <a:off x="10138166" y="8469897"/>
               <a:ext cx="434622" cy="135872"/>
             </a:xfrm>
             <a:prstGeom prst="rect">
@@ -16914,7 +17800,7 @@
           </p:nvSpPr>
           <p:spPr>
             <a:xfrm rot="-5400000">
-              <a:off x="6463238" y="5798890"/>
+              <a:off x="10501838" y="8450492"/>
               <a:ext cx="394327" cy="134388"/>
             </a:xfrm>
             <a:prstGeom prst="rect">
@@ -16960,7 +17846,7 @@
           </p:nvSpPr>
           <p:spPr>
             <a:xfrm rot="-5400000">
-              <a:off x="6510347" y="5977957"/>
+              <a:off x="10661242" y="8629558"/>
               <a:ext cx="756772" cy="138700"/>
             </a:xfrm>
             <a:prstGeom prst="rect">
@@ -17006,7 +17892,7 @@
           </p:nvSpPr>
           <p:spPr>
             <a:xfrm rot="-5400000">
-              <a:off x="6945987" y="5804617"/>
+              <a:off x="11209176" y="8456218"/>
               <a:ext cx="378280" cy="106888"/>
             </a:xfrm>
             <a:prstGeom prst="rect">
@@ -17052,7 +17938,7 @@
           </p:nvSpPr>
           <p:spPr>
             <a:xfrm rot="-5400000">
-              <a:off x="6999529" y="5949750"/>
+              <a:off x="11375013" y="8601351"/>
               <a:ext cx="700359" cy="138700"/>
             </a:xfrm>
             <a:prstGeom prst="rect">
@@ -17098,7 +17984,7 @@
           </p:nvSpPr>
           <p:spPr>
             <a:xfrm rot="-5400000">
-              <a:off x="7373347" y="5835403"/>
+              <a:off x="11861126" y="8487005"/>
               <a:ext cx="442681" cy="109716"/>
             </a:xfrm>
             <a:prstGeom prst="rect">
@@ -17144,7 +18030,7 @@
           </p:nvSpPr>
           <p:spPr>
             <a:xfrm rot="-5400000">
-              <a:off x="7449865" y="5963217"/>
+              <a:off x="12049938" y="8614819"/>
               <a:ext cx="724465" cy="135872"/>
             </a:xfrm>
             <a:prstGeom prst="rect">
@@ -17190,7 +18076,7 @@
           </p:nvSpPr>
           <p:spPr>
             <a:xfrm rot="-5400000">
-              <a:off x="7823966" y="5849083"/>
+              <a:off x="12536334" y="8500684"/>
               <a:ext cx="466717" cy="106393"/>
             </a:xfrm>
             <a:prstGeom prst="rect">
@@ -17236,7 +18122,7 @@
           </p:nvSpPr>
           <p:spPr>
             <a:xfrm rot="-5400000">
-              <a:off x="8070536" y="5833000"/>
+              <a:off x="12895199" y="8484601"/>
               <a:ext cx="434552" cy="106393"/>
             </a:xfrm>
             <a:prstGeom prst="rect">
@@ -17282,7 +18168,7 @@
           </p:nvSpPr>
           <p:spPr>
             <a:xfrm>
-              <a:off x="4145103" y="6588964"/>
+              <a:off x="7116903" y="9240566"/>
               <a:ext cx="681870" cy="129048"/>
             </a:xfrm>
             <a:prstGeom prst="rect">
@@ -17328,7 +18214,7 @@
           </p:nvSpPr>
           <p:spPr>
             <a:xfrm rot="-5400000">
-              <a:off x="-749321" y="3249315"/>
+              <a:off x="302238" y="5169396"/>
               <a:ext cx="1821488" cy="131017"/>
             </a:xfrm>
             <a:prstGeom prst="rect">
@@ -17374,7 +18260,7 @@
           </p:nvSpPr>
           <p:spPr>
             <a:xfrm rot="5400000">
-              <a:off x="8551101" y="3232585"/>
+              <a:off x="13443141" y="5152666"/>
               <a:ext cx="896410" cy="164477"/>
             </a:xfrm>
             <a:prstGeom prst="rect">
@@ -17420,7 +18306,7 @@
           </p:nvSpPr>
           <p:spPr>
             <a:xfrm>
-              <a:off x="774180" y="126525"/>
+              <a:off x="3745980" y="1315087"/>
               <a:ext cx="7423718" cy="743735"/>
             </a:xfrm>
             <a:prstGeom prst="rect">
@@ -17446,8 +18332,8 @@
           </p:nvSpPr>
           <p:spPr>
             <a:xfrm>
-              <a:off x="856421" y="208767"/>
-              <a:ext cx="306000" cy="138256"/>
+              <a:off x="3828221" y="1397328"/>
+              <a:ext cx="305999" cy="138256"/>
             </a:xfrm>
             <a:prstGeom prst="rect">
               <a:avLst/>
@@ -17472,7 +18358,7 @@
           </p:nvSpPr>
           <p:spPr>
             <a:xfrm>
-              <a:off x="867058" y="219403"/>
+              <a:off x="3838858" y="1407964"/>
               <a:ext cx="284727" cy="116983"/>
             </a:xfrm>
             <a:prstGeom prst="rect">
@@ -17498,8 +18384,8 @@
           </p:nvSpPr>
           <p:spPr>
             <a:xfrm>
-              <a:off x="2685802" y="208767"/>
-              <a:ext cx="306000" cy="138256"/>
+              <a:off x="5657602" y="1397328"/>
+              <a:ext cx="305999" cy="138256"/>
             </a:xfrm>
             <a:prstGeom prst="rect">
               <a:avLst/>
@@ -17524,7 +18410,7 @@
           </p:nvSpPr>
           <p:spPr>
             <a:xfrm>
-              <a:off x="2696438" y="219403"/>
+              <a:off x="5668238" y="1407964"/>
               <a:ext cx="284727" cy="116983"/>
             </a:xfrm>
             <a:prstGeom prst="rect">
@@ -17550,7 +18436,7 @@
           </p:nvSpPr>
           <p:spPr>
             <a:xfrm>
-              <a:off x="4596827" y="208767"/>
+              <a:off x="7568627" y="1397328"/>
               <a:ext cx="305999" cy="138256"/>
             </a:xfrm>
             <a:prstGeom prst="rect">
@@ -17576,7 +18462,7 @@
           </p:nvSpPr>
           <p:spPr>
             <a:xfrm>
-              <a:off x="4607464" y="219403"/>
+              <a:off x="7579264" y="1407964"/>
               <a:ext cx="284727" cy="116983"/>
             </a:xfrm>
             <a:prstGeom prst="rect">
@@ -17602,8 +18488,8 @@
           </p:nvSpPr>
           <p:spPr>
             <a:xfrm>
-              <a:off x="6368733" y="208767"/>
-              <a:ext cx="306000" cy="138256"/>
+              <a:off x="9340533" y="1397328"/>
+              <a:ext cx="305999" cy="138256"/>
             </a:xfrm>
             <a:prstGeom prst="rect">
               <a:avLst/>
@@ -17628,7 +18514,7 @@
           </p:nvSpPr>
           <p:spPr>
             <a:xfrm>
-              <a:off x="6379369" y="219403"/>
+              <a:off x="9351169" y="1407964"/>
               <a:ext cx="284727" cy="116983"/>
             </a:xfrm>
             <a:prstGeom prst="rect">
@@ -17654,8 +18540,8 @@
           </p:nvSpPr>
           <p:spPr>
             <a:xfrm>
-              <a:off x="856421" y="429265"/>
-              <a:ext cx="306000" cy="138256"/>
+              <a:off x="3828221" y="1617826"/>
+              <a:ext cx="305999" cy="138256"/>
             </a:xfrm>
             <a:prstGeom prst="rect">
               <a:avLst/>
@@ -17680,7 +18566,7 @@
           </p:nvSpPr>
           <p:spPr>
             <a:xfrm>
-              <a:off x="867058" y="439901"/>
+              <a:off x="3838858" y="1628462"/>
               <a:ext cx="284727" cy="116983"/>
             </a:xfrm>
             <a:prstGeom prst="rect">
@@ -17706,8 +18592,8 @@
           </p:nvSpPr>
           <p:spPr>
             <a:xfrm>
-              <a:off x="2685802" y="429265"/>
-              <a:ext cx="306000" cy="138256"/>
+              <a:off x="5657602" y="1617826"/>
+              <a:ext cx="305999" cy="138256"/>
             </a:xfrm>
             <a:prstGeom prst="rect">
               <a:avLst/>
@@ -17732,7 +18618,7 @@
           </p:nvSpPr>
           <p:spPr>
             <a:xfrm>
-              <a:off x="2696438" y="439901"/>
+              <a:off x="5668238" y="1628462"/>
               <a:ext cx="284727" cy="116983"/>
             </a:xfrm>
             <a:prstGeom prst="rect">
@@ -17758,7 +18644,7 @@
           </p:nvSpPr>
           <p:spPr>
             <a:xfrm>
-              <a:off x="4596827" y="429265"/>
+              <a:off x="7568627" y="1617826"/>
               <a:ext cx="305999" cy="138256"/>
             </a:xfrm>
             <a:prstGeom prst="rect">
@@ -17784,7 +18670,7 @@
           </p:nvSpPr>
           <p:spPr>
             <a:xfrm>
-              <a:off x="4607464" y="439901"/>
+              <a:off x="7579264" y="1628462"/>
               <a:ext cx="284727" cy="116983"/>
             </a:xfrm>
             <a:prstGeom prst="rect">
@@ -17810,8 +18696,8 @@
           </p:nvSpPr>
           <p:spPr>
             <a:xfrm>
-              <a:off x="6368733" y="429265"/>
-              <a:ext cx="306000" cy="138256"/>
+              <a:off x="9340533" y="1617826"/>
+              <a:ext cx="305999" cy="138256"/>
             </a:xfrm>
             <a:prstGeom prst="rect">
               <a:avLst/>
@@ -17836,7 +18722,7 @@
           </p:nvSpPr>
           <p:spPr>
             <a:xfrm>
-              <a:off x="6379369" y="439901"/>
+              <a:off x="9351169" y="1628462"/>
               <a:ext cx="284727" cy="116983"/>
             </a:xfrm>
             <a:prstGeom prst="rect">
@@ -17862,8 +18748,8 @@
           </p:nvSpPr>
           <p:spPr>
             <a:xfrm>
-              <a:off x="856421" y="649763"/>
-              <a:ext cx="306000" cy="138256"/>
+              <a:off x="3828221" y="1838324"/>
+              <a:ext cx="305999" cy="138256"/>
             </a:xfrm>
             <a:prstGeom prst="rect">
               <a:avLst/>
@@ -17888,7 +18774,7 @@
           </p:nvSpPr>
           <p:spPr>
             <a:xfrm>
-              <a:off x="867058" y="660399"/>
+              <a:off x="3838858" y="1848960"/>
               <a:ext cx="284727" cy="116983"/>
             </a:xfrm>
             <a:prstGeom prst="rect">
@@ -17914,8 +18800,8 @@
           </p:nvSpPr>
           <p:spPr>
             <a:xfrm>
-              <a:off x="2685802" y="649763"/>
-              <a:ext cx="306000" cy="138256"/>
+              <a:off x="5657602" y="1838324"/>
+              <a:ext cx="305999" cy="138256"/>
             </a:xfrm>
             <a:prstGeom prst="rect">
               <a:avLst/>
@@ -17940,7 +18826,7 @@
           </p:nvSpPr>
           <p:spPr>
             <a:xfrm>
-              <a:off x="2696438" y="660399"/>
+              <a:off x="5668238" y="1848960"/>
               <a:ext cx="284727" cy="116983"/>
             </a:xfrm>
             <a:prstGeom prst="rect">
@@ -17966,7 +18852,7 @@
           </p:nvSpPr>
           <p:spPr>
             <a:xfrm>
-              <a:off x="4596827" y="649763"/>
+              <a:off x="7568627" y="1838324"/>
               <a:ext cx="305999" cy="138256"/>
             </a:xfrm>
             <a:prstGeom prst="rect">
@@ -17992,7 +18878,7 @@
           </p:nvSpPr>
           <p:spPr>
             <a:xfrm>
-              <a:off x="4607464" y="660399"/>
+              <a:off x="7579264" y="1848960"/>
               <a:ext cx="284727" cy="116983"/>
             </a:xfrm>
             <a:prstGeom prst="rect">
@@ -18018,7 +18904,7 @@
           </p:nvSpPr>
           <p:spPr>
             <a:xfrm>
-              <a:off x="1244663" y="219089"/>
+              <a:off x="4216463" y="1407651"/>
               <a:ext cx="1268836" cy="111640"/>
             </a:xfrm>
             <a:prstGeom prst="rect">
@@ -18064,7 +18950,7 @@
           </p:nvSpPr>
           <p:spPr>
             <a:xfrm>
-              <a:off x="3074044" y="219089"/>
+              <a:off x="6045844" y="1407651"/>
               <a:ext cx="1440542" cy="111640"/>
             </a:xfrm>
             <a:prstGeom prst="rect">
@@ -18110,7 +18996,7 @@
           </p:nvSpPr>
           <p:spPr>
             <a:xfrm>
-              <a:off x="4985069" y="219089"/>
+              <a:off x="7956869" y="1407651"/>
               <a:ext cx="1178703" cy="111640"/>
             </a:xfrm>
             <a:prstGeom prst="rect">
@@ -18156,7 +19042,7 @@
           </p:nvSpPr>
           <p:spPr>
             <a:xfrm>
-              <a:off x="6756975" y="219089"/>
+              <a:off x="9728775" y="1407651"/>
               <a:ext cx="1358681" cy="111640"/>
             </a:xfrm>
             <a:prstGeom prst="rect">
@@ -18202,7 +19088,7 @@
           </p:nvSpPr>
           <p:spPr>
             <a:xfrm>
-              <a:off x="1244663" y="439587"/>
+              <a:off x="4216463" y="1628149"/>
               <a:ext cx="1358897" cy="111640"/>
             </a:xfrm>
             <a:prstGeom prst="rect">
@@ -18248,7 +19134,7 @@
           </p:nvSpPr>
           <p:spPr>
             <a:xfrm>
-              <a:off x="3074044" y="439587"/>
+              <a:off x="6045844" y="1628149"/>
               <a:ext cx="998510" cy="111640"/>
             </a:xfrm>
             <a:prstGeom prst="rect">
@@ -18294,7 +19180,7 @@
           </p:nvSpPr>
           <p:spPr>
             <a:xfrm>
-              <a:off x="4985069" y="439587"/>
+              <a:off x="7956869" y="1628149"/>
               <a:ext cx="1301422" cy="111640"/>
             </a:xfrm>
             <a:prstGeom prst="rect">
@@ -18340,7 +19226,7 @@
           </p:nvSpPr>
           <p:spPr>
             <a:xfrm>
-              <a:off x="6756975" y="439587"/>
+              <a:off x="9728775" y="1628149"/>
               <a:ext cx="1121300" cy="111640"/>
             </a:xfrm>
             <a:prstGeom prst="rect">
@@ -18386,7 +19272,7 @@
           </p:nvSpPr>
           <p:spPr>
             <a:xfrm>
-              <a:off x="1244663" y="660085"/>
+              <a:off x="4216463" y="1848647"/>
               <a:ext cx="1244091" cy="111640"/>
             </a:xfrm>
             <a:prstGeom prst="rect">
@@ -18432,7 +19318,7 @@
           </p:nvSpPr>
           <p:spPr>
             <a:xfrm>
-              <a:off x="3074044" y="660085"/>
+              <a:off x="6045844" y="1848647"/>
               <a:ext cx="957723" cy="111640"/>
             </a:xfrm>
             <a:prstGeom prst="rect">
@@ -18478,7 +19364,7 @@
           </p:nvSpPr>
           <p:spPr>
             <a:xfrm>
-              <a:off x="4985069" y="660085"/>
+              <a:off x="7956869" y="1848647"/>
               <a:ext cx="613881" cy="111640"/>
             </a:xfrm>
             <a:prstGeom prst="rect">
@@ -18523,12 +19409,6 @@
     <a:masterClrMapping/>
   </p:clrMapOvr>
 </p:sld>
-</file>
-
-<file path=ppt/tags/tag1.xml><?xml version="1.0" encoding="utf-8"?>
-<p:tagLst xmlns:a="http://schemas.openxmlformats.org/drawingml/2006/main" xmlns:r="http://schemas.openxmlformats.org/officeDocument/2006/relationships" xmlns:p="http://schemas.openxmlformats.org/presentationml/2006/main">
-  <p:tag name="_AMO_UNIQUEIDENTIFIER" val="Empty"/>
-</p:tagLst>
 </file>
 
 <file path=ppt/theme/theme1.xml><?xml version="1.0" encoding="utf-8"?>
